--- a/cover-proposals/daiwari/final/final_daiwari_editable.pptx
+++ b/cover-proposals/daiwari/final/final_daiwari_editable.pptx
@@ -2712,7 +2712,7 @@
         <p:spPr>
           <a:xfrm>
             <a:off x="3810000" y="10261600"/>
-            <a:ext cx="6180534" cy="152400"/>
+            <a:ext cx="5549900" cy="152400"/>
           </a:xfrm>
           <a:prstGeom prst="rect">
             <a:avLst/>
@@ -2738,7 +2738,7 @@
                 <a:ea typeface="Yu Gothic" pitchFamily="34" charset="-122"/>
                 <a:cs typeface="Yu Gothic" pitchFamily="34" charset="-120"/>
               </a:rPr>
-              <a:t>台割 完成版（構成確認用・PwC様レビュー10/2反映）— 青ラベル＝改善点／色は台割用（緑＝資源投資・橙＝トレーディング）で表紙3案とは無関係</a:t>
+              <a:t>台割 完成版（構成確認用・PwC様レビュー10/2反映）— 色は台割用（深緑＝資源投資・黄土＝トレーディング）で表紙3案とは無関係</a:t>
             </a:r>
             <a:endParaRPr lang="en-US" sz="660" dirty="0"/>
           </a:p>
@@ -3388,7 +3388,7 @@
           <a:noFill/>
           <a:ln w="25400">
             <a:solidFill>
-              <a:srgbClr val="1D6B73"/>
+              <a:srgbClr val="34494E"/>
             </a:solidFill>
             <a:prstDash val="solid"/>
           </a:ln>
@@ -3409,7 +3409,7 @@
             <a:avLst/>
           </a:prstGeom>
           <a:solidFill>
-            <a:srgbClr val="E8F3F3"/>
+            <a:srgbClr val="EEF1F0"/>
           </a:solidFill>
           <a:ln/>
         </p:spPr>
@@ -3426,7 +3426,7 @@
             <a:r>
               <a:rPr lang="en-US" sz="700" b="1" dirty="0">
                 <a:solidFill>
-                  <a:srgbClr val="1D6B73"/>
+                  <a:srgbClr val="34494E"/>
                 </a:solidFill>
                 <a:latin typeface="Yu Gothic" pitchFamily="34" charset="0"/>
                 <a:ea typeface="Yu Gothic" pitchFamily="34" charset="-122"/>
@@ -3475,7 +3475,7 @@
           <a:noFill/>
           <a:ln w="25400">
             <a:solidFill>
-              <a:srgbClr val="1D6B73"/>
+              <a:srgbClr val="34494E"/>
             </a:solidFill>
             <a:prstDash val="solid"/>
           </a:ln>
@@ -3496,7 +3496,7 @@
             <a:avLst/>
           </a:prstGeom>
           <a:solidFill>
-            <a:srgbClr val="E8F3F3"/>
+            <a:srgbClr val="EEF1F0"/>
           </a:solidFill>
           <a:ln/>
         </p:spPr>
@@ -3513,7 +3513,7 @@
             <a:r>
               <a:rPr lang="en-US" sz="700" b="1" dirty="0">
                 <a:solidFill>
-                  <a:srgbClr val="1D6B73"/>
+                  <a:srgbClr val="34494E"/>
                 </a:solidFill>
                 <a:latin typeface="Yu Gothic" pitchFamily="34" charset="0"/>
                 <a:ea typeface="Yu Gothic" pitchFamily="34" charset="-122"/>
@@ -3562,7 +3562,7 @@
           <a:noFill/>
           <a:ln w="25400">
             <a:solidFill>
-              <a:srgbClr val="1D6B73"/>
+              <a:srgbClr val="34494E"/>
             </a:solidFill>
             <a:prstDash val="solid"/>
           </a:ln>
@@ -3583,7 +3583,7 @@
             <a:avLst/>
           </a:prstGeom>
           <a:solidFill>
-            <a:srgbClr val="E8F3F3"/>
+            <a:srgbClr val="EEF1F0"/>
           </a:solidFill>
           <a:ln/>
         </p:spPr>
@@ -3600,7 +3600,7 @@
             <a:r>
               <a:rPr lang="en-US" sz="700" b="1" dirty="0">
                 <a:solidFill>
-                  <a:srgbClr val="1D6B73"/>
+                  <a:srgbClr val="34494E"/>
                 </a:solidFill>
                 <a:latin typeface="Yu Gothic" pitchFamily="34" charset="0"/>
                 <a:ea typeface="Yu Gothic" pitchFamily="34" charset="-122"/>
@@ -3827,11 +3827,11 @@
             <a:avLst/>
           </a:prstGeom>
           <a:solidFill>
-            <a:srgbClr val="1D6B73"/>
+            <a:srgbClr val="34494E"/>
           </a:solidFill>
           <a:ln w="12700">
             <a:solidFill>
-              <a:srgbClr val="1D6B73"/>
+              <a:srgbClr val="34494E"/>
             </a:solidFill>
             <a:prstDash val="solid"/>
           </a:ln>
@@ -4344,7 +4344,7 @@
             <a:r>
               <a:rPr lang="en-US" sz="800" dirty="0">
                 <a:solidFill>
-                  <a:srgbClr val="1D6B73"/>
+                  <a:srgbClr val="34494E"/>
                 </a:solidFill>
                 <a:latin typeface="Yu Gothic" pitchFamily="34" charset="0"/>
                 <a:ea typeface="Yu Gothic" pitchFamily="34" charset="-122"/>
@@ -4413,7 +4413,7 @@
             <a:avLst/>
           </a:prstGeom>
           <a:solidFill>
-            <a:srgbClr val="1D6B73"/>
+            <a:srgbClr val="34494E"/>
           </a:solidFill>
           <a:ln/>
         </p:spPr>
@@ -4475,7 +4475,7 @@
             <a:avLst/>
           </a:prstGeom>
           <a:solidFill>
-            <a:srgbClr val="9CC58C"/>
+            <a:srgbClr val="B9C2B4"/>
           </a:solidFill>
           <a:ln/>
         </p:spPr>
@@ -4537,7 +4537,7 @@
             <a:avLst/>
           </a:prstGeom>
           <a:solidFill>
-            <a:srgbClr val="ECC27A"/>
+            <a:srgbClr val="D6CBB8"/>
           </a:solidFill>
           <a:ln/>
         </p:spPr>
@@ -4599,7 +4599,7 @@
             <a:avLst/>
           </a:prstGeom>
           <a:solidFill>
-            <a:srgbClr val="E7A98A"/>
+            <a:srgbClr val="CFC4BD"/>
           </a:solidFill>
           <a:ln/>
         </p:spPr>
@@ -4661,7 +4661,7 @@
             <a:avLst/>
           </a:prstGeom>
           <a:solidFill>
-            <a:srgbClr val="8FBCD9"/>
+            <a:srgbClr val="BCC6CB"/>
           </a:solidFill>
           <a:ln/>
         </p:spPr>
@@ -4933,7 +4933,7 @@
             <a:avLst/>
           </a:prstGeom>
           <a:solidFill>
-            <a:srgbClr val="2A6FB0"/>
+            <a:srgbClr val="6D7D86"/>
           </a:solidFill>
           <a:ln/>
         </p:spPr>
@@ -5016,11 +5016,11 @@
             <a:avLst/>
           </a:prstGeom>
           <a:solidFill>
-            <a:srgbClr val="1D6B73"/>
+            <a:srgbClr val="34494E"/>
           </a:solidFill>
           <a:ln w="12700">
             <a:solidFill>
-              <a:srgbClr val="1D6B73"/>
+              <a:srgbClr val="34494E"/>
             </a:solidFill>
             <a:prstDash val="solid"/>
           </a:ln>
@@ -5178,11 +5178,11 @@
             <a:avLst/>
           </a:prstGeom>
           <a:solidFill>
-            <a:srgbClr val="E8F3F3"/>
+            <a:srgbClr val="EEF1F0"/>
           </a:solidFill>
           <a:ln w="12700">
             <a:solidFill>
-              <a:srgbClr val="1D6B73"/>
+              <a:srgbClr val="34494E"/>
             </a:solidFill>
             <a:prstDash val="solid"/>
           </a:ln>
@@ -5220,7 +5220,7 @@
             <a:r>
               <a:rPr lang="en-US" sz="580" dirty="0">
                 <a:solidFill>
-                  <a:srgbClr val="1D6B73"/>
+                  <a:srgbClr val="34494E"/>
                 </a:solidFill>
                 <a:latin typeface="Yu Gothic" pitchFamily="34" charset="0"/>
                 <a:ea typeface="Yu Gothic" pitchFamily="34" charset="-122"/>
@@ -5270,11 +5270,11 @@
             <a:avLst/>
           </a:prstGeom>
           <a:solidFill>
-            <a:srgbClr val="E8F3F3"/>
+            <a:srgbClr val="EEF1F0"/>
           </a:solidFill>
           <a:ln w="12700">
             <a:solidFill>
-              <a:srgbClr val="1D6B73"/>
+              <a:srgbClr val="34494E"/>
             </a:solidFill>
             <a:prstDash val="solid"/>
           </a:ln>
@@ -5312,7 +5312,7 @@
             <a:r>
               <a:rPr lang="en-US" sz="580" dirty="0">
                 <a:solidFill>
-                  <a:srgbClr val="1D6B73"/>
+                  <a:srgbClr val="34494E"/>
                 </a:solidFill>
                 <a:latin typeface="Yu Gothic" pitchFamily="34" charset="0"/>
                 <a:ea typeface="Yu Gothic" pitchFamily="34" charset="-122"/>
@@ -5362,11 +5362,11 @@
             <a:avLst/>
           </a:prstGeom>
           <a:solidFill>
-            <a:srgbClr val="FBF0DD"/>
+            <a:srgbClr val="F5F0E8"/>
           </a:solidFill>
           <a:ln w="12700">
             <a:solidFill>
-              <a:srgbClr val="D08A1E"/>
+              <a:srgbClr val="A88A5C"/>
             </a:solidFill>
             <a:prstDash val="solid"/>
           </a:ln>
@@ -5404,7 +5404,7 @@
             <a:r>
               <a:rPr lang="en-US" sz="580" dirty="0">
                 <a:solidFill>
-                  <a:srgbClr val="D08A1E"/>
+                  <a:srgbClr val="A88A5C"/>
                 </a:solidFill>
                 <a:latin typeface="Yu Gothic" pitchFamily="34" charset="0"/>
                 <a:ea typeface="Yu Gothic" pitchFamily="34" charset="-122"/>
@@ -6025,7 +6025,7 @@
             <a:avLst/>
           </a:prstGeom>
           <a:solidFill>
-            <a:srgbClr val="2A6FB0"/>
+            <a:srgbClr val="6D7D86"/>
           </a:solidFill>
           <a:ln/>
         </p:spPr>
@@ -6189,7 +6189,7 @@
             <a:r>
               <a:rPr lang="en-US" sz="580" dirty="0">
                 <a:solidFill>
-                  <a:srgbClr val="3D3F42"/>
+                  <a:srgbClr val="4A4C4F"/>
                 </a:solidFill>
                 <a:latin typeface="Yu Gothic" pitchFamily="34" charset="0"/>
                 <a:ea typeface="Yu Gothic" pitchFamily="34" charset="-122"/>
@@ -6223,7 +6223,7 @@
             <a:r>
               <a:rPr lang="en-US" sz="580" dirty="0">
                 <a:solidFill>
-                  <a:srgbClr val="B8693A"/>
+                  <a:srgbClr val="9C7360"/>
                 </a:solidFill>
                 <a:latin typeface="Yu Gothic" pitchFamily="34" charset="0"/>
                 <a:ea typeface="Yu Gothic" pitchFamily="34" charset="-122"/>
@@ -6541,7 +6541,7 @@
           <a:noFill/>
           <a:ln w="12700">
             <a:solidFill>
-              <a:srgbClr val="1D6B73"/>
+              <a:srgbClr val="34494E"/>
             </a:solidFill>
             <a:prstDash val="solid"/>
           </a:ln>
@@ -6566,7 +6566,7 @@
           </a:solidFill>
           <a:ln w="25400">
             <a:solidFill>
-              <a:srgbClr val="1D6B73"/>
+              <a:srgbClr val="34494E"/>
             </a:solidFill>
             <a:prstDash val="solid"/>
           </a:ln>
@@ -6602,7 +6602,7 @@
             <a:r>
               <a:rPr lang="en-US" sz="600" b="1" dirty="0">
                 <a:solidFill>
-                  <a:srgbClr val="1D6B73"/>
+                  <a:srgbClr val="34494E"/>
                 </a:solidFill>
                 <a:latin typeface="Yu Gothic" pitchFamily="34" charset="0"/>
                 <a:ea typeface="Yu Gothic" pitchFamily="34" charset="-122"/>
@@ -6622,7 +6622,7 @@
             <a:r>
               <a:rPr lang="en-US" sz="600" b="1" dirty="0">
                 <a:solidFill>
-                  <a:srgbClr val="1D6B73"/>
+                  <a:srgbClr val="34494E"/>
                 </a:solidFill>
                 <a:latin typeface="Yu Gothic" pitchFamily="34" charset="0"/>
                 <a:ea typeface="Yu Gothic" pitchFamily="34" charset="-122"/>
@@ -6653,7 +6653,7 @@
           </a:solidFill>
           <a:ln w="25400">
             <a:solidFill>
-              <a:srgbClr val="1D6B73"/>
+              <a:srgbClr val="34494E"/>
             </a:solidFill>
             <a:prstDash val="solid"/>
           </a:ln>
@@ -6689,7 +6689,7 @@
             <a:r>
               <a:rPr lang="en-US" sz="600" b="1" dirty="0">
                 <a:solidFill>
-                  <a:srgbClr val="1D6B73"/>
+                  <a:srgbClr val="34494E"/>
                 </a:solidFill>
                 <a:latin typeface="Yu Gothic" pitchFamily="34" charset="0"/>
                 <a:ea typeface="Yu Gothic" pitchFamily="34" charset="-122"/>
@@ -6720,7 +6720,7 @@
           </a:solidFill>
           <a:ln w="25400">
             <a:solidFill>
-              <a:srgbClr val="1D6B73"/>
+              <a:srgbClr val="34494E"/>
             </a:solidFill>
             <a:prstDash val="solid"/>
           </a:ln>
@@ -6756,7 +6756,7 @@
             <a:r>
               <a:rPr lang="en-US" sz="600" b="1" dirty="0">
                 <a:solidFill>
-                  <a:srgbClr val="1D6B73"/>
+                  <a:srgbClr val="34494E"/>
                 </a:solidFill>
                 <a:latin typeface="Yu Gothic" pitchFamily="34" charset="0"/>
                 <a:ea typeface="Yu Gothic" pitchFamily="34" charset="-122"/>
@@ -6787,7 +6787,7 @@
           </a:solidFill>
           <a:ln w="25400">
             <a:solidFill>
-              <a:srgbClr val="1D6B73"/>
+              <a:srgbClr val="34494E"/>
             </a:solidFill>
             <a:prstDash val="solid"/>
           </a:ln>
@@ -6823,7 +6823,7 @@
             <a:r>
               <a:rPr lang="en-US" sz="600" b="1" dirty="0">
                 <a:solidFill>
-                  <a:srgbClr val="1D6B73"/>
+                  <a:srgbClr val="34494E"/>
                 </a:solidFill>
                 <a:latin typeface="Yu Gothic" pitchFamily="34" charset="0"/>
                 <a:ea typeface="Yu Gothic" pitchFamily="34" charset="-122"/>
@@ -6843,7 +6843,7 @@
             <a:r>
               <a:rPr lang="en-US" sz="600" b="1" dirty="0">
                 <a:solidFill>
-                  <a:srgbClr val="1D6B73"/>
+                  <a:srgbClr val="34494E"/>
                 </a:solidFill>
                 <a:latin typeface="Yu Gothic" pitchFamily="34" charset="0"/>
                 <a:ea typeface="Yu Gothic" pitchFamily="34" charset="-122"/>
@@ -6874,7 +6874,7 @@
           </a:solidFill>
           <a:ln w="25400">
             <a:solidFill>
-              <a:srgbClr val="1D6B73"/>
+              <a:srgbClr val="34494E"/>
             </a:solidFill>
             <a:prstDash val="solid"/>
           </a:ln>
@@ -6910,7 +6910,7 @@
             <a:r>
               <a:rPr lang="en-US" sz="600" b="1" dirty="0">
                 <a:solidFill>
-                  <a:srgbClr val="1D6B73"/>
+                  <a:srgbClr val="34494E"/>
                 </a:solidFill>
                 <a:latin typeface="Yu Gothic" pitchFamily="34" charset="0"/>
                 <a:ea typeface="Yu Gothic" pitchFamily="34" charset="-122"/>
@@ -6937,7 +6937,7 @@
             <a:avLst/>
           </a:prstGeom>
           <a:solidFill>
-            <a:srgbClr val="E8F3F3"/>
+            <a:srgbClr val="EEF1F0"/>
           </a:solidFill>
           <a:ln/>
         </p:spPr>
@@ -6972,7 +6972,7 @@
             <a:r>
               <a:rPr lang="en-US" sz="740" b="1" dirty="0">
                 <a:solidFill>
-                  <a:srgbClr val="1D6B73"/>
+                  <a:srgbClr val="34494E"/>
                 </a:solidFill>
                 <a:latin typeface="Yu Gothic" pitchFamily="34" charset="0"/>
                 <a:ea typeface="Yu Gothic" pitchFamily="34" charset="-122"/>
@@ -7118,7 +7118,7 @@
             <a:r>
               <a:rPr lang="en-US" sz="740" b="1" dirty="0">
                 <a:solidFill>
-                  <a:srgbClr val="1D6B73"/>
+                  <a:srgbClr val="34494E"/>
                 </a:solidFill>
                 <a:latin typeface="Yu Gothic" pitchFamily="34" charset="0"/>
                 <a:ea typeface="Yu Gothic" pitchFamily="34" charset="-122"/>
@@ -7229,7 +7229,7 @@
             <a:avLst/>
           </a:prstGeom>
           <a:solidFill>
-            <a:srgbClr val="E8F3F3"/>
+            <a:srgbClr val="EEF1F0"/>
           </a:solidFill>
           <a:ln/>
         </p:spPr>
@@ -7264,7 +7264,7 @@
             <a:r>
               <a:rPr lang="en-US" sz="740" b="1" dirty="0">
                 <a:solidFill>
-                  <a:srgbClr val="1D6B73"/>
+                  <a:srgbClr val="34494E"/>
                 </a:solidFill>
                 <a:latin typeface="Yu Gothic" pitchFamily="34" charset="0"/>
                 <a:ea typeface="Yu Gothic" pitchFamily="34" charset="-122"/>
@@ -7410,7 +7410,7 @@
             <a:r>
               <a:rPr lang="en-US" sz="740" b="1" dirty="0">
                 <a:solidFill>
-                  <a:srgbClr val="1D6B73"/>
+                  <a:srgbClr val="34494E"/>
                 </a:solidFill>
                 <a:latin typeface="Yu Gothic" pitchFamily="34" charset="0"/>
                 <a:ea typeface="Yu Gothic" pitchFamily="34" charset="-122"/>
@@ -7521,7 +7521,7 @@
             <a:avLst/>
           </a:prstGeom>
           <a:solidFill>
-            <a:srgbClr val="E8F3F3"/>
+            <a:srgbClr val="EEF1F0"/>
           </a:solidFill>
           <a:ln/>
         </p:spPr>
@@ -7556,7 +7556,7 @@
             <a:r>
               <a:rPr lang="en-US" sz="740" b="1" dirty="0">
                 <a:solidFill>
-                  <a:srgbClr val="1D6B73"/>
+                  <a:srgbClr val="34494E"/>
                 </a:solidFill>
                 <a:latin typeface="Yu Gothic" pitchFamily="34" charset="0"/>
                 <a:ea typeface="Yu Gothic" pitchFamily="34" charset="-122"/>
@@ -7858,7 +7858,7 @@
             <a:avLst/>
           </a:prstGeom>
           <a:solidFill>
-            <a:srgbClr val="1D6B73"/>
+            <a:srgbClr val="34494E"/>
           </a:solidFill>
           <a:ln/>
         </p:spPr>
@@ -7899,7 +7899,7 @@
             <a:avLst/>
           </a:prstGeom>
           <a:solidFill>
-            <a:srgbClr val="D08A1E"/>
+            <a:srgbClr val="A88A5C"/>
           </a:solidFill>
           <a:ln/>
         </p:spPr>
@@ -7940,7 +7940,7 @@
             <a:avLst/>
           </a:prstGeom>
           <a:solidFill>
-            <a:srgbClr val="1D6B73"/>
+            <a:srgbClr val="34494E"/>
           </a:solidFill>
           <a:ln/>
         </p:spPr>
@@ -7981,7 +7981,7 @@
             <a:avLst/>
           </a:prstGeom>
           <a:solidFill>
-            <a:srgbClr val="D08A1E"/>
+            <a:srgbClr val="A88A5C"/>
           </a:solidFill>
           <a:ln/>
         </p:spPr>
@@ -8022,7 +8022,7 @@
             <a:avLst/>
           </a:prstGeom>
           <a:solidFill>
-            <a:srgbClr val="1D6B73"/>
+            <a:srgbClr val="34494E"/>
           </a:solidFill>
           <a:ln/>
         </p:spPr>
@@ -8105,11 +8105,11 @@
             <a:avLst/>
           </a:prstGeom>
           <a:solidFill>
-            <a:srgbClr val="E8F3F3"/>
+            <a:srgbClr val="EEF1F0"/>
           </a:solidFill>
           <a:ln w="12700">
             <a:solidFill>
-              <a:srgbClr val="B7D6D6"/>
+              <a:srgbClr val="CBD3D1"/>
             </a:solidFill>
             <a:prstDash val="solid"/>
           </a:ln>
@@ -8167,7 +8167,7 @@
             <a:r>
               <a:rPr lang="en-US" sz="560" dirty="0">
                 <a:solidFill>
-                  <a:srgbClr val="1D6B73"/>
+                  <a:srgbClr val="34494E"/>
                 </a:solidFill>
                 <a:latin typeface="Yu Gothic" pitchFamily="34" charset="0"/>
                 <a:ea typeface="Yu Gothic" pitchFamily="34" charset="-122"/>
@@ -8218,11 +8218,11 @@
             <a:avLst/>
           </a:prstGeom>
           <a:solidFill>
-            <a:srgbClr val="E8F3F3"/>
+            <a:srgbClr val="EEF1F0"/>
           </a:solidFill>
           <a:ln w="12700">
             <a:solidFill>
-              <a:srgbClr val="B7D6D6"/>
+              <a:srgbClr val="CBD3D1"/>
             </a:solidFill>
             <a:prstDash val="solid"/>
           </a:ln>
@@ -8515,11 +8515,11 @@
             <a:avLst/>
           </a:prstGeom>
           <a:solidFill>
-            <a:srgbClr val="E8F3F3"/>
+            <a:srgbClr val="EEF1F0"/>
           </a:solidFill>
           <a:ln w="12700">
             <a:solidFill>
-              <a:srgbClr val="B7D6D6"/>
+              <a:srgbClr val="CBD3D1"/>
             </a:solidFill>
             <a:prstDash val="solid"/>
           </a:ln>
@@ -8577,7 +8577,7 @@
             <a:r>
               <a:rPr lang="en-US" sz="560" dirty="0">
                 <a:solidFill>
-                  <a:srgbClr val="1D6B73"/>
+                  <a:srgbClr val="34494E"/>
                 </a:solidFill>
                 <a:latin typeface="Yu Gothic" pitchFamily="34" charset="0"/>
                 <a:ea typeface="Yu Gothic" pitchFamily="34" charset="-122"/>
@@ -8628,11 +8628,11 @@
             <a:avLst/>
           </a:prstGeom>
           <a:solidFill>
-            <a:srgbClr val="E8F3F3"/>
+            <a:srgbClr val="EEF1F0"/>
           </a:solidFill>
           <a:ln w="12700">
             <a:solidFill>
-              <a:srgbClr val="B7D6D6"/>
+              <a:srgbClr val="CBD3D1"/>
             </a:solidFill>
             <a:prstDash val="solid"/>
           </a:ln>
@@ -8690,7 +8690,7 @@
             <a:r>
               <a:rPr lang="en-US" sz="560" dirty="0">
                 <a:solidFill>
-                  <a:srgbClr val="1D6B73"/>
+                  <a:srgbClr val="34494E"/>
                 </a:solidFill>
                 <a:latin typeface="Yu Gothic" pitchFamily="34" charset="0"/>
                 <a:ea typeface="Yu Gothic" pitchFamily="34" charset="-122"/>
@@ -8741,11 +8741,11 @@
             <a:avLst/>
           </a:prstGeom>
           <a:solidFill>
-            <a:srgbClr val="FBF0DD"/>
+            <a:srgbClr val="F5F0E8"/>
           </a:solidFill>
           <a:ln w="12700">
             <a:solidFill>
-              <a:srgbClr val="D08A1E"/>
+              <a:srgbClr val="A88A5C"/>
             </a:solidFill>
             <a:prstDash val="solid"/>
           </a:ln>
@@ -8903,11 +8903,11 @@
             <a:avLst/>
           </a:prstGeom>
           <a:solidFill>
-            <a:srgbClr val="FBF0DD"/>
+            <a:srgbClr val="F5F0E8"/>
           </a:solidFill>
           <a:ln w="12700">
             <a:solidFill>
-              <a:srgbClr val="D08A1E"/>
+              <a:srgbClr val="A88A5C"/>
             </a:solidFill>
             <a:prstDash val="solid"/>
           </a:ln>
@@ -9018,7 +9018,7 @@
           <a:noFill/>
           <a:ln w="25400">
             <a:solidFill>
-              <a:srgbClr val="1D6B73"/>
+              <a:srgbClr val="34494E"/>
             </a:solidFill>
             <a:prstDash val="solid"/>
           </a:ln>
@@ -9083,7 +9083,7 @@
           <a:noFill/>
           <a:ln w="25400">
             <a:solidFill>
-              <a:srgbClr val="D08A1E"/>
+              <a:srgbClr val="A88A5C"/>
             </a:solidFill>
             <a:prstDash val="solid"/>
           </a:ln>
@@ -9208,7 +9208,7 @@
             <a:avLst/>
           </a:prstGeom>
           <a:solidFill>
-            <a:srgbClr val="1D6B73"/>
+            <a:srgbClr val="34494E"/>
           </a:solidFill>
           <a:ln/>
         </p:spPr>
@@ -9314,7 +9314,7 @@
             <a:avLst/>
           </a:prstGeom>
           <a:solidFill>
-            <a:srgbClr val="1D6B73"/>
+            <a:srgbClr val="34494E"/>
           </a:solidFill>
           <a:ln/>
         </p:spPr>
@@ -9420,7 +9420,7 @@
             <a:avLst/>
           </a:prstGeom>
           <a:solidFill>
-            <a:srgbClr val="D08A1E"/>
+            <a:srgbClr val="A88A5C"/>
           </a:solidFill>
           <a:ln/>
         </p:spPr>
@@ -9526,7 +9526,7 @@
             <a:avLst/>
           </a:prstGeom>
           <a:solidFill>
-            <a:srgbClr val="1D6B73"/>
+            <a:srgbClr val="34494E"/>
           </a:solidFill>
           <a:ln/>
         </p:spPr>
@@ -9752,7 +9752,7 @@
         <p:spPr>
           <a:xfrm>
             <a:off x="3810000" y="10261600"/>
-            <a:ext cx="6180534" cy="152400"/>
+            <a:ext cx="5549900" cy="152400"/>
           </a:xfrm>
           <a:prstGeom prst="rect">
             <a:avLst/>
@@ -9778,7 +9778,7 @@
                 <a:ea typeface="Yu Gothic" pitchFamily="34" charset="-122"/>
                 <a:cs typeface="Yu Gothic" pitchFamily="34" charset="-120"/>
               </a:rPr>
-              <a:t>台割 完成版（構成確認用・PwC様レビュー10/2反映）— 青ラベル＝改善点／色は台割用（緑＝資源投資・橙＝トレーディング）で表紙3案とは無関係</a:t>
+              <a:t>台割 完成版（構成確認用・PwC様レビュー10/2反映）— 色は台割用（深緑＝資源投資・黄土＝トレーディング）で表紙3案とは無関係</a:t>
             </a:r>
             <a:endParaRPr lang="en-US" sz="660" dirty="0"/>
           </a:p>
@@ -10126,7 +10126,7 @@
             <a:avLst/>
           </a:prstGeom>
           <a:solidFill>
-            <a:srgbClr val="3D3F42"/>
+            <a:srgbClr val="4A4C4F"/>
           </a:solidFill>
           <a:ln/>
         </p:spPr>
@@ -10196,7 +10196,7 @@
             <a:r>
               <a:rPr lang="en-US" sz="640" b="1" spc="80" kern="0" dirty="0">
                 <a:solidFill>
-                  <a:srgbClr val="3D3F42"/>
+                  <a:srgbClr val="4A4C4F"/>
                 </a:solidFill>
                 <a:latin typeface="Yu Gothic" pitchFamily="34" charset="0"/>
                 <a:ea typeface="Yu Gothic" pitchFamily="34" charset="-122"/>
@@ -10238,7 +10238,7 @@
             <a:r>
               <a:rPr lang="en-US" sz="1100" b="1" dirty="0">
                 <a:solidFill>
-                  <a:srgbClr val="3D3F42"/>
+                  <a:srgbClr val="4A4C4F"/>
                 </a:solidFill>
                 <a:latin typeface="Yu Gothic" pitchFamily="34" charset="0"/>
                 <a:ea typeface="Yu Gothic" pitchFamily="34" charset="-122"/>
@@ -10322,7 +10322,7 @@
             <a:r>
               <a:rPr lang="en-US" sz="640" b="1" spc="80" kern="0" dirty="0">
                 <a:solidFill>
-                  <a:srgbClr val="3D3F42"/>
+                  <a:srgbClr val="4A4C4F"/>
                 </a:solidFill>
                 <a:latin typeface="Yu Gothic" pitchFamily="34" charset="0"/>
                 <a:ea typeface="Yu Gothic" pitchFamily="34" charset="-122"/>
@@ -10364,7 +10364,7 @@
             <a:r>
               <a:rPr lang="en-US" sz="1100" b="1" dirty="0">
                 <a:solidFill>
-                  <a:srgbClr val="3D3F42"/>
+                  <a:srgbClr val="4A4C4F"/>
                 </a:solidFill>
                 <a:latin typeface="Yu Gothic" pitchFamily="34" charset="0"/>
                 <a:ea typeface="Yu Gothic" pitchFamily="34" charset="-122"/>
@@ -10448,7 +10448,7 @@
             <a:r>
               <a:rPr lang="en-US" sz="640" b="1" spc="80" kern="0" dirty="0">
                 <a:solidFill>
-                  <a:srgbClr val="3D3F42"/>
+                  <a:srgbClr val="4A4C4F"/>
                 </a:solidFill>
                 <a:latin typeface="Yu Gothic" pitchFamily="34" charset="0"/>
                 <a:ea typeface="Yu Gothic" pitchFamily="34" charset="-122"/>
@@ -10490,7 +10490,7 @@
             <a:r>
               <a:rPr lang="en-US" sz="1100" b="1" dirty="0">
                 <a:solidFill>
-                  <a:srgbClr val="3D3F42"/>
+                  <a:srgbClr val="4A4C4F"/>
                 </a:solidFill>
                 <a:latin typeface="Yu Gothic" pitchFamily="34" charset="0"/>
                 <a:ea typeface="Yu Gothic" pitchFamily="34" charset="-122"/>
@@ -10559,7 +10559,7 @@
             <a:avLst/>
           </a:prstGeom>
           <a:solidFill>
-            <a:srgbClr val="F7EBE2"/>
+            <a:srgbClr val="F4EEEA"/>
           </a:solidFill>
           <a:ln/>
         </p:spPr>
@@ -10579,7 +10579,7 @@
             <a:avLst/>
           </a:prstGeom>
           <a:solidFill>
-            <a:srgbClr val="B8693A"/>
+            <a:srgbClr val="9C7360"/>
           </a:solidFill>
           <a:ln/>
         </p:spPr>
@@ -10649,7 +10649,7 @@
             <a:r>
               <a:rPr lang="en-US" sz="640" b="1" spc="80" kern="0" dirty="0">
                 <a:solidFill>
-                  <a:srgbClr val="B8693A"/>
+                  <a:srgbClr val="9C7360"/>
                 </a:solidFill>
                 <a:latin typeface="Yu Gothic" pitchFamily="34" charset="0"/>
                 <a:ea typeface="Yu Gothic" pitchFamily="34" charset="-122"/>
@@ -10691,7 +10691,7 @@
             <a:r>
               <a:rPr lang="en-US" sz="1100" b="1" dirty="0">
                 <a:solidFill>
-                  <a:srgbClr val="B8693A"/>
+                  <a:srgbClr val="9C7360"/>
                 </a:solidFill>
                 <a:latin typeface="Yu Gothic" pitchFamily="34" charset="0"/>
                 <a:ea typeface="Yu Gothic" pitchFamily="34" charset="-122"/>
@@ -10775,7 +10775,7 @@
             <a:r>
               <a:rPr lang="en-US" sz="640" b="1" spc="80" kern="0" dirty="0">
                 <a:solidFill>
-                  <a:srgbClr val="B8693A"/>
+                  <a:srgbClr val="9C7360"/>
                 </a:solidFill>
                 <a:latin typeface="Yu Gothic" pitchFamily="34" charset="0"/>
                 <a:ea typeface="Yu Gothic" pitchFamily="34" charset="-122"/>
@@ -10817,7 +10817,7 @@
             <a:r>
               <a:rPr lang="en-US" sz="1100" b="1" dirty="0">
                 <a:solidFill>
-                  <a:srgbClr val="B8693A"/>
+                  <a:srgbClr val="9C7360"/>
                 </a:solidFill>
                 <a:latin typeface="Yu Gothic" pitchFamily="34" charset="0"/>
                 <a:ea typeface="Yu Gothic" pitchFamily="34" charset="-122"/>
@@ -10901,7 +10901,7 @@
             <a:r>
               <a:rPr lang="en-US" sz="640" b="1" spc="80" kern="0" dirty="0">
                 <a:solidFill>
-                  <a:srgbClr val="B8693A"/>
+                  <a:srgbClr val="9C7360"/>
                 </a:solidFill>
                 <a:latin typeface="Yu Gothic" pitchFamily="34" charset="0"/>
                 <a:ea typeface="Yu Gothic" pitchFamily="34" charset="-122"/>
@@ -10943,7 +10943,7 @@
             <a:r>
               <a:rPr lang="en-US" sz="1100" b="1" dirty="0">
                 <a:solidFill>
-                  <a:srgbClr val="B8693A"/>
+                  <a:srgbClr val="9C7360"/>
                 </a:solidFill>
                 <a:latin typeface="Yu Gothic" pitchFamily="34" charset="0"/>
                 <a:ea typeface="Yu Gothic" pitchFamily="34" charset="-122"/>
@@ -11245,7 +11245,7 @@
             <a:avLst/>
           </a:prstGeom>
           <a:solidFill>
-            <a:srgbClr val="E8F3F3"/>
+            <a:srgbClr val="EEF1F0"/>
           </a:solidFill>
           <a:ln/>
         </p:spPr>
@@ -11311,7 +11311,7 @@
             </a:avLst>
           </a:prstGeom>
           <a:solidFill>
-            <a:srgbClr val="1D6B73"/>
+            <a:srgbClr val="34494E"/>
           </a:solidFill>
           <a:ln/>
         </p:spPr>
@@ -11394,7 +11394,7 @@
             <a:avLst/>
           </a:prstGeom>
           <a:solidFill>
-            <a:srgbClr val="E8F3F3"/>
+            <a:srgbClr val="EEF1F0"/>
           </a:solidFill>
           <a:ln/>
         </p:spPr>
@@ -11460,7 +11460,7 @@
             </a:avLst>
           </a:prstGeom>
           <a:solidFill>
-            <a:srgbClr val="1D6B73"/>
+            <a:srgbClr val="34494E"/>
           </a:solidFill>
           <a:ln/>
         </p:spPr>
@@ -11543,7 +11543,7 @@
             <a:avLst/>
           </a:prstGeom>
           <a:solidFill>
-            <a:srgbClr val="E8F3F3"/>
+            <a:srgbClr val="EEF1F0"/>
           </a:solidFill>
           <a:ln/>
         </p:spPr>
@@ -11609,7 +11609,7 @@
             </a:avLst>
           </a:prstGeom>
           <a:solidFill>
-            <a:srgbClr val="1D6B73"/>
+            <a:srgbClr val="34494E"/>
           </a:solidFill>
           <a:ln/>
         </p:spPr>
@@ -11692,7 +11692,7 @@
             <a:avLst/>
           </a:prstGeom>
           <a:solidFill>
-            <a:srgbClr val="E8F3F3"/>
+            <a:srgbClr val="EEF1F0"/>
           </a:solidFill>
           <a:ln/>
         </p:spPr>
@@ -11758,7 +11758,7 @@
             </a:avLst>
           </a:prstGeom>
           <a:solidFill>
-            <a:srgbClr val="1D6B73"/>
+            <a:srgbClr val="34494E"/>
           </a:solidFill>
           <a:ln/>
         </p:spPr>
@@ -12075,7 +12075,7 @@
             <a:avLst/>
           </a:prstGeom>
           <a:solidFill>
-            <a:srgbClr val="1D6B73"/>
+            <a:srgbClr val="34494E"/>
           </a:solidFill>
           <a:ln/>
         </p:spPr>
@@ -12181,11 +12181,11 @@
             <a:avLst/>
           </a:prstGeom>
           <a:solidFill>
-            <a:srgbClr val="E8F3F3"/>
+            <a:srgbClr val="EEF1F0"/>
           </a:solidFill>
           <a:ln w="12700">
             <a:solidFill>
-              <a:srgbClr val="1D6B73"/>
+              <a:srgbClr val="34494E"/>
             </a:solidFill>
             <a:prstDash val="solid"/>
           </a:ln>
@@ -12403,7 +12403,7 @@
             <a:avLst/>
           </a:prstGeom>
           <a:solidFill>
-            <a:srgbClr val="3D3F42"/>
+            <a:srgbClr val="4A4C4F"/>
           </a:solidFill>
           <a:ln/>
         </p:spPr>
@@ -12467,7 +12467,7 @@
             <a:avLst/>
           </a:prstGeom>
           <a:solidFill>
-            <a:srgbClr val="1D6B73"/>
+            <a:srgbClr val="34494E"/>
           </a:solidFill>
           <a:ln/>
         </p:spPr>
@@ -12550,7 +12550,7 @@
             <a:avLst/>
           </a:prstGeom>
           <a:solidFill>
-            <a:srgbClr val="1D6B73"/>
+            <a:srgbClr val="34494E"/>
           </a:solidFill>
           <a:ln/>
         </p:spPr>
@@ -12633,7 +12633,7 @@
             <a:avLst/>
           </a:prstGeom>
           <a:solidFill>
-            <a:srgbClr val="1D6B73"/>
+            <a:srgbClr val="34494E"/>
           </a:solidFill>
           <a:ln/>
         </p:spPr>
@@ -12716,7 +12716,7 @@
             <a:avLst/>
           </a:prstGeom>
           <a:solidFill>
-            <a:srgbClr val="1D6B73"/>
+            <a:srgbClr val="34494E"/>
           </a:solidFill>
           <a:ln/>
         </p:spPr>
@@ -12799,7 +12799,7 @@
             <a:avLst/>
           </a:prstGeom>
           <a:solidFill>
-            <a:srgbClr val="1D6B73"/>
+            <a:srgbClr val="34494E"/>
           </a:solidFill>
           <a:ln/>
         </p:spPr>
@@ -14084,7 +14084,7 @@
             <a:avLst/>
           </a:prstGeom>
           <a:solidFill>
-            <a:srgbClr val="B8693A"/>
+            <a:srgbClr val="9C7360"/>
           </a:solidFill>
           <a:ln/>
         </p:spPr>
@@ -14125,7 +14125,7 @@
             <a:avLst/>
           </a:prstGeom>
           <a:solidFill>
-            <a:srgbClr val="B8693A"/>
+            <a:srgbClr val="9C7360"/>
           </a:solidFill>
           <a:ln/>
         </p:spPr>
@@ -14166,7 +14166,7 @@
             <a:avLst/>
           </a:prstGeom>
           <a:solidFill>
-            <a:srgbClr val="B8693A"/>
+            <a:srgbClr val="9C7360"/>
           </a:solidFill>
           <a:ln/>
         </p:spPr>
@@ -14207,7 +14207,7 @@
             <a:avLst/>
           </a:prstGeom>
           <a:solidFill>
-            <a:srgbClr val="B8693A"/>
+            <a:srgbClr val="9C7360"/>
           </a:solidFill>
           <a:ln/>
         </p:spPr>
@@ -14248,7 +14248,7 @@
             <a:avLst/>
           </a:prstGeom>
           <a:solidFill>
-            <a:srgbClr val="B8693A"/>
+            <a:srgbClr val="9C7360"/>
           </a:solidFill>
           <a:ln/>
         </p:spPr>
@@ -14289,7 +14289,7 @@
             <a:avLst/>
           </a:prstGeom>
           <a:solidFill>
-            <a:srgbClr val="F7EBE2"/>
+            <a:srgbClr val="F4EEEA"/>
           </a:solidFill>
           <a:ln/>
         </p:spPr>
@@ -14333,7 +14333,7 @@
             <a:avLst/>
           </a:prstGeom>
           <a:solidFill>
-            <a:srgbClr val="F7EBE2"/>
+            <a:srgbClr val="F4EEEA"/>
           </a:solidFill>
           <a:ln/>
         </p:spPr>
@@ -14377,7 +14377,7 @@
             <a:avLst/>
           </a:prstGeom>
           <a:solidFill>
-            <a:srgbClr val="F7EBE2"/>
+            <a:srgbClr val="F4EEEA"/>
           </a:solidFill>
           <a:ln/>
         </p:spPr>
@@ -14421,7 +14421,7 @@
             <a:avLst/>
           </a:prstGeom>
           <a:solidFill>
-            <a:srgbClr val="F7EBE2"/>
+            <a:srgbClr val="F4EEEA"/>
           </a:solidFill>
           <a:ln/>
         </p:spPr>
@@ -14465,7 +14465,7 @@
             <a:avLst/>
           </a:prstGeom>
           <a:solidFill>
-            <a:srgbClr val="F7EBE2"/>
+            <a:srgbClr val="F4EEEA"/>
           </a:solidFill>
           <a:ln/>
         </p:spPr>
@@ -14719,7 +14719,7 @@
             <a:avLst/>
           </a:prstGeom>
           <a:solidFill>
-            <a:srgbClr val="F7EBE2"/>
+            <a:srgbClr val="F4EEEA"/>
           </a:solidFill>
           <a:ln/>
         </p:spPr>
@@ -14763,7 +14763,7 @@
             <a:avLst/>
           </a:prstGeom>
           <a:solidFill>
-            <a:srgbClr val="F7EBE2"/>
+            <a:srgbClr val="F4EEEA"/>
           </a:solidFill>
           <a:ln/>
         </p:spPr>
@@ -14807,7 +14807,7 @@
             <a:avLst/>
           </a:prstGeom>
           <a:solidFill>
-            <a:srgbClr val="F7EBE2"/>
+            <a:srgbClr val="F4EEEA"/>
           </a:solidFill>
           <a:ln/>
         </p:spPr>
@@ -14851,7 +14851,7 @@
             <a:avLst/>
           </a:prstGeom>
           <a:solidFill>
-            <a:srgbClr val="F7EBE2"/>
+            <a:srgbClr val="F4EEEA"/>
           </a:solidFill>
           <a:ln/>
         </p:spPr>
@@ -14895,7 +14895,7 @@
             <a:avLst/>
           </a:prstGeom>
           <a:solidFill>
-            <a:srgbClr val="F7EBE2"/>
+            <a:srgbClr val="F4EEEA"/>
           </a:solidFill>
           <a:ln/>
         </p:spPr>
@@ -15149,7 +15149,7 @@
             <a:avLst/>
           </a:prstGeom>
           <a:solidFill>
-            <a:srgbClr val="F7EBE2"/>
+            <a:srgbClr val="F4EEEA"/>
           </a:solidFill>
           <a:ln/>
         </p:spPr>
@@ -15193,7 +15193,7 @@
             <a:avLst/>
           </a:prstGeom>
           <a:solidFill>
-            <a:srgbClr val="F7EBE2"/>
+            <a:srgbClr val="F4EEEA"/>
           </a:solidFill>
           <a:ln/>
         </p:spPr>
@@ -15237,7 +15237,7 @@
             <a:avLst/>
           </a:prstGeom>
           <a:solidFill>
-            <a:srgbClr val="F7EBE2"/>
+            <a:srgbClr val="F4EEEA"/>
           </a:solidFill>
           <a:ln/>
         </p:spPr>
@@ -15281,7 +15281,7 @@
             <a:avLst/>
           </a:prstGeom>
           <a:solidFill>
-            <a:srgbClr val="F7EBE2"/>
+            <a:srgbClr val="F4EEEA"/>
           </a:solidFill>
           <a:ln/>
         </p:spPr>
@@ -15325,7 +15325,7 @@
             <a:avLst/>
           </a:prstGeom>
           <a:solidFill>
-            <a:srgbClr val="F7EBE2"/>
+            <a:srgbClr val="F4EEEA"/>
           </a:solidFill>
           <a:ln/>
         </p:spPr>
@@ -15579,7 +15579,7 @@
             <a:avLst/>
           </a:prstGeom>
           <a:solidFill>
-            <a:srgbClr val="F7EBE2"/>
+            <a:srgbClr val="F4EEEA"/>
           </a:solidFill>
           <a:ln/>
         </p:spPr>
@@ -15623,7 +15623,7 @@
             <a:avLst/>
           </a:prstGeom>
           <a:solidFill>
-            <a:srgbClr val="F7EBE2"/>
+            <a:srgbClr val="F4EEEA"/>
           </a:solidFill>
           <a:ln/>
         </p:spPr>
@@ -15667,7 +15667,7 @@
             <a:avLst/>
           </a:prstGeom>
           <a:solidFill>
-            <a:srgbClr val="F7EBE2"/>
+            <a:srgbClr val="F4EEEA"/>
           </a:solidFill>
           <a:ln/>
         </p:spPr>
@@ -15711,7 +15711,7 @@
             <a:avLst/>
           </a:prstGeom>
           <a:solidFill>
-            <a:srgbClr val="F7EBE2"/>
+            <a:srgbClr val="F4EEEA"/>
           </a:solidFill>
           <a:ln/>
         </p:spPr>
@@ -15755,7 +15755,7 @@
             <a:avLst/>
           </a:prstGeom>
           <a:solidFill>
-            <a:srgbClr val="F7EBE2"/>
+            <a:srgbClr val="F4EEEA"/>
           </a:solidFill>
           <a:ln/>
         </p:spPr>
@@ -15967,7 +15967,7 @@
             <a:avLst/>
           </a:prstGeom>
           <a:solidFill>
-            <a:srgbClr val="CDD5D8"/>
+            <a:srgbClr val="D9DCDC"/>
           </a:solidFill>
           <a:ln/>
         </p:spPr>
@@ -16113,7 +16113,7 @@
             <a:avLst/>
           </a:prstGeom>
           <a:solidFill>
-            <a:srgbClr val="CDD5D8"/>
+            <a:srgbClr val="D9DCDC"/>
           </a:solidFill>
           <a:ln/>
         </p:spPr>
@@ -16259,7 +16259,7 @@
             <a:avLst/>
           </a:prstGeom>
           <a:solidFill>
-            <a:srgbClr val="CDD5D8"/>
+            <a:srgbClr val="D9DCDC"/>
           </a:solidFill>
           <a:ln/>
         </p:spPr>
@@ -16405,7 +16405,7 @@
             <a:avLst/>
           </a:prstGeom>
           <a:solidFill>
-            <a:srgbClr val="CDD5D8"/>
+            <a:srgbClr val="D9DCDC"/>
           </a:solidFill>
           <a:ln/>
         </p:spPr>
@@ -16551,7 +16551,7 @@
             <a:avLst/>
           </a:prstGeom>
           <a:solidFill>
-            <a:srgbClr val="CDD5D8"/>
+            <a:srgbClr val="D9DCDC"/>
           </a:solidFill>
           <a:ln/>
         </p:spPr>
@@ -16697,7 +16697,7 @@
             <a:avLst/>
           </a:prstGeom>
           <a:solidFill>
-            <a:srgbClr val="CDD5D8"/>
+            <a:srgbClr val="D9DCDC"/>
           </a:solidFill>
           <a:ln/>
         </p:spPr>
@@ -16843,7 +16843,7 @@
             <a:avLst/>
           </a:prstGeom>
           <a:solidFill>
-            <a:srgbClr val="CDD5D8"/>
+            <a:srgbClr val="D9DCDC"/>
           </a:solidFill>
           <a:ln/>
         </p:spPr>
@@ -16989,7 +16989,7 @@
             <a:avLst/>
           </a:prstGeom>
           <a:solidFill>
-            <a:srgbClr val="CDD5D8"/>
+            <a:srgbClr val="D9DCDC"/>
           </a:solidFill>
           <a:ln/>
         </p:spPr>
@@ -17135,7 +17135,7 @@
             <a:avLst/>
           </a:prstGeom>
           <a:solidFill>
-            <a:srgbClr val="CDD5D8"/>
+            <a:srgbClr val="D9DCDC"/>
           </a:solidFill>
           <a:ln/>
         </p:spPr>
@@ -17281,7 +17281,7 @@
             <a:avLst/>
           </a:prstGeom>
           <a:solidFill>
-            <a:srgbClr val="CDD5D8"/>
+            <a:srgbClr val="D9DCDC"/>
           </a:solidFill>
           <a:ln/>
         </p:spPr>
@@ -17427,7 +17427,7 @@
             <a:avLst/>
           </a:prstGeom>
           <a:solidFill>
-            <a:srgbClr val="CDD5D8"/>
+            <a:srgbClr val="D9DCDC"/>
           </a:solidFill>
           <a:ln/>
         </p:spPr>
@@ -17573,7 +17573,7 @@
             <a:avLst/>
           </a:prstGeom>
           <a:solidFill>
-            <a:srgbClr val="CDD5D8"/>
+            <a:srgbClr val="D9DCDC"/>
           </a:solidFill>
           <a:ln/>
         </p:spPr>
@@ -17719,7 +17719,7 @@
             <a:avLst/>
           </a:prstGeom>
           <a:solidFill>
-            <a:srgbClr val="B8693A"/>
+            <a:srgbClr val="9C7360"/>
           </a:solidFill>
           <a:ln/>
         </p:spPr>
@@ -17781,7 +17781,7 @@
             <a:avLst/>
           </a:prstGeom>
           <a:solidFill>
-            <a:srgbClr val="B8693A"/>
+            <a:srgbClr val="9C7360"/>
           </a:solidFill>
           <a:ln/>
         </p:spPr>
@@ -17984,7 +17984,7 @@
         <p:spPr>
           <a:xfrm>
             <a:off x="3810000" y="10261600"/>
-            <a:ext cx="6180534" cy="152400"/>
+            <a:ext cx="5549900" cy="152400"/>
           </a:xfrm>
           <a:prstGeom prst="rect">
             <a:avLst/>
@@ -18010,7 +18010,7 @@
                 <a:ea typeface="Yu Gothic" pitchFamily="34" charset="-122"/>
                 <a:cs typeface="Yu Gothic" pitchFamily="34" charset="-120"/>
               </a:rPr>
-              <a:t>台割 完成版（構成確認用・PwC様レビュー10/2反映）— 青ラベル＝改善点／色は台割用（緑＝資源投資・橙＝トレーディング）で表紙3案とは無関係</a:t>
+              <a:t>台割 完成版（構成確認用・PwC様レビュー10/2反映）— 色は台割用（深緑＝資源投資・黄土＝トレーディング）で表紙3案とは無関係</a:t>
             </a:r>
             <a:endParaRPr lang="en-US" sz="660" dirty="0"/>
           </a:p>
@@ -18659,7 +18659,7 @@
             </a:avLst>
           </a:prstGeom>
           <a:solidFill>
-            <a:srgbClr val="D08A1E"/>
+            <a:srgbClr val="A88A5C"/>
           </a:solidFill>
           <a:ln/>
         </p:spPr>
@@ -18723,11 +18723,11 @@
             <a:avLst/>
           </a:prstGeom>
           <a:solidFill>
-            <a:srgbClr val="E8F3F3"/>
+            <a:srgbClr val="EEF1F0"/>
           </a:solidFill>
           <a:ln w="12700">
             <a:solidFill>
-              <a:srgbClr val="1D6B73"/>
+              <a:srgbClr val="34494E"/>
             </a:solidFill>
             <a:prstDash val="solid"/>
           </a:ln>
@@ -18792,11 +18792,11 @@
             <a:avLst/>
           </a:prstGeom>
           <a:solidFill>
-            <a:srgbClr val="E8F3F3"/>
+            <a:srgbClr val="EEF1F0"/>
           </a:solidFill>
           <a:ln w="12700">
             <a:solidFill>
-              <a:srgbClr val="1D6B73"/>
+              <a:srgbClr val="34494E"/>
             </a:solidFill>
             <a:prstDash val="solid"/>
           </a:ln>
@@ -18861,11 +18861,11 @@
             <a:avLst/>
           </a:prstGeom>
           <a:solidFill>
-            <a:srgbClr val="E8F3F3"/>
+            <a:srgbClr val="EEF1F0"/>
           </a:solidFill>
           <a:ln w="12700">
             <a:solidFill>
-              <a:srgbClr val="1D6B73"/>
+              <a:srgbClr val="34494E"/>
             </a:solidFill>
             <a:prstDash val="solid"/>
           </a:ln>
@@ -18930,11 +18930,11 @@
             <a:avLst/>
           </a:prstGeom>
           <a:solidFill>
-            <a:srgbClr val="E8F3F3"/>
+            <a:srgbClr val="EEF1F0"/>
           </a:solidFill>
           <a:ln w="12700">
             <a:solidFill>
-              <a:srgbClr val="1D6B73"/>
+              <a:srgbClr val="34494E"/>
             </a:solidFill>
             <a:prstDash val="solid"/>
           </a:ln>
@@ -19416,7 +19416,7 @@
             <a:r>
               <a:rPr lang="en-US" sz="640" b="1" dirty="0">
                 <a:solidFill>
-                  <a:srgbClr val="1D6B73"/>
+                  <a:srgbClr val="34494E"/>
                 </a:solidFill>
                 <a:latin typeface="Yu Gothic" pitchFamily="34" charset="0"/>
                 <a:ea typeface="Yu Gothic" pitchFamily="34" charset="-122"/>
@@ -19458,7 +19458,7 @@
             <a:r>
               <a:rPr lang="en-US" sz="640" b="1" dirty="0">
                 <a:solidFill>
-                  <a:srgbClr val="D08A1E"/>
+                  <a:srgbClr val="A88A5C"/>
                 </a:solidFill>
                 <a:latin typeface="Yu Gothic" pitchFamily="34" charset="0"/>
                 <a:ea typeface="Yu Gothic" pitchFamily="34" charset="-122"/>
@@ -19635,7 +19635,7 @@
             <a:avLst/>
           </a:prstGeom>
           <a:solidFill>
-            <a:srgbClr val="FBF0DD"/>
+            <a:srgbClr val="F5F0E8"/>
           </a:solidFill>
           <a:ln/>
         </p:spPr>
@@ -19742,7 +19742,7 @@
             <a:avLst/>
           </a:prstGeom>
           <a:solidFill>
-            <a:srgbClr val="FBF0DD"/>
+            <a:srgbClr val="F5F0E8"/>
           </a:solidFill>
           <a:ln/>
         </p:spPr>
@@ -19849,7 +19849,7 @@
             <a:avLst/>
           </a:prstGeom>
           <a:solidFill>
-            <a:srgbClr val="FBF0DD"/>
+            <a:srgbClr val="F5F0E8"/>
           </a:solidFill>
           <a:ln/>
         </p:spPr>
@@ -19956,7 +19956,7 @@
             <a:avLst/>
           </a:prstGeom>
           <a:solidFill>
-            <a:srgbClr val="FBF0DD"/>
+            <a:srgbClr val="F5F0E8"/>
           </a:solidFill>
           <a:ln/>
         </p:spPr>
@@ -20081,7 +20081,7 @@
             <a:avLst/>
           </a:prstGeom>
           <a:solidFill>
-            <a:srgbClr val="1D6B73"/>
+            <a:srgbClr val="34494E"/>
           </a:solidFill>
           <a:ln/>
         </p:spPr>
@@ -20187,7 +20187,7 @@
             <a:avLst/>
           </a:prstGeom>
           <a:solidFill>
-            <a:srgbClr val="D08A1E"/>
+            <a:srgbClr val="A88A5C"/>
           </a:solidFill>
           <a:ln/>
         </p:spPr>
@@ -20359,7 +20359,7 @@
           <a:noFill/>
           <a:ln w="12700">
             <a:solidFill>
-              <a:srgbClr val="1D6B73"/>
+              <a:srgbClr val="34494E"/>
             </a:solidFill>
             <a:prstDash val="dash"/>
           </a:ln>
@@ -20395,7 +20395,7 @@
             <a:r>
               <a:rPr lang="en-US" sz="680" b="1" dirty="0">
                 <a:solidFill>
-                  <a:srgbClr val="1D6B73"/>
+                  <a:srgbClr val="34494E"/>
                 </a:solidFill>
                 <a:latin typeface="Yu Gothic" pitchFamily="34" charset="0"/>
                 <a:ea typeface="Yu Gothic" pitchFamily="34" charset="-122"/>
@@ -20899,7 +20899,7 @@
             <a:avLst/>
           </a:prstGeom>
           <a:solidFill>
-            <a:srgbClr val="F2F7F8"/>
+            <a:srgbClr val="F7F8F7"/>
           </a:solidFill>
           <a:ln/>
         </p:spPr>
@@ -20943,7 +20943,7 @@
             <a:avLst/>
           </a:prstGeom>
           <a:solidFill>
-            <a:srgbClr val="9A3B2E"/>
+            <a:srgbClr val="7A5048"/>
           </a:solidFill>
           <a:ln w="12700">
             <a:solidFill>
@@ -20968,7 +20968,7 @@
             <a:avLst/>
           </a:prstGeom>
           <a:solidFill>
-            <a:srgbClr val="9A3B2E"/>
+            <a:srgbClr val="7A5048"/>
           </a:solidFill>
           <a:ln w="12700">
             <a:solidFill>
@@ -20993,7 +20993,7 @@
             <a:avLst/>
           </a:prstGeom>
           <a:solidFill>
-            <a:srgbClr val="9A3B2E"/>
+            <a:srgbClr val="7A5048"/>
           </a:solidFill>
           <a:ln w="12700">
             <a:solidFill>
@@ -21018,7 +21018,7 @@
             <a:avLst/>
           </a:prstGeom>
           <a:solidFill>
-            <a:srgbClr val="3D3F42"/>
+            <a:srgbClr val="4A4C4F"/>
           </a:solidFill>
           <a:ln w="12700">
             <a:solidFill>
@@ -21043,7 +21043,7 @@
             <a:avLst/>
           </a:prstGeom>
           <a:solidFill>
-            <a:srgbClr val="C4733F"/>
+            <a:srgbClr val="9C7360"/>
           </a:solidFill>
           <a:ln w="12700">
             <a:solidFill>
@@ -21068,7 +21068,7 @@
             <a:avLst/>
           </a:prstGeom>
           <a:solidFill>
-            <a:srgbClr val="C4733F"/>
+            <a:srgbClr val="9C7360"/>
           </a:solidFill>
           <a:ln w="12700">
             <a:solidFill>
@@ -21093,7 +21093,7 @@
             <a:avLst/>
           </a:prstGeom>
           <a:solidFill>
-            <a:srgbClr val="C4733F"/>
+            <a:srgbClr val="9C7360"/>
           </a:solidFill>
           <a:ln w="12700">
             <a:solidFill>
@@ -21118,7 +21118,7 @@
             <a:avLst/>
           </a:prstGeom>
           <a:solidFill>
-            <a:srgbClr val="C4733F"/>
+            <a:srgbClr val="9C7360"/>
           </a:solidFill>
           <a:ln w="12700">
             <a:solidFill>
@@ -21143,7 +21143,7 @@
             <a:avLst/>
           </a:prstGeom>
           <a:solidFill>
-            <a:srgbClr val="C4733F"/>
+            <a:srgbClr val="9C7360"/>
           </a:solidFill>
           <a:ln w="12700">
             <a:solidFill>
@@ -21168,7 +21168,7 @@
             <a:avLst/>
           </a:prstGeom>
           <a:solidFill>
-            <a:srgbClr val="C4733F"/>
+            <a:srgbClr val="9C7360"/>
           </a:solidFill>
           <a:ln w="12700">
             <a:solidFill>
@@ -21193,7 +21193,7 @@
             <a:avLst/>
           </a:prstGeom>
           <a:solidFill>
-            <a:srgbClr val="C4733F"/>
+            <a:srgbClr val="9C7360"/>
           </a:solidFill>
           <a:ln w="12700">
             <a:solidFill>
@@ -21218,7 +21218,7 @@
             <a:avLst/>
           </a:prstGeom>
           <a:solidFill>
-            <a:srgbClr val="5B8A96"/>
+            <a:srgbClr val="6F8790"/>
           </a:solidFill>
           <a:ln w="12700">
             <a:solidFill>
@@ -21243,7 +21243,7 @@
             <a:avLst/>
           </a:prstGeom>
           <a:solidFill>
-            <a:srgbClr val="5B8A96"/>
+            <a:srgbClr val="6F8790"/>
           </a:solidFill>
           <a:ln w="12700">
             <a:solidFill>
@@ -21268,7 +21268,7 @@
             <a:avLst/>
           </a:prstGeom>
           <a:solidFill>
-            <a:srgbClr val="8A6FC2"/>
+            <a:srgbClr val="857D97"/>
           </a:solidFill>
           <a:ln w="12700">
             <a:solidFill>
@@ -21293,7 +21293,7 @@
             <a:avLst/>
           </a:prstGeom>
           <a:solidFill>
-            <a:srgbClr val="C9A15E"/>
+            <a:srgbClr val="B29F7E"/>
           </a:solidFill>
           <a:ln w="12700">
             <a:solidFill>
@@ -21318,7 +21318,7 @@
             <a:avLst/>
           </a:prstGeom>
           <a:solidFill>
-            <a:srgbClr val="8FA3B3"/>
+            <a:srgbClr val="9AA6AD"/>
           </a:solidFill>
           <a:ln w="12700">
             <a:solidFill>
@@ -21343,7 +21343,7 @@
             <a:avLst/>
           </a:prstGeom>
           <a:solidFill>
-            <a:srgbClr val="6EA25A"/>
+            <a:srgbClr val="7D9180"/>
           </a:solidFill>
           <a:ln w="12700">
             <a:solidFill>
@@ -21372,7 +21372,7 @@
           </a:solidFill>
           <a:ln w="12700">
             <a:solidFill>
-              <a:srgbClr val="D08A1E"/>
+              <a:srgbClr val="A88A5C"/>
             </a:solidFill>
             <a:prstDash val="solid"/>
           </a:ln>
@@ -21397,7 +21397,7 @@
           </a:solidFill>
           <a:ln w="12700">
             <a:solidFill>
-              <a:srgbClr val="D08A1E"/>
+              <a:srgbClr val="A88A5C"/>
             </a:solidFill>
             <a:prstDash val="solid"/>
           </a:ln>
@@ -21422,7 +21422,7 @@
           </a:solidFill>
           <a:ln w="12700">
             <a:solidFill>
-              <a:srgbClr val="D08A1E"/>
+              <a:srgbClr val="A88A5C"/>
             </a:solidFill>
             <a:prstDash val="solid"/>
           </a:ln>
@@ -21447,7 +21447,7 @@
           </a:solidFill>
           <a:ln w="12700">
             <a:solidFill>
-              <a:srgbClr val="D08A1E"/>
+              <a:srgbClr val="A88A5C"/>
             </a:solidFill>
             <a:prstDash val="solid"/>
           </a:ln>
@@ -21472,7 +21472,7 @@
           </a:solidFill>
           <a:ln w="12700">
             <a:solidFill>
-              <a:srgbClr val="D08A1E"/>
+              <a:srgbClr val="A88A5C"/>
             </a:solidFill>
             <a:prstDash val="solid"/>
           </a:ln>
@@ -22138,7 +22138,7 @@
             <a:r>
               <a:rPr lang="en-US" sz="580" dirty="0">
                 <a:solidFill>
-                  <a:srgbClr val="9A3B2E"/>
+                  <a:srgbClr val="7A5048"/>
                 </a:solidFill>
                 <a:latin typeface="Yu Gothic" pitchFamily="34" charset="0"/>
                 <a:ea typeface="Yu Gothic" pitchFamily="34" charset="-122"/>
@@ -22172,7 +22172,7 @@
             <a:r>
               <a:rPr lang="en-US" sz="580" dirty="0">
                 <a:solidFill>
-                  <a:srgbClr val="3D3F42"/>
+                  <a:srgbClr val="4A4C4F"/>
                 </a:solidFill>
                 <a:latin typeface="Yu Gothic" pitchFamily="34" charset="0"/>
                 <a:ea typeface="Yu Gothic" pitchFamily="34" charset="-122"/>
@@ -22206,7 +22206,7 @@
             <a:r>
               <a:rPr lang="en-US" sz="580" dirty="0">
                 <a:solidFill>
-                  <a:srgbClr val="C4733F"/>
+                  <a:srgbClr val="9C7360"/>
                 </a:solidFill>
                 <a:latin typeface="Yu Gothic" pitchFamily="34" charset="0"/>
                 <a:ea typeface="Yu Gothic" pitchFamily="34" charset="-122"/>
@@ -22240,7 +22240,7 @@
             <a:r>
               <a:rPr lang="en-US" sz="580" dirty="0">
                 <a:solidFill>
-                  <a:srgbClr val="5B8A96"/>
+                  <a:srgbClr val="6F8790"/>
                 </a:solidFill>
                 <a:latin typeface="Yu Gothic" pitchFamily="34" charset="0"/>
                 <a:ea typeface="Yu Gothic" pitchFamily="34" charset="-122"/>
@@ -22274,7 +22274,7 @@
             <a:r>
               <a:rPr lang="en-US" sz="580" dirty="0">
                 <a:solidFill>
-                  <a:srgbClr val="8A6FC2"/>
+                  <a:srgbClr val="857D97"/>
                 </a:solidFill>
                 <a:latin typeface="Yu Gothic" pitchFamily="34" charset="0"/>
                 <a:ea typeface="Yu Gothic" pitchFamily="34" charset="-122"/>
@@ -22308,7 +22308,7 @@
             <a:r>
               <a:rPr lang="en-US" sz="580" dirty="0">
                 <a:solidFill>
-                  <a:srgbClr val="C9A15E"/>
+                  <a:srgbClr val="B29F7E"/>
                 </a:solidFill>
                 <a:latin typeface="Yu Gothic" pitchFamily="34" charset="0"/>
                 <a:ea typeface="Yu Gothic" pitchFamily="34" charset="-122"/>
@@ -22342,7 +22342,7 @@
             <a:r>
               <a:rPr lang="en-US" sz="580" dirty="0">
                 <a:solidFill>
-                  <a:srgbClr val="8FA3B3"/>
+                  <a:srgbClr val="9AA6AD"/>
                 </a:solidFill>
                 <a:latin typeface="Yu Gothic" pitchFamily="34" charset="0"/>
                 <a:ea typeface="Yu Gothic" pitchFamily="34" charset="-122"/>
@@ -22376,7 +22376,7 @@
             <a:r>
               <a:rPr lang="en-US" sz="580" dirty="0">
                 <a:solidFill>
-                  <a:srgbClr val="6EA25A"/>
+                  <a:srgbClr val="7D9180"/>
                 </a:solidFill>
                 <a:latin typeface="Yu Gothic" pitchFamily="34" charset="0"/>
                 <a:ea typeface="Yu Gothic" pitchFamily="34" charset="-122"/>
@@ -23326,7 +23326,7 @@
             <a:avLst/>
           </a:prstGeom>
           <a:solidFill>
-            <a:srgbClr val="1D6B73"/>
+            <a:srgbClr val="34494E"/>
           </a:solidFill>
           <a:ln/>
         </p:spPr>
@@ -23468,7 +23468,7 @@
             <a:avLst/>
           </a:prstGeom>
           <a:solidFill>
-            <a:srgbClr val="1D6B73"/>
+            <a:srgbClr val="34494E"/>
           </a:solidFill>
           <a:ln/>
         </p:spPr>
@@ -23610,7 +23610,7 @@
             <a:avLst/>
           </a:prstGeom>
           <a:solidFill>
-            <a:srgbClr val="1D6B73"/>
+            <a:srgbClr val="34494E"/>
           </a:solidFill>
           <a:ln/>
         </p:spPr>
@@ -23752,7 +23752,7 @@
             <a:avLst/>
           </a:prstGeom>
           <a:solidFill>
-            <a:srgbClr val="1D6B73"/>
+            <a:srgbClr val="34494E"/>
           </a:solidFill>
           <a:ln/>
         </p:spPr>
@@ -23835,7 +23835,7 @@
             <a:avLst/>
           </a:prstGeom>
           <a:solidFill>
-            <a:srgbClr val="1D6B73"/>
+            <a:srgbClr val="34494E"/>
           </a:solidFill>
           <a:ln/>
         </p:spPr>
@@ -23879,7 +23879,7 @@
             <a:avLst/>
           </a:prstGeom>
           <a:solidFill>
-            <a:srgbClr val="F4F9F9"/>
+            <a:srgbClr val="F6F7F6"/>
           </a:solidFill>
           <a:ln/>
         </p:spPr>
@@ -23899,7 +23899,7 @@
             <a:avLst/>
           </a:prstGeom>
           <a:solidFill>
-            <a:srgbClr val="D08A1E"/>
+            <a:srgbClr val="A88A5C"/>
           </a:solidFill>
           <a:ln/>
         </p:spPr>
@@ -23943,7 +23943,7 @@
             <a:avLst/>
           </a:prstGeom>
           <a:solidFill>
-            <a:srgbClr val="FDF8EF"/>
+            <a:srgbClr val="F9F6F1"/>
           </a:solidFill>
           <a:ln/>
         </p:spPr>
@@ -23963,7 +23963,7 @@
             <a:avLst/>
           </a:prstGeom>
           <a:solidFill>
-            <a:srgbClr val="6B5AA6"/>
+            <a:srgbClr val="7A7390"/>
           </a:solidFill>
           <a:ln/>
         </p:spPr>
@@ -24027,7 +24027,7 @@
             <a:avLst/>
           </a:prstGeom>
           <a:solidFill>
-            <a:srgbClr val="F8F7FC"/>
+            <a:srgbClr val="F7F6F8"/>
           </a:solidFill>
           <a:ln/>
         </p:spPr>
@@ -24047,7 +24047,7 @@
             <a:avLst/>
           </a:prstGeom>
           <a:solidFill>
-            <a:srgbClr val="1D6B73"/>
+            <a:srgbClr val="34494E"/>
           </a:solidFill>
           <a:ln/>
         </p:spPr>
@@ -24111,7 +24111,7 @@
             <a:avLst/>
           </a:prstGeom>
           <a:solidFill>
-            <a:srgbClr val="D08A1E"/>
+            <a:srgbClr val="A88A5C"/>
           </a:solidFill>
           <a:ln/>
         </p:spPr>
@@ -24155,7 +24155,7 @@
             <a:avLst/>
           </a:prstGeom>
           <a:solidFill>
-            <a:srgbClr val="D08A1E"/>
+            <a:srgbClr val="A88A5C"/>
           </a:solidFill>
           <a:ln/>
         </p:spPr>
@@ -24199,11 +24199,11 @@
             <a:avLst/>
           </a:prstGeom>
           <a:solidFill>
-            <a:srgbClr val="EFECF7"/>
+            <a:srgbClr val="F1F0F4"/>
           </a:solidFill>
           <a:ln w="12700">
             <a:solidFill>
-              <a:srgbClr val="6B5AA6"/>
+              <a:srgbClr val="7A7390"/>
             </a:solidFill>
             <a:prstDash val="solid"/>
           </a:ln>
@@ -24285,11 +24285,11 @@
             <a:avLst/>
           </a:prstGeom>
           <a:solidFill>
-            <a:srgbClr val="EFECF7"/>
+            <a:srgbClr val="F1F0F4"/>
           </a:solidFill>
           <a:ln w="12700">
             <a:solidFill>
-              <a:srgbClr val="6B5AA6"/>
+              <a:srgbClr val="7A7390"/>
             </a:solidFill>
             <a:prstDash val="solid"/>
           </a:ln>
@@ -24371,11 +24371,11 @@
             <a:avLst/>
           </a:prstGeom>
           <a:solidFill>
-            <a:srgbClr val="EFECF7"/>
+            <a:srgbClr val="F1F0F4"/>
           </a:solidFill>
           <a:ln w="12700">
             <a:solidFill>
-              <a:srgbClr val="6B5AA6"/>
+              <a:srgbClr val="7A7390"/>
             </a:solidFill>
             <a:prstDash val="solid"/>
           </a:ln>
@@ -24514,7 +24514,7 @@
             <a:r>
               <a:rPr lang="en-US" sz="600" dirty="0">
                 <a:solidFill>
-                  <a:srgbClr val="1D6B73"/>
+                  <a:srgbClr val="34494E"/>
                 </a:solidFill>
                 <a:latin typeface="Yu Gothic" pitchFamily="34" charset="0"/>
                 <a:ea typeface="Yu Gothic" pitchFamily="34" charset="-122"/>
@@ -24548,7 +24548,7 @@
             <a:r>
               <a:rPr lang="en-US" sz="600" dirty="0">
                 <a:solidFill>
-                  <a:srgbClr val="D08A1E"/>
+                  <a:srgbClr val="A88A5C"/>
                 </a:solidFill>
                 <a:latin typeface="Yu Gothic" pitchFamily="34" charset="0"/>
                 <a:ea typeface="Yu Gothic" pitchFamily="34" charset="-122"/>
@@ -24582,7 +24582,7 @@
             <a:r>
               <a:rPr lang="en-US" sz="600" dirty="0">
                 <a:solidFill>
-                  <a:srgbClr val="6B5AA6"/>
+                  <a:srgbClr val="7A7390"/>
                 </a:solidFill>
                 <a:latin typeface="Yu Gothic" pitchFamily="34" charset="0"/>
                 <a:ea typeface="Yu Gothic" pitchFamily="34" charset="-122"/>
@@ -24788,7 +24788,7 @@
         <p:spPr>
           <a:xfrm>
             <a:off x="3810000" y="10261600"/>
-            <a:ext cx="6180534" cy="152400"/>
+            <a:ext cx="5549900" cy="152400"/>
           </a:xfrm>
           <a:prstGeom prst="rect">
             <a:avLst/>
@@ -24814,7 +24814,7 @@
                 <a:ea typeface="Yu Gothic" pitchFamily="34" charset="-122"/>
                 <a:cs typeface="Yu Gothic" pitchFamily="34" charset="-120"/>
               </a:rPr>
-              <a:t>台割 完成版（構成確認用・PwC様レビュー10/2反映）— 青ラベル＝改善点／色は台割用（緑＝資源投資・橙＝トレーディング）で表紙3案とは無関係</a:t>
+              <a:t>台割 完成版（構成確認用・PwC様レビュー10/2反映）— 色は台割用（深緑＝資源投資・黄土＝トレーディング）で表紙3案とは無関係</a:t>
             </a:r>
             <a:endParaRPr lang="en-US" sz="660" dirty="0"/>
           </a:p>
@@ -25058,7 +25058,7 @@
             <a:avLst/>
           </a:prstGeom>
           <a:solidFill>
-            <a:srgbClr val="2A6FB0"/>
+            <a:srgbClr val="6D7D86"/>
           </a:solidFill>
           <a:ln/>
         </p:spPr>
@@ -25249,7 +25249,7 @@
             <a:avLst/>
           </a:prstGeom>
           <a:solidFill>
-            <a:srgbClr val="E8F3F3"/>
+            <a:srgbClr val="EEF1F0"/>
           </a:solidFill>
           <a:ln/>
         </p:spPr>
@@ -25295,7 +25295,7 @@
             </a:avLst>
           </a:prstGeom>
           <a:solidFill>
-            <a:srgbClr val="D08A1E"/>
+            <a:srgbClr val="A88A5C"/>
           </a:solidFill>
           <a:ln/>
         </p:spPr>
@@ -25440,7 +25440,7 @@
             <a:avLst/>
           </a:prstGeom>
           <a:solidFill>
-            <a:srgbClr val="E8F3F3"/>
+            <a:srgbClr val="EEF1F0"/>
           </a:solidFill>
           <a:ln/>
         </p:spPr>
@@ -25486,7 +25486,7 @@
             </a:avLst>
           </a:prstGeom>
           <a:solidFill>
-            <a:srgbClr val="D08A1E"/>
+            <a:srgbClr val="A88A5C"/>
           </a:solidFill>
           <a:ln/>
         </p:spPr>
@@ -25631,7 +25631,7 @@
             <a:avLst/>
           </a:prstGeom>
           <a:solidFill>
-            <a:srgbClr val="E8F3F3"/>
+            <a:srgbClr val="EEF1F0"/>
           </a:solidFill>
           <a:ln/>
         </p:spPr>
@@ -25677,7 +25677,7 @@
             </a:avLst>
           </a:prstGeom>
           <a:solidFill>
-            <a:srgbClr val="D08A1E"/>
+            <a:srgbClr val="A88A5C"/>
           </a:solidFill>
           <a:ln/>
         </p:spPr>
@@ -25822,7 +25822,7 @@
             <a:avLst/>
           </a:prstGeom>
           <a:solidFill>
-            <a:srgbClr val="E8F3F3"/>
+            <a:srgbClr val="EEF1F0"/>
           </a:solidFill>
           <a:ln/>
         </p:spPr>
@@ -25868,7 +25868,7 @@
             </a:avLst>
           </a:prstGeom>
           <a:solidFill>
-            <a:srgbClr val="D08A1E"/>
+            <a:srgbClr val="A88A5C"/>
           </a:solidFill>
           <a:ln/>
         </p:spPr>
@@ -26078,7 +26078,7 @@
             <a:avLst/>
           </a:prstGeom>
           <a:solidFill>
-            <a:srgbClr val="3D3F42"/>
+            <a:srgbClr val="4A4C4F"/>
           </a:solidFill>
           <a:ln/>
         </p:spPr>
@@ -26119,7 +26119,7 @@
             <a:avLst/>
           </a:prstGeom>
           <a:solidFill>
-            <a:srgbClr val="3D3F42"/>
+            <a:srgbClr val="4A4C4F"/>
           </a:solidFill>
           <a:ln/>
         </p:spPr>
@@ -26160,7 +26160,7 @@
             <a:avLst/>
           </a:prstGeom>
           <a:solidFill>
-            <a:srgbClr val="3D3F42"/>
+            <a:srgbClr val="4A4C4F"/>
           </a:solidFill>
           <a:ln/>
         </p:spPr>
@@ -26267,7 +26267,7 @@
             <a:avLst/>
           </a:prstGeom>
           <a:solidFill>
-            <a:srgbClr val="FBF0DD"/>
+            <a:srgbClr val="F5F0E8"/>
           </a:solidFill>
           <a:ln/>
         </p:spPr>
@@ -26377,7 +26377,7 @@
             <a:avLst/>
           </a:prstGeom>
           <a:solidFill>
-            <a:srgbClr val="FBF0DD"/>
+            <a:srgbClr val="F5F0E8"/>
           </a:solidFill>
           <a:ln/>
         </p:spPr>
@@ -26487,7 +26487,7 @@
             <a:avLst/>
           </a:prstGeom>
           <a:solidFill>
-            <a:srgbClr val="FBF0DD"/>
+            <a:srgbClr val="F5F0E8"/>
           </a:solidFill>
           <a:ln/>
         </p:spPr>
@@ -26660,7 +26660,7 @@
           <a:noFill/>
           <a:ln w="25400">
             <a:solidFill>
-              <a:srgbClr val="1D6B73"/>
+              <a:srgbClr val="34494E"/>
             </a:solidFill>
             <a:prstDash val="solid"/>
           </a:ln>
@@ -26696,7 +26696,7 @@
             <a:r>
               <a:rPr lang="en-US" sz="900" b="1" dirty="0">
                 <a:solidFill>
-                  <a:srgbClr val="1D6B73"/>
+                  <a:srgbClr val="34494E"/>
                 </a:solidFill>
                 <a:latin typeface="Yu Gothic" pitchFamily="34" charset="0"/>
                 <a:ea typeface="Yu Gothic" pitchFamily="34" charset="-122"/>
@@ -26767,7 +26767,7 @@
           <a:noFill/>
           <a:ln w="25400">
             <a:solidFill>
-              <a:srgbClr val="1D6B73"/>
+              <a:srgbClr val="34494E"/>
             </a:solidFill>
             <a:prstDash val="solid"/>
           </a:ln>
@@ -26803,7 +26803,7 @@
             <a:r>
               <a:rPr lang="en-US" sz="900" b="1" dirty="0">
                 <a:solidFill>
-                  <a:srgbClr val="1D6B73"/>
+                  <a:srgbClr val="34494E"/>
                 </a:solidFill>
                 <a:latin typeface="Yu Gothic" pitchFamily="34" charset="0"/>
                 <a:ea typeface="Yu Gothic" pitchFamily="34" charset="-122"/>
@@ -26874,7 +26874,7 @@
           <a:noFill/>
           <a:ln w="25400">
             <a:solidFill>
-              <a:srgbClr val="1D6B73"/>
+              <a:srgbClr val="34494E"/>
             </a:solidFill>
             <a:prstDash val="solid"/>
           </a:ln>
@@ -26910,7 +26910,7 @@
             <a:r>
               <a:rPr lang="en-US" sz="900" b="1" dirty="0">
                 <a:solidFill>
-                  <a:srgbClr val="1D6B73"/>
+                  <a:srgbClr val="34494E"/>
                 </a:solidFill>
                 <a:latin typeface="Yu Gothic" pitchFamily="34" charset="0"/>
                 <a:ea typeface="Yu Gothic" pitchFamily="34" charset="-122"/>
@@ -27238,7 +27238,7 @@
             <a:avLst/>
           </a:prstGeom>
           <a:solidFill>
-            <a:srgbClr val="E8F3F3"/>
+            <a:srgbClr val="EEF1F0"/>
           </a:solidFill>
           <a:ln/>
         </p:spPr>
@@ -27260,7 +27260,7 @@
             </a:avLst>
           </a:prstGeom>
           <a:solidFill>
-            <a:srgbClr val="1D6B73"/>
+            <a:srgbClr val="34494E"/>
           </a:solidFill>
           <a:ln/>
         </p:spPr>
@@ -27731,7 +27731,7 @@
             <a:avLst/>
           </a:prstGeom>
           <a:solidFill>
-            <a:srgbClr val="1D6B73"/>
+            <a:srgbClr val="34494E"/>
           </a:solidFill>
           <a:ln/>
         </p:spPr>
@@ -27837,7 +27837,7 @@
             <a:avLst/>
           </a:prstGeom>
           <a:solidFill>
-            <a:srgbClr val="D08A1E"/>
+            <a:srgbClr val="A88A5C"/>
           </a:solidFill>
           <a:ln/>
         </p:spPr>
@@ -28151,7 +28151,7 @@
             <a:avLst/>
           </a:prstGeom>
           <a:solidFill>
-            <a:srgbClr val="2A6FB0"/>
+            <a:srgbClr val="6D7D86"/>
           </a:solidFill>
           <a:ln/>
         </p:spPr>
@@ -28766,7 +28766,7 @@
             <a:avLst/>
           </a:prstGeom>
           <a:solidFill>
-            <a:srgbClr val="2A6FB0"/>
+            <a:srgbClr val="6D7D86"/>
           </a:solidFill>
           <a:ln/>
         </p:spPr>
@@ -29080,7 +29080,7 @@
         <p:spPr>
           <a:xfrm>
             <a:off x="3810000" y="10261600"/>
-            <a:ext cx="6180534" cy="152400"/>
+            <a:ext cx="5549900" cy="152400"/>
           </a:xfrm>
           <a:prstGeom prst="rect">
             <a:avLst/>
@@ -29106,7 +29106,7 @@
                 <a:ea typeface="Yu Gothic" pitchFamily="34" charset="-122"/>
                 <a:cs typeface="Yu Gothic" pitchFamily="34" charset="-120"/>
               </a:rPr>
-              <a:t>台割 完成版（構成確認用・PwC様レビュー10/2反映）— 青ラベル＝改善点／色は台割用（緑＝資源投資・橙＝トレーディング）で表紙3案とは無関係</a:t>
+              <a:t>台割 完成版（構成確認用・PwC様レビュー10/2反映）— 色は台割用（深緑＝資源投資・黄土＝トレーディング）で表紙3案とは無関係</a:t>
             </a:r>
             <a:endParaRPr lang="en-US" sz="660" dirty="0"/>
           </a:p>

--- a/cover-proposals/daiwari/final/final_daiwari_editable.pptx
+++ b/cover-proposals/daiwari/final/final_daiwari_editable.pptx
@@ -1517,13 +1517,10 @@
           </a:ln>
         </p:spPr>
         <p:txBody>
-          <a:bodyPr wrap="square" lIns="25400" tIns="38100" rIns="38100" bIns="25400" rtlCol="0" anchor="t"/>
-          <a:lstStyle/>
-          <a:p>
-            <a:pPr algn="l" indent="0" marL="0">
-              <a:lnSpc>
-                <a:spcPts val="858"/>
-              </a:lnSpc>
+          <a:bodyPr wrap="square" lIns="25400" tIns="38100" rIns="38100" bIns="25400" rtlCol="0" anchor="ctr"/>
+          <a:lstStyle/>
+          <a:p>
+            <a:pPr algn="l" indent="0" marL="0">
               <a:buNone/>
             </a:pPr>
             <a:r>
@@ -2859,13 +2856,10 @@
           </a:ln>
         </p:spPr>
         <p:txBody>
-          <a:bodyPr wrap="square" lIns="25400" tIns="38100" rIns="38100" bIns="25400" rtlCol="0" anchor="t"/>
-          <a:lstStyle/>
-          <a:p>
-            <a:pPr algn="l" indent="0" marL="0">
-              <a:lnSpc>
-                <a:spcPts val="858"/>
-              </a:lnSpc>
+          <a:bodyPr wrap="square" lIns="25400" tIns="38100" rIns="38100" bIns="25400" rtlCol="0" anchor="ctr"/>
+          <a:lstStyle/>
+          <a:p>
+            <a:pPr algn="l" indent="0" marL="0">
               <a:buNone/>
             </a:pPr>
             <a:r>
@@ -4956,9 +4950,6 @@
           <a:lstStyle/>
           <a:p>
             <a:pPr algn="ctr" indent="0" marL="0">
-              <a:lnSpc>
-                <a:spcPts val="999"/>
-              </a:lnSpc>
               <a:buNone/>
             </a:pPr>
             <a:r>
@@ -5003,9 +4994,6 @@
           <a:lstStyle/>
           <a:p>
             <a:pPr algn="ctr" indent="0" marL="0">
-              <a:lnSpc>
-                <a:spcPts val="999"/>
-              </a:lnSpc>
               <a:buNone/>
             </a:pPr>
             <a:r>
@@ -5825,13 +5813,10 @@
           </a:ln>
         </p:spPr>
         <p:txBody>
-          <a:bodyPr wrap="square" lIns="25400" tIns="38100" rIns="38100" bIns="25400" rtlCol="0" anchor="t"/>
-          <a:lstStyle/>
-          <a:p>
-            <a:pPr algn="l" indent="0" marL="0">
-              <a:lnSpc>
-                <a:spcPts val="858"/>
-              </a:lnSpc>
+          <a:bodyPr wrap="square" lIns="25400" tIns="38100" rIns="38100" bIns="25400" rtlCol="0" anchor="ctr"/>
+          <a:lstStyle/>
+          <a:p>
+            <a:pPr algn="l" indent="0" marL="0">
               <a:buNone/>
             </a:pPr>
             <a:r>
@@ -9566,13 +9551,10 @@
           </a:ln>
         </p:spPr>
         <p:txBody>
-          <a:bodyPr wrap="square" lIns="25400" tIns="38100" rIns="38100" bIns="25400" rtlCol="0" anchor="t"/>
-          <a:lstStyle/>
-          <a:p>
-            <a:pPr algn="l" indent="0" marL="0">
-              <a:lnSpc>
-                <a:spcPts val="858"/>
-              </a:lnSpc>
+          <a:bodyPr wrap="square" lIns="25400" tIns="38100" rIns="38100" bIns="25400" rtlCol="0" anchor="ctr"/>
+          <a:lstStyle/>
+          <a:p>
+            <a:pPr algn="l" indent="0" marL="0">
               <a:buNone/>
             </a:pPr>
             <a:r>
@@ -11642,9 +11624,6 @@
           <a:lstStyle/>
           <a:p>
             <a:pPr algn="ctr" indent="0" marL="0">
-              <a:lnSpc>
-                <a:spcPts val="999"/>
-              </a:lnSpc>
               <a:buNone/>
             </a:pPr>
             <a:r>
@@ -11754,9 +11733,6 @@
           <a:lstStyle/>
           <a:p>
             <a:pPr algn="ctr" indent="0" marL="0">
-              <a:lnSpc>
-                <a:spcPts val="999"/>
-              </a:lnSpc>
               <a:buNone/>
             </a:pPr>
             <a:r>
@@ -11801,9 +11777,6 @@
           <a:lstStyle/>
           <a:p>
             <a:pPr algn="ctr" indent="0" marL="0">
-              <a:lnSpc>
-                <a:spcPts val="999"/>
-              </a:lnSpc>
               <a:buNone/>
             </a:pPr>
             <a:r>
@@ -12677,13 +12650,10 @@
           </a:ln>
         </p:spPr>
         <p:txBody>
-          <a:bodyPr wrap="square" lIns="25400" tIns="38100" rIns="38100" bIns="25400" rtlCol="0" anchor="t"/>
-          <a:lstStyle/>
-          <a:p>
-            <a:pPr algn="l" indent="0" marL="0">
-              <a:lnSpc>
-                <a:spcPts val="858"/>
-              </a:lnSpc>
+          <a:bodyPr wrap="square" lIns="25400" tIns="38100" rIns="38100" bIns="25400" rtlCol="0" anchor="ctr"/>
+          <a:lstStyle/>
+          <a:p>
+            <a:pPr algn="l" indent="0" marL="0">
               <a:buNone/>
             </a:pPr>
             <a:r>
@@ -17266,13 +17236,10 @@
           </a:ln>
         </p:spPr>
         <p:txBody>
-          <a:bodyPr wrap="square" lIns="25400" tIns="38100" rIns="38100" bIns="25400" rtlCol="0" anchor="t"/>
-          <a:lstStyle/>
-          <a:p>
-            <a:pPr algn="l" indent="0" marL="0">
-              <a:lnSpc>
-                <a:spcPts val="858"/>
-              </a:lnSpc>
+          <a:bodyPr wrap="square" lIns="25400" tIns="38100" rIns="38100" bIns="25400" rtlCol="0" anchor="ctr"/>
+          <a:lstStyle/>
+          <a:p>
+            <a:pPr algn="l" indent="0" marL="0">
               <a:buNone/>
             </a:pPr>
             <a:r>
@@ -17564,7 +17531,7 @@
         <p:spPr>
           <a:xfrm>
             <a:off x="609600" y="2159000"/>
-            <a:ext cx="6337300" cy="2540000"/>
+            <a:ext cx="6337300" cy="1905000"/>
           </a:xfrm>
           <a:prstGeom prst="rect">
             <a:avLst/>
@@ -17638,13 +17605,10 @@
           </a:ln>
         </p:spPr>
         <p:txBody>
-          <a:bodyPr wrap="square" lIns="25400" tIns="38100" rIns="38100" bIns="25400" rtlCol="0" anchor="t"/>
-          <a:lstStyle/>
-          <a:p>
-            <a:pPr algn="l" indent="0" marL="0">
-              <a:lnSpc>
-                <a:spcPts val="858"/>
-              </a:lnSpc>
+          <a:bodyPr wrap="square" lIns="25400" tIns="38100" rIns="38100" bIns="25400" rtlCol="0" anchor="ctr"/>
+          <a:lstStyle/>
+          <a:p>
+            <a:pPr algn="l" indent="0" marL="0">
               <a:buNone/>
             </a:pPr>
             <a:r>
@@ -18050,26 +18014,26 @@
         <p:spPr>
           <a:xfrm>
             <a:off x="609600" y="2159000"/>
-            <a:ext cx="1506030" cy="165100"/>
-          </a:xfrm>
-          <a:prstGeom prst="rect">
-            <a:avLst/>
-          </a:prstGeom>
-          <a:noFill/>
-          <a:ln/>
-        </p:spPr>
-        <p:txBody>
-          <a:bodyPr wrap="none" lIns="0" tIns="0" rIns="0" bIns="0" rtlCol="0" anchor="t"/>
-          <a:lstStyle/>
-          <a:p>
-            <a:pPr algn="l" indent="0" marL="0">
-              <a:lnSpc>
-                <a:spcPts val="1170"/>
-              </a:lnSpc>
-              <a:buNone/>
-            </a:pPr>
-            <a:r>
-              <a:rPr lang="en-US" sz="900" dirty="0">
+            <a:ext cx="1402223" cy="152400"/>
+          </a:xfrm>
+          <a:prstGeom prst="rect">
+            <a:avLst/>
+          </a:prstGeom>
+          <a:noFill/>
+          <a:ln/>
+        </p:spPr>
+        <p:txBody>
+          <a:bodyPr wrap="none" lIns="0" tIns="0" rIns="0" bIns="0" rtlCol="0" anchor="t"/>
+          <a:lstStyle/>
+          <a:p>
+            <a:pPr algn="l" indent="0" marL="0">
+              <a:lnSpc>
+                <a:spcPts val="1092"/>
+              </a:lnSpc>
+              <a:buNone/>
+            </a:pPr>
+            <a:r>
+              <a:rPr lang="en-US" sz="840" dirty="0">
                 <a:solidFill>
                   <a:srgbClr val="222222"/>
                 </a:solidFill>
@@ -18079,7 +18043,7 @@
               </a:rPr>
               <a:t>RtM ＝ Resource to Market</a:t>
             </a:r>
-            <a:endParaRPr lang="en-US" sz="900" dirty="0"/>
+            <a:endParaRPr lang="en-US" sz="840" dirty="0"/>
           </a:p>
         </p:txBody>
       </p:sp>
@@ -18133,77 +18097,8 @@
         </p:nvSpPr>
         <p:spPr>
           <a:xfrm>
-            <a:off x="3213100" y="3149600"/>
-            <a:ext cx="1143000" cy="558800"/>
-          </a:xfrm>
-          <a:prstGeom prst="roundRect">
-            <a:avLst>
-              <a:gd name="adj" fmla="val 81818"/>
-            </a:avLst>
-          </a:prstGeom>
-          <a:noFill/>
-          <a:ln w="12700">
-            <a:solidFill>
-              <a:srgbClr val="3C4045"/>
-            </a:solidFill>
-            <a:prstDash val="solid"/>
-          </a:ln>
-        </p:spPr>
-        <p:txBody>
-          <a:bodyPr wrap="square" lIns="25400" tIns="38100" rIns="38100" bIns="25400" rtlCol="0" anchor="ctr"/>
-          <a:lstStyle/>
-          <a:p>
-            <a:pPr algn="ctr" indent="0" marL="0">
-              <a:lnSpc>
-                <a:spcPts val="999"/>
-              </a:lnSpc>
-              <a:buNone/>
-            </a:pPr>
-            <a:r>
-              <a:rPr lang="en-US" sz="900" b="1" dirty="0">
-                <a:solidFill>
-                  <a:srgbClr val="222222"/>
-                </a:solidFill>
-                <a:latin typeface="Yu Gothic" pitchFamily="34" charset="0"/>
-                <a:ea typeface="Yu Gothic" pitchFamily="34" charset="-122"/>
-                <a:cs typeface="Yu Gothic" pitchFamily="34" charset="-120"/>
-              </a:rPr>
-              <a:t>RtMI</a:t>
-            </a:r>
-            <a:endParaRPr lang="en-US" sz="900" dirty="0"/>
-          </a:p>
-          <a:p>
-            <a:pPr algn="ctr" indent="0" marL="0">
-              <a:lnSpc>
-                <a:spcPts val="999"/>
-              </a:lnSpc>
-              <a:buNone/>
-            </a:pPr>
-            <a:r>
-              <a:rPr lang="en-US" sz="580" dirty="0">
-                <a:solidFill>
-                  <a:srgbClr val="222222"/>
-                </a:solidFill>
-                <a:latin typeface="Yu Gothic" pitchFamily="34" charset="0"/>
-                <a:ea typeface="Yu Gothic" pitchFamily="34" charset="-122"/>
-                <a:cs typeface="Yu Gothic" pitchFamily="34" charset="-120"/>
-              </a:rPr>
-              <a:t>シンガポール</a:t>
-            </a:r>
-            <a:endParaRPr lang="en-US" sz="900" dirty="0"/>
-          </a:p>
-        </p:txBody>
-      </p:sp>
-      <p:sp>
-        <p:nvSpPr>
-          <p:cNvPr id="16" name="t3_13"/>
-          <p:cNvSpPr txBox="1"/>
-          <p:nvPr/>
-        </p:nvSpPr>
-        <p:spPr>
-          <a:xfrm>
-            <a:off x="609600" y="2438400"/>
-            <a:ext cx="1397000" cy="381000"/>
+            <a:off x="609600" y="2362200"/>
+            <a:ext cx="1397000" cy="304800"/>
           </a:xfrm>
           <a:prstGeom prst="rect">
             <a:avLst/>
@@ -18249,7 +18144,7 @@
               <a:buNone/>
             </a:pPr>
             <a:r>
-              <a:rPr lang="en-US" sz="560" dirty="0">
+              <a:rPr lang="en-US" sz="540" dirty="0">
                 <a:solidFill>
                   <a:srgbClr val="666666"/>
                 </a:solidFill>
@@ -18265,14 +18160,14 @@
       </p:sp>
       <p:sp>
         <p:nvSpPr>
-          <p:cNvPr id="17" name="t3_14"/>
-          <p:cNvSpPr txBox="1"/>
-          <p:nvPr/>
-        </p:nvSpPr>
-        <p:spPr>
-          <a:xfrm>
-            <a:off x="609600" y="2946400"/>
-            <a:ext cx="1397000" cy="381000"/>
+          <p:cNvPr id="16" name="t3_13"/>
+          <p:cNvSpPr txBox="1"/>
+          <p:nvPr/>
+        </p:nvSpPr>
+        <p:spPr>
+          <a:xfrm>
+            <a:off x="609600" y="2743200"/>
+            <a:ext cx="1397000" cy="304800"/>
           </a:xfrm>
           <a:prstGeom prst="rect">
             <a:avLst/>
@@ -18318,7 +18213,7 @@
               <a:buNone/>
             </a:pPr>
             <a:r>
-              <a:rPr lang="en-US" sz="560" dirty="0">
+              <a:rPr lang="en-US" sz="540" dirty="0">
                 <a:solidFill>
                   <a:srgbClr val="666666"/>
                 </a:solidFill>
@@ -18334,14 +18229,14 @@
       </p:sp>
       <p:sp>
         <p:nvSpPr>
-          <p:cNvPr id="18" name="t3_15"/>
-          <p:cNvSpPr txBox="1"/>
-          <p:nvPr/>
-        </p:nvSpPr>
-        <p:spPr>
-          <a:xfrm>
-            <a:off x="609600" y="3454400"/>
-            <a:ext cx="1397000" cy="381000"/>
+          <p:cNvPr id="17" name="t3_14"/>
+          <p:cNvSpPr txBox="1"/>
+          <p:nvPr/>
+        </p:nvSpPr>
+        <p:spPr>
+          <a:xfrm>
+            <a:off x="609600" y="3124200"/>
+            <a:ext cx="1397000" cy="304800"/>
           </a:xfrm>
           <a:prstGeom prst="rect">
             <a:avLst/>
@@ -18387,7 +18282,7 @@
               <a:buNone/>
             </a:pPr>
             <a:r>
-              <a:rPr lang="en-US" sz="560" dirty="0">
+              <a:rPr lang="en-US" sz="540" dirty="0">
                 <a:solidFill>
                   <a:srgbClr val="666666"/>
                 </a:solidFill>
@@ -18403,14 +18298,14 @@
       </p:sp>
       <p:sp>
         <p:nvSpPr>
-          <p:cNvPr id="19" name="t3_16"/>
-          <p:cNvSpPr txBox="1"/>
-          <p:nvPr/>
-        </p:nvSpPr>
-        <p:spPr>
-          <a:xfrm>
-            <a:off x="609600" y="3962400"/>
-            <a:ext cx="1397000" cy="381000"/>
+          <p:cNvPr id="18" name="t3_15"/>
+          <p:cNvSpPr txBox="1"/>
+          <p:nvPr/>
+        </p:nvSpPr>
+        <p:spPr>
+          <a:xfrm>
+            <a:off x="609600" y="3505200"/>
+            <a:ext cx="1397000" cy="304800"/>
           </a:xfrm>
           <a:prstGeom prst="rect">
             <a:avLst/>
@@ -18456,7 +18351,7 @@
               <a:buNone/>
             </a:pPr>
             <a:r>
-              <a:rPr lang="en-US" sz="560" dirty="0">
+              <a:rPr lang="en-US" sz="540" dirty="0">
                 <a:solidFill>
                   <a:srgbClr val="666666"/>
                 </a:solidFill>
@@ -18472,14 +18367,14 @@
       </p:sp>
       <p:sp>
         <p:nvSpPr>
-          <p:cNvPr id="20" name="t3_17"/>
-          <p:cNvSpPr txBox="1"/>
-          <p:nvPr/>
-        </p:nvSpPr>
-        <p:spPr>
-          <a:xfrm>
-            <a:off x="5588000" y="2387600"/>
-            <a:ext cx="1358900" cy="279400"/>
+          <p:cNvPr id="19" name="t3_16"/>
+          <p:cNvSpPr txBox="1"/>
+          <p:nvPr/>
+        </p:nvSpPr>
+        <p:spPr>
+          <a:xfrm>
+            <a:off x="5588000" y="2336800"/>
+            <a:ext cx="1358900" cy="228600"/>
           </a:xfrm>
           <a:prstGeom prst="rect">
             <a:avLst/>
@@ -18497,9 +18392,6 @@
           <a:lstStyle/>
           <a:p>
             <a:pPr algn="ctr" indent="0" marL="0">
-              <a:lnSpc>
-                <a:spcPts val="999"/>
-              </a:lnSpc>
               <a:buNone/>
             </a:pPr>
             <a:r>
@@ -18517,13 +18409,10 @@
           </a:p>
           <a:p>
             <a:pPr algn="ctr" indent="0" marL="0">
-              <a:lnSpc>
-                <a:spcPts val="999"/>
-              </a:lnSpc>
-              <a:buNone/>
-            </a:pPr>
-            <a:r>
-              <a:rPr lang="en-US" sz="560" dirty="0">
+              <a:buNone/>
+            </a:pPr>
+            <a:r>
+              <a:rPr lang="en-US" sz="520" dirty="0">
                 <a:solidFill>
                   <a:srgbClr val="666666"/>
                 </a:solidFill>
@@ -18539,14 +18428,14 @@
       </p:sp>
       <p:sp>
         <p:nvSpPr>
-          <p:cNvPr id="21" name="t3_18"/>
-          <p:cNvSpPr txBox="1"/>
-          <p:nvPr/>
-        </p:nvSpPr>
-        <p:spPr>
-          <a:xfrm>
-            <a:off x="5588000" y="2743200"/>
-            <a:ext cx="1358900" cy="279400"/>
+          <p:cNvPr id="20" name="t3_17"/>
+          <p:cNvSpPr txBox="1"/>
+          <p:nvPr/>
+        </p:nvSpPr>
+        <p:spPr>
+          <a:xfrm>
+            <a:off x="5588000" y="2603500"/>
+            <a:ext cx="1358900" cy="228600"/>
           </a:xfrm>
           <a:prstGeom prst="rect">
             <a:avLst/>
@@ -18564,9 +18453,6 @@
           <a:lstStyle/>
           <a:p>
             <a:pPr algn="ctr" indent="0" marL="0">
-              <a:lnSpc>
-                <a:spcPts val="999"/>
-              </a:lnSpc>
               <a:buNone/>
             </a:pPr>
             <a:r>
@@ -18584,13 +18470,10 @@
           </a:p>
           <a:p>
             <a:pPr algn="ctr" indent="0" marL="0">
-              <a:lnSpc>
-                <a:spcPts val="999"/>
-              </a:lnSpc>
-              <a:buNone/>
-            </a:pPr>
-            <a:r>
-              <a:rPr lang="en-US" sz="560" dirty="0">
+              <a:buNone/>
+            </a:pPr>
+            <a:r>
+              <a:rPr lang="en-US" sz="520" dirty="0">
                 <a:solidFill>
                   <a:srgbClr val="666666"/>
                 </a:solidFill>
@@ -18606,14 +18489,14 @@
       </p:sp>
       <p:sp>
         <p:nvSpPr>
-          <p:cNvPr id="22" name="t3_19"/>
-          <p:cNvSpPr txBox="1"/>
-          <p:nvPr/>
-        </p:nvSpPr>
-        <p:spPr>
-          <a:xfrm>
-            <a:off x="5588000" y="3098800"/>
-            <a:ext cx="1358900" cy="279400"/>
+          <p:cNvPr id="21" name="t3_18"/>
+          <p:cNvSpPr txBox="1"/>
+          <p:nvPr/>
+        </p:nvSpPr>
+        <p:spPr>
+          <a:xfrm>
+            <a:off x="5588000" y="2870200"/>
+            <a:ext cx="1358900" cy="228600"/>
           </a:xfrm>
           <a:prstGeom prst="rect">
             <a:avLst/>
@@ -18631,9 +18514,6 @@
           <a:lstStyle/>
           <a:p>
             <a:pPr algn="ctr" indent="0" marL="0">
-              <a:lnSpc>
-                <a:spcPts val="999"/>
-              </a:lnSpc>
               <a:buNone/>
             </a:pPr>
             <a:r>
@@ -18651,13 +18531,10 @@
           </a:p>
           <a:p>
             <a:pPr algn="ctr" indent="0" marL="0">
-              <a:lnSpc>
-                <a:spcPts val="999"/>
-              </a:lnSpc>
-              <a:buNone/>
-            </a:pPr>
-            <a:r>
-              <a:rPr lang="en-US" sz="560" dirty="0">
+              <a:buNone/>
+            </a:pPr>
+            <a:r>
+              <a:rPr lang="en-US" sz="520" dirty="0">
                 <a:solidFill>
                   <a:srgbClr val="666666"/>
                 </a:solidFill>
@@ -18673,14 +18550,14 @@
       </p:sp>
       <p:sp>
         <p:nvSpPr>
-          <p:cNvPr id="23" name="t3_20"/>
-          <p:cNvSpPr txBox="1"/>
-          <p:nvPr/>
-        </p:nvSpPr>
-        <p:spPr>
-          <a:xfrm>
-            <a:off x="5588000" y="3454400"/>
-            <a:ext cx="1358900" cy="279400"/>
+          <p:cNvPr id="22" name="t3_19"/>
+          <p:cNvSpPr txBox="1"/>
+          <p:nvPr/>
+        </p:nvSpPr>
+        <p:spPr>
+          <a:xfrm>
+            <a:off x="5588000" y="3136900"/>
+            <a:ext cx="1358900" cy="228600"/>
           </a:xfrm>
           <a:prstGeom prst="rect">
             <a:avLst/>
@@ -18698,9 +18575,6 @@
           <a:lstStyle/>
           <a:p>
             <a:pPr algn="ctr" indent="0" marL="0">
-              <a:lnSpc>
-                <a:spcPts val="999"/>
-              </a:lnSpc>
               <a:buNone/>
             </a:pPr>
             <a:r>
@@ -18718,13 +18592,10 @@
           </a:p>
           <a:p>
             <a:pPr algn="ctr" indent="0" marL="0">
-              <a:lnSpc>
-                <a:spcPts val="999"/>
-              </a:lnSpc>
-              <a:buNone/>
-            </a:pPr>
-            <a:r>
-              <a:rPr lang="en-US" sz="560" dirty="0">
+              <a:buNone/>
+            </a:pPr>
+            <a:r>
+              <a:rPr lang="en-US" sz="520" dirty="0">
                 <a:solidFill>
                   <a:srgbClr val="666666"/>
                 </a:solidFill>
@@ -18740,14 +18611,14 @@
       </p:sp>
       <p:sp>
         <p:nvSpPr>
-          <p:cNvPr id="24" name="t3_21"/>
-          <p:cNvSpPr txBox="1"/>
-          <p:nvPr/>
-        </p:nvSpPr>
-        <p:spPr>
-          <a:xfrm>
-            <a:off x="5588000" y="3810000"/>
-            <a:ext cx="1358900" cy="279400"/>
+          <p:cNvPr id="23" name="t3_20"/>
+          <p:cNvSpPr txBox="1"/>
+          <p:nvPr/>
+        </p:nvSpPr>
+        <p:spPr>
+          <a:xfrm>
+            <a:off x="5588000" y="3403600"/>
+            <a:ext cx="1358900" cy="228600"/>
           </a:xfrm>
           <a:prstGeom prst="rect">
             <a:avLst/>
@@ -18765,9 +18636,6 @@
           <a:lstStyle/>
           <a:p>
             <a:pPr algn="ctr" indent="0" marL="0">
-              <a:lnSpc>
-                <a:spcPts val="999"/>
-              </a:lnSpc>
               <a:buNone/>
             </a:pPr>
             <a:r>
@@ -18785,13 +18653,10 @@
           </a:p>
           <a:p>
             <a:pPr algn="ctr" indent="0" marL="0">
-              <a:lnSpc>
-                <a:spcPts val="999"/>
-              </a:lnSpc>
-              <a:buNone/>
-            </a:pPr>
-            <a:r>
-              <a:rPr lang="en-US" sz="560" dirty="0">
+              <a:buNone/>
+            </a:pPr>
+            <a:r>
+              <a:rPr lang="en-US" sz="520" dirty="0">
                 <a:solidFill>
                   <a:srgbClr val="666666"/>
                 </a:solidFill>
@@ -18807,14 +18672,14 @@
       </p:sp>
       <p:sp>
         <p:nvSpPr>
-          <p:cNvPr id="25" name="t3_22"/>
-          <p:cNvSpPr txBox="1"/>
-          <p:nvPr/>
-        </p:nvSpPr>
-        <p:spPr>
-          <a:xfrm>
-            <a:off x="5588000" y="4165600"/>
-            <a:ext cx="1358900" cy="279400"/>
+          <p:cNvPr id="24" name="t3_21"/>
+          <p:cNvSpPr txBox="1"/>
+          <p:nvPr/>
+        </p:nvSpPr>
+        <p:spPr>
+          <a:xfrm>
+            <a:off x="5588000" y="3670300"/>
+            <a:ext cx="1358900" cy="228600"/>
           </a:xfrm>
           <a:prstGeom prst="rect">
             <a:avLst/>
@@ -18832,13 +18697,76 @@
           <a:lstStyle/>
           <a:p>
             <a:pPr algn="ctr" indent="0" marL="0">
+              <a:buNone/>
+            </a:pPr>
+            <a:r>
+              <a:rPr lang="en-US" sz="740" dirty="0">
+                <a:solidFill>
+                  <a:srgbClr val="222222"/>
+                </a:solidFill>
+                <a:latin typeface="Yu Gothic" pitchFamily="34" charset="0"/>
+                <a:ea typeface="Yu Gothic" pitchFamily="34" charset="-122"/>
+                <a:cs typeface="Yu Gothic" pitchFamily="34" charset="-120"/>
+              </a:rPr>
+              <a:t>中南米・ブラジル</a:t>
+            </a:r>
+            <a:endParaRPr lang="en-US" sz="740" dirty="0"/>
+          </a:p>
+          <a:p>
+            <a:pPr algn="ctr" indent="0" marL="0">
+              <a:buNone/>
+            </a:pPr>
+            <a:r>
+              <a:rPr lang="en-US" sz="520" dirty="0">
+                <a:solidFill>
+                  <a:srgbClr val="666666"/>
+                </a:solidFill>
+                <a:latin typeface="Yu Gothic" pitchFamily="34" charset="0"/>
+                <a:ea typeface="Yu Gothic" pitchFamily="34" charset="-122"/>
+                <a:cs typeface="Yu Gothic" pitchFamily="34" charset="-120"/>
+              </a:rPr>
+              <a:t>市場</a:t>
+            </a:r>
+            <a:endParaRPr lang="en-US" sz="740" dirty="0"/>
+          </a:p>
+        </p:txBody>
+      </p:sp>
+      <p:sp>
+        <p:nvSpPr>
+          <p:cNvPr id="25" name="t3_22"/>
+          <p:cNvSpPr txBox="1"/>
+          <p:nvPr/>
+        </p:nvSpPr>
+        <p:spPr>
+          <a:xfrm>
+            <a:off x="3213100" y="2870200"/>
+            <a:ext cx="1143000" cy="508000"/>
+          </a:xfrm>
+          <a:prstGeom prst="roundRect">
+            <a:avLst>
+              <a:gd name="adj" fmla="val 90000"/>
+            </a:avLst>
+          </a:prstGeom>
+          <a:noFill/>
+          <a:ln w="12700">
+            <a:solidFill>
+              <a:srgbClr val="3C4045"/>
+            </a:solidFill>
+            <a:prstDash val="solid"/>
+          </a:ln>
+        </p:spPr>
+        <p:txBody>
+          <a:bodyPr wrap="square" lIns="25400" tIns="38100" rIns="38100" bIns="25400" rtlCol="0" anchor="ctr"/>
+          <a:lstStyle/>
+          <a:p>
+            <a:pPr algn="ctr" indent="0" marL="0">
               <a:lnSpc>
                 <a:spcPts val="999"/>
               </a:lnSpc>
               <a:buNone/>
             </a:pPr>
             <a:r>
-              <a:rPr lang="en-US" sz="740" dirty="0">
+              <a:rPr lang="en-US" sz="900" b="1" dirty="0">
                 <a:solidFill>
                   <a:srgbClr val="222222"/>
                 </a:solidFill>
@@ -18846,9 +18774,9 @@
                 <a:ea typeface="Yu Gothic" pitchFamily="34" charset="-122"/>
                 <a:cs typeface="Yu Gothic" pitchFamily="34" charset="-120"/>
               </a:rPr>
-              <a:t>中南米・ブラジル</a:t>
-            </a:r>
-            <a:endParaRPr lang="en-US" sz="740" dirty="0"/>
+              <a:t>RtMI</a:t>
+            </a:r>
+            <a:endParaRPr lang="en-US" sz="900" dirty="0"/>
           </a:p>
           <a:p>
             <a:pPr algn="ctr" indent="0" marL="0">
@@ -18860,15 +18788,15 @@
             <a:r>
               <a:rPr lang="en-US" sz="560" dirty="0">
                 <a:solidFill>
-                  <a:srgbClr val="666666"/>
-                </a:solidFill>
-                <a:latin typeface="Yu Gothic" pitchFamily="34" charset="0"/>
-                <a:ea typeface="Yu Gothic" pitchFamily="34" charset="-122"/>
-                <a:cs typeface="Yu Gothic" pitchFamily="34" charset="-120"/>
-              </a:rPr>
-              <a:t>市場</a:t>
-            </a:r>
-            <a:endParaRPr lang="en-US" sz="740" dirty="0"/>
+                  <a:srgbClr val="222222"/>
+                </a:solidFill>
+                <a:latin typeface="Yu Gothic" pitchFamily="34" charset="0"/>
+                <a:ea typeface="Yu Gothic" pitchFamily="34" charset="-122"/>
+                <a:cs typeface="Yu Gothic" pitchFamily="34" charset="-120"/>
+              </a:rPr>
+              <a:t>シンガポール</a:t>
+            </a:r>
+            <a:endParaRPr lang="en-US" sz="900" dirty="0"/>
           </a:p>
         </p:txBody>
       </p:sp>
@@ -18880,37 +18808,37 @@
         </p:nvSpPr>
         <p:spPr>
           <a:xfrm>
-            <a:off x="2032000" y="4394200"/>
-            <a:ext cx="1069340" cy="117872"/>
-          </a:xfrm>
-          <a:prstGeom prst="rect">
-            <a:avLst/>
-          </a:prstGeom>
-          <a:noFill/>
-          <a:ln/>
-        </p:spPr>
-        <p:txBody>
-          <a:bodyPr wrap="none" lIns="0" tIns="0" rIns="0" bIns="0" rtlCol="0" anchor="t"/>
-          <a:lstStyle/>
-          <a:p>
-            <a:pPr algn="l" indent="0" marL="0">
-              <a:lnSpc>
-                <a:spcPts val="928"/>
-              </a:lnSpc>
-              <a:buNone/>
-            </a:pPr>
-            <a:r>
-              <a:rPr lang="en-US" sz="640" dirty="0">
-                <a:solidFill>
-                  <a:srgbClr val="8A9096"/>
-                </a:solidFill>
-                <a:latin typeface="Yu Gothic" pitchFamily="34" charset="0"/>
-                <a:ea typeface="Yu Gothic" pitchFamily="34" charset="-122"/>
-                <a:cs typeface="Yu Gothic" pitchFamily="34" charset="-120"/>
-              </a:rPr>
-              <a:t>調達フロー</a:t>
-            </a:r>
-            <a:endParaRPr lang="en-US" sz="640" dirty="0"/>
+            <a:off x="609600" y="3962400"/>
+            <a:ext cx="6603492" cy="114300"/>
+          </a:xfrm>
+          <a:prstGeom prst="rect">
+            <a:avLst/>
+          </a:prstGeom>
+          <a:noFill/>
+          <a:ln/>
+        </p:spPr>
+        <p:txBody>
+          <a:bodyPr wrap="none" lIns="0" tIns="0" rIns="0" bIns="0" rtlCol="0" anchor="t"/>
+          <a:lstStyle/>
+          <a:p>
+            <a:pPr algn="l" indent="0" marL="0">
+              <a:lnSpc>
+                <a:spcPts val="806"/>
+              </a:lnSpc>
+              <a:buNone/>
+            </a:pPr>
+            <a:r>
+              <a:rPr lang="en-US" sz="620" dirty="0">
+                <a:solidFill>
+                  <a:srgbClr val="444444"/>
+                </a:solidFill>
+                <a:latin typeface="Yu Gothic" pitchFamily="34" charset="0"/>
+                <a:ea typeface="Yu Gothic" pitchFamily="34" charset="-122"/>
+                <a:cs typeface="Yu Gothic" pitchFamily="34" charset="-120"/>
+              </a:rPr>
+              <a:t>取扱商品例：石炭・銅（銅精鉱／銅地金）・鉄鉱石・貴金属・リチウム・アルミ</a:t>
+            </a:r>
+            <a:endParaRPr lang="en-US" sz="620" dirty="0"/>
           </a:p>
         </p:txBody>
       </p:sp>
@@ -18922,69 +18850,134 @@
         </p:nvSpPr>
         <p:spPr>
           <a:xfrm>
-            <a:off x="4419600" y="4394200"/>
-            <a:ext cx="1069340" cy="117872"/>
-          </a:xfrm>
-          <a:prstGeom prst="rect">
-            <a:avLst/>
-          </a:prstGeom>
-          <a:noFill/>
-          <a:ln/>
-        </p:spPr>
-        <p:txBody>
-          <a:bodyPr wrap="none" lIns="0" tIns="0" rIns="0" bIns="0" rtlCol="0" anchor="t"/>
-          <a:lstStyle/>
-          <a:p>
-            <a:pPr algn="l" indent="0" marL="0">
-              <a:lnSpc>
-                <a:spcPts val="928"/>
-              </a:lnSpc>
-              <a:buNone/>
-            </a:pPr>
-            <a:r>
-              <a:rPr lang="en-US" sz="640" dirty="0">
-                <a:solidFill>
-                  <a:srgbClr val="555555"/>
-                </a:solidFill>
-                <a:latin typeface="Yu Gothic" pitchFamily="34" charset="0"/>
-                <a:ea typeface="Yu Gothic" pitchFamily="34" charset="-122"/>
-                <a:cs typeface="Yu Gothic" pitchFamily="34" charset="-120"/>
-              </a:rPr>
-              <a:t>販売フロー</a:t>
-            </a:r>
-            <a:endParaRPr lang="en-US" sz="640" dirty="0"/>
-          </a:p>
-        </p:txBody>
-      </p:sp>
-      <p:sp>
-        <p:nvSpPr>
-          <p:cNvPr id="28" name="t3_25"/>
-          <p:cNvSpPr txBox="1"/>
-          <p:nvPr/>
-        </p:nvSpPr>
-        <p:spPr>
-          <a:xfrm>
-            <a:off x="609600" y="4572000"/>
-            <a:ext cx="6603492" cy="127000"/>
-          </a:xfrm>
-          <a:prstGeom prst="rect">
-            <a:avLst/>
-          </a:prstGeom>
-          <a:noFill/>
-          <a:ln/>
-        </p:spPr>
-        <p:txBody>
-          <a:bodyPr wrap="none" lIns="0" tIns="0" rIns="0" bIns="0" rtlCol="0" anchor="t"/>
-          <a:lstStyle/>
-          <a:p>
-            <a:pPr algn="l" indent="0" marL="0">
-              <a:lnSpc>
-                <a:spcPts val="858"/>
-              </a:lnSpc>
-              <a:buNone/>
-            </a:pPr>
-            <a:r>
-              <a:rPr lang="en-US" sz="660" dirty="0">
+            <a:off x="609600" y="4089400"/>
+            <a:ext cx="6603492" cy="101600"/>
+          </a:xfrm>
+          <a:prstGeom prst="rect">
+            <a:avLst/>
+          </a:prstGeom>
+          <a:noFill/>
+          <a:ln/>
+        </p:spPr>
+        <p:txBody>
+          <a:bodyPr wrap="none" lIns="0" tIns="0" rIns="0" bIns="0" rtlCol="0" anchor="t"/>
+          <a:lstStyle/>
+          <a:p>
+            <a:pPr algn="l" indent="0" marL="0">
+              <a:lnSpc>
+                <a:spcPts val="728"/>
+              </a:lnSpc>
+              <a:buNone/>
+            </a:pPr>
+            <a:r>
+              <a:rPr lang="en-US" sz="560" dirty="0">
+                <a:solidFill>
+                  <a:srgbClr val="888888"/>
+                </a:solidFill>
+                <a:latin typeface="Yu Gothic" pitchFamily="34" charset="0"/>
+                <a:ea typeface="Yu Gothic" pitchFamily="34" charset="-122"/>
+                <a:cs typeface="Yu Gothic" pitchFamily="34" charset="-120"/>
+              </a:rPr>
+              <a:t>図の出典・簡略化元：金属資源G_P37（RtM＝Resource to Market）。地図を拠点の関係図に簡略化</a:t>
+            </a:r>
+            <a:endParaRPr lang="en-US" sz="560" dirty="0"/>
+          </a:p>
+        </p:txBody>
+      </p:sp>
+      <p:sp>
+        <p:nvSpPr>
+          <p:cNvPr id="28" name="Shape 24"/>
+          <p:cNvSpPr/>
+          <p:nvPr/>
+        </p:nvSpPr>
+        <p:spPr>
+          <a:xfrm>
+            <a:off x="609600" y="4241800"/>
+            <a:ext cx="6337300" cy="0"/>
+          </a:xfrm>
+          <a:prstGeom prst="line">
+            <a:avLst/>
+          </a:prstGeom>
+          <a:noFill/>
+          <a:ln w="12700">
+            <a:solidFill>
+              <a:srgbClr val="CFD2D5"/>
+            </a:solidFill>
+            <a:prstDash val="solid"/>
+          </a:ln>
+        </p:spPr>
+      </p:sp>
+      <p:sp>
+        <p:nvSpPr>
+          <p:cNvPr id="29" name="t3_26"/>
+          <p:cNvSpPr txBox="1"/>
+          <p:nvPr/>
+        </p:nvSpPr>
+        <p:spPr>
+          <a:xfrm>
+            <a:off x="609600" y="4343400"/>
+            <a:ext cx="6352540" cy="320040"/>
+          </a:xfrm>
+          <a:prstGeom prst="rect">
+            <a:avLst/>
+          </a:prstGeom>
+          <a:noFill/>
+          <a:ln/>
+        </p:spPr>
+        <p:txBody>
+          <a:bodyPr wrap="none" lIns="0" tIns="0" rIns="0" bIns="0" rtlCol="0" anchor="t"/>
+          <a:lstStyle/>
+          <a:p>
+            <a:pPr algn="l" indent="0" marL="0">
+              <a:lnSpc>
+                <a:spcPts val="2520"/>
+              </a:lnSpc>
+              <a:buNone/>
+            </a:pPr>
+            <a:r>
+              <a:rPr lang="en-US" sz="1800" spc="80" kern="0" dirty="0">
+                <a:solidFill>
+                  <a:srgbClr val="222222"/>
+                </a:solidFill>
+                <a:latin typeface="Yu Gothic" pitchFamily="34" charset="0"/>
+                <a:ea typeface="Yu Gothic" pitchFamily="34" charset="-122"/>
+                <a:cs typeface="Yu Gothic" pitchFamily="34" charset="-120"/>
+              </a:rPr>
+              <a:t>RtM事業のビジネスモデル（仮）</a:t>
+            </a:r>
+            <a:endParaRPr lang="en-US" sz="1800" dirty="0"/>
+          </a:p>
+        </p:txBody>
+      </p:sp>
+      <p:sp>
+        <p:nvSpPr>
+          <p:cNvPr id="30" name="t3_27"/>
+          <p:cNvSpPr txBox="1"/>
+          <p:nvPr/>
+        </p:nvSpPr>
+        <p:spPr>
+          <a:xfrm>
+            <a:off x="609600" y="4699000"/>
+            <a:ext cx="6352540" cy="196850"/>
+          </a:xfrm>
+          <a:prstGeom prst="rect">
+            <a:avLst/>
+          </a:prstGeom>
+          <a:noFill/>
+          <a:ln/>
+        </p:spPr>
+        <p:txBody>
+          <a:bodyPr wrap="none" lIns="0" tIns="0" rIns="0" bIns="0" rtlCol="0" anchor="t"/>
+          <a:lstStyle/>
+          <a:p>
+            <a:pPr algn="l" indent="0" marL="0">
+              <a:lnSpc>
+                <a:spcPts val="1550"/>
+              </a:lnSpc>
+              <a:buNone/>
+            </a:pPr>
+            <a:r>
+              <a:rPr lang="en-US" sz="1000" spc="30" kern="0" dirty="0">
                 <a:solidFill>
                   <a:srgbClr val="444444"/>
                 </a:solidFill>
@@ -18992,93 +18985,9 @@
                 <a:ea typeface="Yu Gothic" pitchFamily="34" charset="-122"/>
                 <a:cs typeface="Yu Gothic" pitchFamily="34" charset="-120"/>
               </a:rPr>
-              <a:t>取扱商品例：石炭・銅（銅精鉱／銅地金）・鉄鉱石・貴金属・リチウム・アルミ</a:t>
-            </a:r>
-            <a:endParaRPr lang="en-US" sz="660" dirty="0"/>
-          </a:p>
-        </p:txBody>
-      </p:sp>
-      <p:sp>
-        <p:nvSpPr>
-          <p:cNvPr id="29" name="t3_26"/>
-          <p:cNvSpPr txBox="1"/>
-          <p:nvPr/>
-        </p:nvSpPr>
-        <p:spPr>
-          <a:xfrm>
-            <a:off x="609600" y="4724400"/>
-            <a:ext cx="6603492" cy="101600"/>
-          </a:xfrm>
-          <a:prstGeom prst="rect">
-            <a:avLst/>
-          </a:prstGeom>
-          <a:noFill/>
-          <a:ln/>
-        </p:spPr>
-        <p:txBody>
-          <a:bodyPr wrap="none" lIns="0" tIns="0" rIns="0" bIns="0" rtlCol="0" anchor="t"/>
-          <a:lstStyle/>
-          <a:p>
-            <a:pPr algn="l" indent="0" marL="0">
-              <a:lnSpc>
-                <a:spcPts val="728"/>
-              </a:lnSpc>
-              <a:buNone/>
-            </a:pPr>
-            <a:r>
-              <a:rPr lang="en-US" sz="560" dirty="0">
-                <a:solidFill>
-                  <a:srgbClr val="888888"/>
-                </a:solidFill>
-                <a:latin typeface="Yu Gothic" pitchFamily="34" charset="0"/>
-                <a:ea typeface="Yu Gothic" pitchFamily="34" charset="-122"/>
-                <a:cs typeface="Yu Gothic" pitchFamily="34" charset="-120"/>
-              </a:rPr>
-              <a:t>図の出典・簡略化元：金属資源G_P37（RtM＝Resource to Market）。地図を拠点の関係図に簡略化</a:t>
-            </a:r>
-            <a:endParaRPr lang="en-US" sz="560" dirty="0"/>
-          </a:p>
-        </p:txBody>
-      </p:sp>
-      <p:sp>
-        <p:nvSpPr>
-          <p:cNvPr id="30" name="t3_27"/>
-          <p:cNvSpPr txBox="1"/>
-          <p:nvPr/>
-        </p:nvSpPr>
-        <p:spPr>
-          <a:xfrm>
-            <a:off x="609600" y="5003800"/>
-            <a:ext cx="714788" cy="139700"/>
-          </a:xfrm>
-          <a:prstGeom prst="rect">
-            <a:avLst/>
-          </a:prstGeom>
-          <a:noFill/>
-          <a:ln/>
-        </p:spPr>
-        <p:txBody>
-          <a:bodyPr wrap="none" lIns="0" tIns="0" rIns="0" bIns="0" rtlCol="0" anchor="t"/>
-          <a:lstStyle/>
-          <a:p>
-            <a:pPr algn="l" indent="0" marL="0">
-              <a:lnSpc>
-                <a:spcPts val="988"/>
-              </a:lnSpc>
-              <a:buNone/>
-            </a:pPr>
-            <a:r>
-              <a:rPr lang="en-US" sz="760" dirty="0">
-                <a:solidFill>
-                  <a:srgbClr val="222222"/>
-                </a:solidFill>
-                <a:latin typeface="Yu Gothic" pitchFamily="34" charset="0"/>
-                <a:ea typeface="Yu Gothic" pitchFamily="34" charset="-122"/>
-                <a:cs typeface="Yu Gothic" pitchFamily="34" charset="-120"/>
-              </a:rPr>
-              <a:t>多様な取引機能</a:t>
-            </a:r>
-            <a:endParaRPr lang="en-US" sz="760" dirty="0"/>
+              <a:t>一つの商品の中で、投資から販売まで一気通貫でつなぐ</a:t>
+            </a:r>
+            <a:endParaRPr lang="en-US" sz="1000" dirty="0"/>
           </a:p>
         </p:txBody>
       </p:sp>
@@ -19090,8 +18999,133 @@
         </p:nvSpPr>
         <p:spPr>
           <a:xfrm>
-            <a:off x="609600" y="5181600"/>
-            <a:ext cx="1422400" cy="254000"/>
+            <a:off x="4419600" y="4419600"/>
+            <a:ext cx="561777" cy="139700"/>
+          </a:xfrm>
+          <a:prstGeom prst="rect">
+            <a:avLst/>
+          </a:prstGeom>
+          <a:solidFill>
+            <a:srgbClr val="2A6FB0"/>
+          </a:solidFill>
+          <a:ln/>
+        </p:spPr>
+        <p:txBody>
+          <a:bodyPr wrap="none" lIns="25400" tIns="38100" rIns="38100" bIns="25400" rtlCol="0" anchor="ctr"/>
+          <a:lstStyle/>
+          <a:p>
+            <a:pPr algn="l" indent="0" marL="0">
+              <a:buNone/>
+            </a:pPr>
+            <a:r>
+              <a:rPr lang="en-US" sz="620" spc="30" kern="0" dirty="0">
+                <a:solidFill>
+                  <a:srgbClr val="FFFFFF"/>
+                </a:solidFill>
+                <a:latin typeface="Yu Gothic" pitchFamily="34" charset="0"/>
+                <a:ea typeface="Yu Gothic" pitchFamily="34" charset="-122"/>
+                <a:cs typeface="Yu Gothic" pitchFamily="34" charset="-120"/>
+              </a:rPr>
+              <a:t>PwC様FB①</a:t>
+            </a:r>
+            <a:endParaRPr lang="en-US" sz="620" dirty="0"/>
+          </a:p>
+        </p:txBody>
+      </p:sp>
+      <p:sp>
+        <p:nvSpPr>
+          <p:cNvPr id="32" name="t3_29"/>
+          <p:cNvSpPr txBox="1"/>
+          <p:nvPr/>
+        </p:nvSpPr>
+        <p:spPr>
+          <a:xfrm>
+            <a:off x="609600" y="4927600"/>
+            <a:ext cx="6603492" cy="346472"/>
+          </a:xfrm>
+          <a:prstGeom prst="rect">
+            <a:avLst/>
+          </a:prstGeom>
+          <a:noFill/>
+          <a:ln/>
+        </p:spPr>
+        <p:txBody>
+          <a:bodyPr wrap="square" lIns="0" tIns="0" rIns="0" bIns="0" rtlCol="0" anchor="t"/>
+          <a:lstStyle/>
+          <a:p>
+            <a:pPr algn="l" indent="0" marL="0">
+              <a:lnSpc>
+                <a:spcPts val="1365"/>
+              </a:lnSpc>
+              <a:buNone/>
+            </a:pPr>
+            <a:r>
+              <a:rPr lang="en-US" sz="780" dirty="0">
+                <a:solidFill>
+                  <a:srgbClr val="9AA0A6"/>
+                </a:solidFill>
+                <a:latin typeface="Yu Gothic" pitchFamily="34" charset="0"/>
+                <a:ea typeface="Yu Gothic" pitchFamily="34" charset="-122"/>
+                <a:cs typeface="Yu Gothic" pitchFamily="34" charset="-120"/>
+              </a:rPr>
+              <a:t>ＸＸＸＸＸＸＸＸＸＸＸＸＸＸＸＸＸＸＸＸＸＸＸＸＸＸＸＸＸＸＸＸＸＸＸＸＸＸＸＸＸＸＸＸＸＸＸＸＸＸＸＸＸＸＸＸＸＸＸＸＸＸＸＸＸＸＸＸＸＸＸＸＸＸＸＸＸＸＸＸＸＸＸＸＸＸＸＸＸＸＸＸＸＸＸＸＸＸＸＸ</a:t>
+            </a:r>
+            <a:endParaRPr lang="en-US" sz="780" dirty="0"/>
+          </a:p>
+        </p:txBody>
+      </p:sp>
+      <p:sp>
+        <p:nvSpPr>
+          <p:cNvPr id="33" name="t3_30"/>
+          <p:cNvSpPr txBox="1"/>
+          <p:nvPr/>
+        </p:nvSpPr>
+        <p:spPr>
+          <a:xfrm>
+            <a:off x="609600" y="5286970"/>
+            <a:ext cx="985965" cy="114300"/>
+          </a:xfrm>
+          <a:prstGeom prst="rect">
+            <a:avLst/>
+          </a:prstGeom>
+          <a:noFill/>
+          <a:ln/>
+        </p:spPr>
+        <p:txBody>
+          <a:bodyPr wrap="none" lIns="0" tIns="0" rIns="0" bIns="0" rtlCol="0" anchor="t"/>
+          <a:lstStyle/>
+          <a:p>
+            <a:pPr algn="l" indent="0" marL="0">
+              <a:lnSpc>
+                <a:spcPts val="754"/>
+              </a:lnSpc>
+              <a:buNone/>
+            </a:pPr>
+            <a:r>
+              <a:rPr lang="en-US" sz="580" spc="30" kern="0" dirty="0">
+                <a:solidFill>
+                  <a:srgbClr val="B0B4B8"/>
+                </a:solidFill>
+                <a:latin typeface="Yu Gothic" pitchFamily="34" charset="0"/>
+                <a:ea typeface="Yu Gothic" pitchFamily="34" charset="-122"/>
+                <a:cs typeface="Yu Gothic" pitchFamily="34" charset="-120"/>
+              </a:rPr>
+              <a:t>▸本文 100字／英語 約55語</a:t>
+            </a:r>
+            <a:endParaRPr lang="en-US" sz="580" dirty="0"/>
+          </a:p>
+        </p:txBody>
+      </p:sp>
+      <p:sp>
+        <p:nvSpPr>
+          <p:cNvPr id="34" name="t3_31"/>
+          <p:cNvSpPr txBox="1"/>
+          <p:nvPr/>
+        </p:nvSpPr>
+        <p:spPr>
+          <a:xfrm>
+            <a:off x="2235200" y="5461000"/>
+            <a:ext cx="3086100" cy="228600"/>
           </a:xfrm>
           <a:prstGeom prst="rect">
             <a:avLst/>
@@ -19109,13 +19143,10 @@
           <a:lstStyle/>
           <a:p>
             <a:pPr algn="ctr" indent="0" marL="0">
-              <a:lnSpc>
-                <a:spcPts val="999"/>
-              </a:lnSpc>
-              <a:buNone/>
-            </a:pPr>
-            <a:r>
-              <a:rPr lang="en-US" sz="740" dirty="0">
+              <a:buNone/>
+            </a:pPr>
+            <a:r>
+              <a:rPr lang="en-US" sz="740" b="1" dirty="0">
                 <a:solidFill>
                   <a:srgbClr val="222222"/>
                 </a:solidFill>
@@ -19123,7 +19154,7 @@
                 <a:ea typeface="Yu Gothic" pitchFamily="34" charset="-122"/>
                 <a:cs typeface="Yu Gothic" pitchFamily="34" charset="-120"/>
               </a:rPr>
-              <a:t>取扱商品の広さ</a:t>
+              <a:t>Mitsubishi Corporation</a:t>
             </a:r>
             <a:endParaRPr lang="en-US" sz="740" dirty="0"/>
           </a:p>
@@ -19131,56 +19162,14 @@
       </p:sp>
       <p:sp>
         <p:nvSpPr>
-          <p:cNvPr id="32" name="t3_29"/>
-          <p:cNvSpPr txBox="1"/>
-          <p:nvPr/>
-        </p:nvSpPr>
-        <p:spPr>
-          <a:xfrm>
-            <a:off x="609600" y="5473700"/>
-            <a:ext cx="1491996" cy="213122"/>
-          </a:xfrm>
-          <a:prstGeom prst="rect">
-            <a:avLst/>
-          </a:prstGeom>
-          <a:noFill/>
-          <a:ln/>
-        </p:spPr>
-        <p:txBody>
-          <a:bodyPr wrap="square" lIns="0" tIns="0" rIns="0" bIns="0" rtlCol="0" anchor="t"/>
-          <a:lstStyle/>
-          <a:p>
-            <a:pPr algn="l" indent="0" marL="0">
-              <a:lnSpc>
-                <a:spcPts val="840"/>
-              </a:lnSpc>
-              <a:buNone/>
-            </a:pPr>
-            <a:r>
-              <a:rPr lang="en-US" sz="560" dirty="0">
-                <a:solidFill>
-                  <a:srgbClr val="9AA0A6"/>
-                </a:solidFill>
-                <a:latin typeface="Yu Gothic" pitchFamily="34" charset="0"/>
-                <a:ea typeface="Yu Gothic" pitchFamily="34" charset="-122"/>
-                <a:cs typeface="Yu Gothic" pitchFamily="34" charset="-120"/>
-              </a:rPr>
-              <a:t>ＸＸＸＸＸＸＸＸＸＸＸＸＸＸＸＸＸＸＸＸＸＸＸＸＸＸＸＸＸＸ</a:t>
-            </a:r>
-            <a:endParaRPr lang="en-US" sz="560" dirty="0"/>
-          </a:p>
-        </p:txBody>
-      </p:sp>
-      <p:sp>
-        <p:nvSpPr>
-          <p:cNvPr id="33" name="t3_30"/>
-          <p:cNvSpPr txBox="1"/>
-          <p:nvPr/>
-        </p:nvSpPr>
-        <p:spPr>
-          <a:xfrm>
-            <a:off x="2209800" y="5181600"/>
-            <a:ext cx="1422400" cy="254000"/>
+          <p:cNvPr id="35" name="t3_32"/>
+          <p:cNvSpPr txBox="1"/>
+          <p:nvPr/>
+        </p:nvSpPr>
+        <p:spPr>
+          <a:xfrm>
+            <a:off x="2286000" y="5740400"/>
+            <a:ext cx="660400" cy="177800"/>
           </a:xfrm>
           <a:prstGeom prst="rect">
             <a:avLst/>
@@ -19198,13 +19187,10 @@
           <a:lstStyle/>
           <a:p>
             <a:pPr algn="ctr" indent="0" marL="0">
-              <a:lnSpc>
-                <a:spcPts val="999"/>
-              </a:lnSpc>
-              <a:buNone/>
-            </a:pPr>
-            <a:r>
-              <a:rPr lang="en-US" sz="740" dirty="0">
+              <a:buNone/>
+            </a:pPr>
+            <a:r>
+              <a:rPr lang="en-US" sz="580" dirty="0">
                 <a:solidFill>
                   <a:srgbClr val="222222"/>
                 </a:solidFill>
@@ -19212,69 +19198,29 @@
                 <a:ea typeface="Yu Gothic" pitchFamily="34" charset="-122"/>
                 <a:cs typeface="Yu Gothic" pitchFamily="34" charset="-120"/>
               </a:rPr>
-              <a:t>在庫</a:t>
-            </a:r>
-            <a:endParaRPr lang="en-US" sz="740" dirty="0"/>
-          </a:p>
-        </p:txBody>
-      </p:sp>
-      <p:sp>
-        <p:nvSpPr>
-          <p:cNvPr id="34" name="t3_31"/>
-          <p:cNvSpPr txBox="1"/>
-          <p:nvPr/>
-        </p:nvSpPr>
-        <p:spPr>
-          <a:xfrm>
-            <a:off x="2209800" y="5473700"/>
-            <a:ext cx="1491996" cy="213122"/>
-          </a:xfrm>
-          <a:prstGeom prst="rect">
-            <a:avLst/>
-          </a:prstGeom>
-          <a:noFill/>
-          <a:ln/>
-        </p:spPr>
-        <p:txBody>
-          <a:bodyPr wrap="square" lIns="0" tIns="0" rIns="0" bIns="0" rtlCol="0" anchor="t"/>
-          <a:lstStyle/>
-          <a:p>
-            <a:pPr algn="l" indent="0" marL="0">
-              <a:lnSpc>
-                <a:spcPts val="840"/>
-              </a:lnSpc>
-              <a:buNone/>
-            </a:pPr>
-            <a:r>
-              <a:rPr lang="en-US" sz="560" dirty="0">
-                <a:solidFill>
-                  <a:srgbClr val="9AA0A6"/>
-                </a:solidFill>
-                <a:latin typeface="Yu Gothic" pitchFamily="34" charset="0"/>
-                <a:ea typeface="Yu Gothic" pitchFamily="34" charset="-122"/>
-                <a:cs typeface="Yu Gothic" pitchFamily="34" charset="-120"/>
-              </a:rPr>
-              <a:t>ＸＸＸＸＸＸＸＸＸＸＸＸＸＸＸＸＸＸＸＸＸＸＸＸＸＸＸＸＸＸ</a:t>
-            </a:r>
-            <a:endParaRPr lang="en-US" sz="560" dirty="0"/>
-          </a:p>
-        </p:txBody>
-      </p:sp>
-      <p:sp>
-        <p:nvSpPr>
-          <p:cNvPr id="35" name="t3_32"/>
-          <p:cNvSpPr txBox="1"/>
-          <p:nvPr/>
-        </p:nvSpPr>
-        <p:spPr>
-          <a:xfrm>
-            <a:off x="3810000" y="5181600"/>
-            <a:ext cx="1422400" cy="254000"/>
-          </a:xfrm>
-          <a:prstGeom prst="rect">
-            <a:avLst/>
-          </a:prstGeom>
-          <a:noFill/>
+              <a:t>第三者取引</a:t>
+            </a:r>
+            <a:endParaRPr lang="en-US" sz="580" dirty="0"/>
+          </a:p>
+        </p:txBody>
+      </p:sp>
+      <p:sp>
+        <p:nvSpPr>
+          <p:cNvPr id="36" name="t3_33"/>
+          <p:cNvSpPr txBox="1"/>
+          <p:nvPr/>
+        </p:nvSpPr>
+        <p:spPr>
+          <a:xfrm>
+            <a:off x="2971800" y="5740400"/>
+            <a:ext cx="711200" cy="177800"/>
+          </a:xfrm>
+          <a:prstGeom prst="rect">
+            <a:avLst/>
+          </a:prstGeom>
+          <a:solidFill>
+            <a:srgbClr val="F1F2F4"/>
+          </a:solidFill>
           <a:ln w="12700">
             <a:solidFill>
               <a:srgbClr val="9AA0A6"/>
@@ -19287,13 +19233,10 @@
           <a:lstStyle/>
           <a:p>
             <a:pPr algn="ctr" indent="0" marL="0">
-              <a:lnSpc>
-                <a:spcPts val="999"/>
-              </a:lnSpc>
-              <a:buNone/>
-            </a:pPr>
-            <a:r>
-              <a:rPr lang="en-US" sz="740" dirty="0">
+              <a:buNone/>
+            </a:pPr>
+            <a:r>
+              <a:rPr lang="en-US" sz="580" dirty="0">
                 <a:solidFill>
                   <a:srgbClr val="222222"/>
                 </a:solidFill>
@@ -19301,22 +19244,70 @@
                 <a:ea typeface="Yu Gothic" pitchFamily="34" charset="-122"/>
                 <a:cs typeface="Yu Gothic" pitchFamily="34" charset="-120"/>
               </a:rPr>
-              <a:t>輸送手配</a:t>
-            </a:r>
-            <a:endParaRPr lang="en-US" sz="740" dirty="0"/>
-          </a:p>
-        </p:txBody>
-      </p:sp>
-      <p:sp>
-        <p:nvSpPr>
-          <p:cNvPr id="36" name="t3_33"/>
-          <p:cNvSpPr txBox="1"/>
-          <p:nvPr/>
-        </p:nvSpPr>
-        <p:spPr>
-          <a:xfrm>
-            <a:off x="3810000" y="5473700"/>
-            <a:ext cx="1491996" cy="213122"/>
+              <a:t>MC保有資産</a:t>
+            </a:r>
+            <a:endParaRPr lang="en-US" sz="580" dirty="0"/>
+          </a:p>
+        </p:txBody>
+      </p:sp>
+      <p:pic>
+        <p:nvPicPr>
+          <p:cNvPr id="37" name="Image 1" descr="preencoded.png">    </p:cNvPr>
+          <p:cNvPicPr>
+            <a:picLocks noChangeAspect="1"/>
+          </p:cNvPicPr>
+          <p:nvPr/>
+        </p:nvPicPr>
+        <p:blipFill>
+          <a:blip r:embed="rId2"/>
+          <a:stretch>
+            <a:fillRect/>
+          </a:stretch>
+        </p:blipFill>
+        <p:spPr>
+          <a:xfrm>
+            <a:off x="2235200" y="5956300"/>
+            <a:ext cx="3086100" cy="482600"/>
+          </a:xfrm>
+          <a:prstGeom prst="rect">
+            <a:avLst/>
+          </a:prstGeom>
+        </p:spPr>
+      </p:pic>
+      <p:pic>
+        <p:nvPicPr>
+          <p:cNvPr id="38" name="Image 2" descr="preencoded.png">    </p:cNvPr>
+          <p:cNvPicPr>
+            <a:picLocks noChangeAspect="1"/>
+          </p:cNvPicPr>
+          <p:nvPr/>
+        </p:nvPicPr>
+        <p:blipFill>
+          <a:blip r:embed="rId3"/>
+          <a:stretch>
+            <a:fillRect/>
+          </a:stretch>
+        </p:blipFill>
+        <p:spPr>
+          <a:xfrm>
+            <a:off x="2235200" y="6731000"/>
+            <a:ext cx="3086100" cy="482600"/>
+          </a:xfrm>
+          <a:prstGeom prst="rect">
+            <a:avLst/>
+          </a:prstGeom>
+        </p:spPr>
+      </p:pic>
+      <p:sp>
+        <p:nvSpPr>
+          <p:cNvPr id="39" name="t3_36"/>
+          <p:cNvSpPr txBox="1"/>
+          <p:nvPr/>
+        </p:nvSpPr>
+        <p:spPr>
+          <a:xfrm>
+            <a:off x="2743200" y="6019800"/>
+            <a:ext cx="1069340" cy="220266"/>
           </a:xfrm>
           <a:prstGeom prst="rect">
             <a:avLst/>
@@ -19330,35 +19321,276 @@
           <a:p>
             <a:pPr algn="l" indent="0" marL="0">
               <a:lnSpc>
-                <a:spcPts val="840"/>
-              </a:lnSpc>
-              <a:buNone/>
-            </a:pPr>
-            <a:r>
-              <a:rPr lang="en-US" sz="560" dirty="0">
-                <a:solidFill>
-                  <a:srgbClr val="9AA0A6"/>
-                </a:solidFill>
-                <a:latin typeface="Yu Gothic" pitchFamily="34" charset="0"/>
-                <a:ea typeface="Yu Gothic" pitchFamily="34" charset="-122"/>
-                <a:cs typeface="Yu Gothic" pitchFamily="34" charset="-120"/>
-              </a:rPr>
-              <a:t>ＸＸＸＸＸＸＸＸＸＸＸＸＸＸＸＸＸＸＸＸＸＸＸＸＸＸＸＸＸＸ</a:t>
-            </a:r>
-            <a:endParaRPr lang="en-US" sz="560" dirty="0"/>
-          </a:p>
-        </p:txBody>
-      </p:sp>
-      <p:sp>
-        <p:nvSpPr>
-          <p:cNvPr id="37" name="t3_34"/>
-          <p:cNvSpPr txBox="1"/>
-          <p:nvPr/>
-        </p:nvSpPr>
-        <p:spPr>
-          <a:xfrm>
-            <a:off x="5410200" y="5181600"/>
-            <a:ext cx="1422400" cy="254000"/>
+                <a:spcPts val="868"/>
+              </a:lnSpc>
+              <a:buNone/>
+            </a:pPr>
+            <a:r>
+              <a:rPr lang="en-US" sz="620" dirty="0">
+                <a:solidFill>
+                  <a:srgbClr val="222222"/>
+                </a:solidFill>
+                <a:latin typeface="Yu Gothic" pitchFamily="34" charset="0"/>
+                <a:ea typeface="Yu Gothic" pitchFamily="34" charset="-122"/>
+                <a:cs typeface="Yu Gothic" pitchFamily="34" charset="-120"/>
+              </a:rPr>
+              <a:t>資源確保による</a:t>
+            </a:r>
+            <a:endParaRPr lang="en-US" sz="620" dirty="0"/>
+          </a:p>
+          <a:p>
+            <a:pPr algn="l" indent="0" marL="0">
+              <a:lnSpc>
+                <a:spcPts val="868"/>
+              </a:lnSpc>
+              <a:buNone/>
+            </a:pPr>
+            <a:r>
+              <a:rPr lang="en-US" sz="620" b="1" dirty="0">
+                <a:solidFill>
+                  <a:srgbClr val="222222"/>
+                </a:solidFill>
+                <a:latin typeface="Yu Gothic" pitchFamily="34" charset="0"/>
+                <a:ea typeface="Yu Gothic" pitchFamily="34" charset="-122"/>
+                <a:cs typeface="Yu Gothic" pitchFamily="34" charset="-120"/>
+              </a:rPr>
+              <a:t>安定供給</a:t>
+            </a:r>
+            <a:endParaRPr lang="en-US" sz="620" dirty="0"/>
+          </a:p>
+        </p:txBody>
+      </p:sp>
+      <p:sp>
+        <p:nvSpPr>
+          <p:cNvPr id="40" name="t3_37"/>
+          <p:cNvSpPr txBox="1"/>
+          <p:nvPr/>
+        </p:nvSpPr>
+        <p:spPr>
+          <a:xfrm>
+            <a:off x="3835400" y="5969000"/>
+            <a:ext cx="1122172" cy="220266"/>
+          </a:xfrm>
+          <a:prstGeom prst="rect">
+            <a:avLst/>
+          </a:prstGeom>
+          <a:noFill/>
+          <a:ln/>
+        </p:spPr>
+        <p:txBody>
+          <a:bodyPr wrap="square" lIns="0" tIns="0" rIns="0" bIns="0" rtlCol="0" anchor="t"/>
+          <a:lstStyle/>
+          <a:p>
+            <a:pPr algn="r" indent="0" marL="0">
+              <a:lnSpc>
+                <a:spcPts val="868"/>
+              </a:lnSpc>
+              <a:buNone/>
+            </a:pPr>
+            <a:r>
+              <a:rPr lang="en-US" sz="620" dirty="0">
+                <a:solidFill>
+                  <a:srgbClr val="222222"/>
+                </a:solidFill>
+                <a:latin typeface="Yu Gothic" pitchFamily="34" charset="0"/>
+                <a:ea typeface="Yu Gothic" pitchFamily="34" charset="-122"/>
+                <a:cs typeface="Yu Gothic" pitchFamily="34" charset="-120"/>
+              </a:rPr>
+              <a:t>市場・業界動向の発信・知見共有による</a:t>
+            </a:r>
+            <a:pPr algn="r" indent="0" marL="0">
+              <a:lnSpc>
+                <a:spcPts val="868"/>
+              </a:lnSpc>
+              <a:buNone/>
+            </a:pPr>
+            <a:r>
+              <a:rPr lang="en-US" sz="620" b="1" dirty="0">
+                <a:solidFill>
+                  <a:srgbClr val="222222"/>
+                </a:solidFill>
+                <a:latin typeface="Yu Gothic" pitchFamily="34" charset="0"/>
+                <a:ea typeface="Yu Gothic" pitchFamily="34" charset="-122"/>
+                <a:cs typeface="Yu Gothic" pitchFamily="34" charset="-120"/>
+              </a:rPr>
+              <a:t>事業機会の発掘</a:t>
+            </a:r>
+            <a:endParaRPr lang="en-US" sz="620" dirty="0"/>
+          </a:p>
+        </p:txBody>
+      </p:sp>
+      <p:sp>
+        <p:nvSpPr>
+          <p:cNvPr id="41" name="t3_38"/>
+          <p:cNvSpPr txBox="1"/>
+          <p:nvPr/>
+        </p:nvSpPr>
+        <p:spPr>
+          <a:xfrm>
+            <a:off x="2235200" y="6438900"/>
+            <a:ext cx="3086100" cy="279400"/>
+          </a:xfrm>
+          <a:prstGeom prst="rect">
+            <a:avLst/>
+          </a:prstGeom>
+          <a:noFill/>
+          <a:ln w="12700">
+            <a:solidFill>
+              <a:srgbClr val="3C4045"/>
+            </a:solidFill>
+            <a:prstDash val="solid"/>
+          </a:ln>
+        </p:spPr>
+        <p:txBody>
+          <a:bodyPr wrap="square" lIns="25400" tIns="38100" rIns="38100" bIns="25400" rtlCol="0" anchor="ctr"/>
+          <a:lstStyle/>
+          <a:p>
+            <a:pPr algn="ctr" indent="0" marL="0">
+              <a:buNone/>
+            </a:pPr>
+            <a:r>
+              <a:rPr lang="en-US" sz="900" b="1" dirty="0">
+                <a:solidFill>
+                  <a:srgbClr val="222222"/>
+                </a:solidFill>
+                <a:latin typeface="Yu Gothic" pitchFamily="34" charset="0"/>
+                <a:ea typeface="Yu Gothic" pitchFamily="34" charset="-122"/>
+                <a:cs typeface="Yu Gothic" pitchFamily="34" charset="-120"/>
+              </a:rPr>
+              <a:t>RtM</a:t>
+            </a:r>
+            <a:endParaRPr lang="en-US" sz="900" dirty="0"/>
+          </a:p>
+        </p:txBody>
+      </p:sp>
+      <p:sp>
+        <p:nvSpPr>
+          <p:cNvPr id="42" name="t3_39"/>
+          <p:cNvSpPr txBox="1"/>
+          <p:nvPr/>
+        </p:nvSpPr>
+        <p:spPr>
+          <a:xfrm>
+            <a:off x="2743200" y="6807200"/>
+            <a:ext cx="1069340" cy="220266"/>
+          </a:xfrm>
+          <a:prstGeom prst="rect">
+            <a:avLst/>
+          </a:prstGeom>
+          <a:noFill/>
+          <a:ln/>
+        </p:spPr>
+        <p:txBody>
+          <a:bodyPr wrap="square" lIns="0" tIns="0" rIns="0" bIns="0" rtlCol="0" anchor="t"/>
+          <a:lstStyle/>
+          <a:p>
+            <a:pPr algn="l" indent="0" marL="0">
+              <a:lnSpc>
+                <a:spcPts val="868"/>
+              </a:lnSpc>
+              <a:buNone/>
+            </a:pPr>
+            <a:r>
+              <a:rPr lang="en-US" sz="620" dirty="0">
+                <a:solidFill>
+                  <a:srgbClr val="222222"/>
+                </a:solidFill>
+                <a:latin typeface="Yu Gothic" pitchFamily="34" charset="0"/>
+                <a:ea typeface="Yu Gothic" pitchFamily="34" charset="-122"/>
+                <a:cs typeface="Yu Gothic" pitchFamily="34" charset="-120"/>
+              </a:rPr>
+              <a:t>トレーディング機能強化による</a:t>
+            </a:r>
+            <a:pPr algn="l" indent="0" marL="0">
+              <a:lnSpc>
+                <a:spcPts val="868"/>
+              </a:lnSpc>
+              <a:buNone/>
+            </a:pPr>
+            <a:r>
+              <a:rPr lang="en-US" sz="620" b="1" dirty="0">
+                <a:solidFill>
+                  <a:srgbClr val="222222"/>
+                </a:solidFill>
+                <a:latin typeface="Yu Gothic" pitchFamily="34" charset="0"/>
+                <a:ea typeface="Yu Gothic" pitchFamily="34" charset="-122"/>
+                <a:cs typeface="Yu Gothic" pitchFamily="34" charset="-120"/>
+              </a:rPr>
+              <a:t>継続的な付加価値創出</a:t>
+            </a:r>
+            <a:endParaRPr lang="en-US" sz="620" dirty="0"/>
+          </a:p>
+        </p:txBody>
+      </p:sp>
+      <p:sp>
+        <p:nvSpPr>
+          <p:cNvPr id="43" name="t3_40"/>
+          <p:cNvSpPr txBox="1"/>
+          <p:nvPr/>
+        </p:nvSpPr>
+        <p:spPr>
+          <a:xfrm>
+            <a:off x="3835400" y="6756400"/>
+            <a:ext cx="1122172" cy="220266"/>
+          </a:xfrm>
+          <a:prstGeom prst="rect">
+            <a:avLst/>
+          </a:prstGeom>
+          <a:noFill/>
+          <a:ln/>
+        </p:spPr>
+        <p:txBody>
+          <a:bodyPr wrap="square" lIns="0" tIns="0" rIns="0" bIns="0" rtlCol="0" anchor="t"/>
+          <a:lstStyle/>
+          <a:p>
+            <a:pPr algn="r" indent="0" marL="0">
+              <a:lnSpc>
+                <a:spcPts val="868"/>
+              </a:lnSpc>
+              <a:buNone/>
+            </a:pPr>
+            <a:r>
+              <a:rPr lang="en-US" sz="620" dirty="0">
+                <a:solidFill>
+                  <a:srgbClr val="222222"/>
+                </a:solidFill>
+                <a:latin typeface="Yu Gothic" pitchFamily="34" charset="0"/>
+                <a:ea typeface="Yu Gothic" pitchFamily="34" charset="-122"/>
+                <a:cs typeface="Yu Gothic" pitchFamily="34" charset="-120"/>
+              </a:rPr>
+              <a:t>広い産業接地面を活かした</a:t>
+            </a:r>
+            <a:pPr algn="r" indent="0" marL="0">
+              <a:lnSpc>
+                <a:spcPts val="868"/>
+              </a:lnSpc>
+              <a:buNone/>
+            </a:pPr>
+            <a:r>
+              <a:rPr lang="en-US" sz="620" b="1" dirty="0">
+                <a:solidFill>
+                  <a:srgbClr val="222222"/>
+                </a:solidFill>
+                <a:latin typeface="Yu Gothic" pitchFamily="34" charset="0"/>
+                <a:ea typeface="Yu Gothic" pitchFamily="34" charset="-122"/>
+                <a:cs typeface="Yu Gothic" pitchFamily="34" charset="-120"/>
+              </a:rPr>
+              <a:t>インテリジェンス機能の発揮</a:t>
+            </a:r>
+            <a:endParaRPr lang="en-US" sz="620" dirty="0"/>
+          </a:p>
+        </p:txBody>
+      </p:sp>
+      <p:sp>
+        <p:nvSpPr>
+          <p:cNvPr id="44" name="t3_41"/>
+          <p:cNvSpPr txBox="1"/>
+          <p:nvPr/>
+        </p:nvSpPr>
+        <p:spPr>
+          <a:xfrm>
+            <a:off x="2235200" y="7213600"/>
+            <a:ext cx="3086100" cy="228600"/>
           </a:xfrm>
           <a:prstGeom prst="rect">
             <a:avLst/>
@@ -19376,13 +19608,10 @@
           <a:lstStyle/>
           <a:p>
             <a:pPr algn="ctr" indent="0" marL="0">
-              <a:lnSpc>
-                <a:spcPts val="999"/>
-              </a:lnSpc>
-              <a:buNone/>
-            </a:pPr>
-            <a:r>
-              <a:rPr lang="en-US" sz="740" dirty="0">
+              <a:buNone/>
+            </a:pPr>
+            <a:r>
+              <a:rPr lang="en-US" sz="740" b="1" dirty="0">
                 <a:solidFill>
                   <a:srgbClr val="222222"/>
                 </a:solidFill>
@@ -19390,7 +19619,7 @@
                 <a:ea typeface="Yu Gothic" pitchFamily="34" charset="-122"/>
                 <a:cs typeface="Yu Gothic" pitchFamily="34" charset="-120"/>
               </a:rPr>
-              <a:t>ヘッジ</a:t>
+              <a:t>顧客基盤</a:t>
             </a:r>
             <a:endParaRPr lang="en-US" sz="740" dirty="0"/>
           </a:p>
@@ -19398,597 +19627,14 @@
       </p:sp>
       <p:sp>
         <p:nvSpPr>
-          <p:cNvPr id="38" name="t3_35"/>
-          <p:cNvSpPr txBox="1"/>
-          <p:nvPr/>
-        </p:nvSpPr>
-        <p:spPr>
-          <a:xfrm>
-            <a:off x="5410200" y="5473700"/>
-            <a:ext cx="1491996" cy="213122"/>
-          </a:xfrm>
-          <a:prstGeom prst="rect">
-            <a:avLst/>
-          </a:prstGeom>
-          <a:noFill/>
-          <a:ln/>
-        </p:spPr>
-        <p:txBody>
-          <a:bodyPr wrap="square" lIns="0" tIns="0" rIns="0" bIns="0" rtlCol="0" anchor="t"/>
-          <a:lstStyle/>
-          <a:p>
-            <a:pPr algn="l" indent="0" marL="0">
-              <a:lnSpc>
-                <a:spcPts val="840"/>
-              </a:lnSpc>
-              <a:buNone/>
-            </a:pPr>
-            <a:r>
-              <a:rPr lang="en-US" sz="560" dirty="0">
-                <a:solidFill>
-                  <a:srgbClr val="9AA0A6"/>
-                </a:solidFill>
-                <a:latin typeface="Yu Gothic" pitchFamily="34" charset="0"/>
-                <a:ea typeface="Yu Gothic" pitchFamily="34" charset="-122"/>
-                <a:cs typeface="Yu Gothic" pitchFamily="34" charset="-120"/>
-              </a:rPr>
-              <a:t>ＸＸＸＸＸＸＸＸＸＸＸＸＸＸＸＸＸＸＸＸＸＸＸＸＸＸＸＸＸＸ</a:t>
-            </a:r>
-            <a:endParaRPr lang="en-US" sz="560" dirty="0"/>
-          </a:p>
-        </p:txBody>
-      </p:sp>
-      <p:sp>
-        <p:nvSpPr>
-          <p:cNvPr id="39" name="t3_36"/>
-          <p:cNvSpPr txBox="1"/>
-          <p:nvPr/>
-        </p:nvSpPr>
-        <p:spPr>
-          <a:xfrm>
-            <a:off x="609600" y="5842000"/>
-            <a:ext cx="2101009" cy="139700"/>
-          </a:xfrm>
-          <a:prstGeom prst="rect">
-            <a:avLst/>
-          </a:prstGeom>
-          <a:noFill/>
-          <a:ln/>
-        </p:spPr>
-        <p:txBody>
-          <a:bodyPr wrap="none" lIns="0" tIns="0" rIns="0" bIns="0" rtlCol="0" anchor="t"/>
-          <a:lstStyle/>
-          <a:p>
-            <a:pPr algn="l" indent="0" marL="0">
-              <a:lnSpc>
-                <a:spcPts val="988"/>
-              </a:lnSpc>
-              <a:buNone/>
-            </a:pPr>
-            <a:r>
-              <a:rPr lang="en-US" sz="760" dirty="0">
-                <a:solidFill>
-                  <a:srgbClr val="222222"/>
-                </a:solidFill>
-                <a:latin typeface="Yu Gothic" pitchFamily="34" charset="0"/>
-                <a:ea typeface="Yu Gothic" pitchFamily="34" charset="-122"/>
-                <a:cs typeface="Yu Gothic" pitchFamily="34" charset="-120"/>
-              </a:rPr>
-              <a:t>投資（本体）とトレーディング（RtM）の連携</a:t>
-            </a:r>
-            <a:endParaRPr lang="en-US" sz="760" dirty="0"/>
-          </a:p>
-        </p:txBody>
-      </p:sp>
-      <p:sp>
-        <p:nvSpPr>
-          <p:cNvPr id="40" name="t3_37"/>
-          <p:cNvSpPr txBox="1"/>
-          <p:nvPr/>
-        </p:nvSpPr>
-        <p:spPr>
-          <a:xfrm>
-            <a:off x="609600" y="6019800"/>
-            <a:ext cx="1905000" cy="381000"/>
-          </a:xfrm>
-          <a:prstGeom prst="rect">
-            <a:avLst/>
-          </a:prstGeom>
-          <a:noFill/>
-          <a:ln w="12700">
-            <a:solidFill>
-              <a:srgbClr val="9AA0A6"/>
-            </a:solidFill>
-            <a:prstDash val="solid"/>
-          </a:ln>
-        </p:spPr>
-        <p:txBody>
-          <a:bodyPr wrap="square" lIns="25400" tIns="38100" rIns="38100" bIns="25400" rtlCol="0" anchor="ctr"/>
-          <a:lstStyle/>
-          <a:p>
-            <a:pPr algn="ctr" indent="0" marL="0">
-              <a:lnSpc>
-                <a:spcPts val="999"/>
-              </a:lnSpc>
-              <a:buNone/>
-            </a:pPr>
-            <a:r>
-              <a:rPr lang="en-US" sz="740" dirty="0">
-                <a:solidFill>
-                  <a:srgbClr val="222222"/>
-                </a:solidFill>
-                <a:latin typeface="Yu Gothic" pitchFamily="34" charset="0"/>
-                <a:ea typeface="Yu Gothic" pitchFamily="34" charset="-122"/>
-                <a:cs typeface="Yu Gothic" pitchFamily="34" charset="-120"/>
-              </a:rPr>
-              <a:t>資源投資</a:t>
-            </a:r>
-            <a:endParaRPr lang="en-US" sz="740" dirty="0"/>
-          </a:p>
-          <a:p>
-            <a:pPr algn="ctr" indent="0" marL="0">
-              <a:lnSpc>
-                <a:spcPts val="999"/>
-              </a:lnSpc>
-              <a:buNone/>
-            </a:pPr>
-            <a:r>
-              <a:rPr lang="en-US" sz="740" dirty="0">
-                <a:solidFill>
-                  <a:srgbClr val="222222"/>
-                </a:solidFill>
-                <a:latin typeface="Yu Gothic" pitchFamily="34" charset="0"/>
-                <a:ea typeface="Yu Gothic" pitchFamily="34" charset="-122"/>
-                <a:cs typeface="Yu Gothic" pitchFamily="34" charset="-120"/>
-              </a:rPr>
-              <a:t>（三菱商事本体）</a:t>
-            </a:r>
-            <a:endParaRPr lang="en-US" sz="740" dirty="0"/>
-          </a:p>
-        </p:txBody>
-      </p:sp>
-      <p:sp>
-        <p:nvSpPr>
-          <p:cNvPr id="41" name="t3_38"/>
-          <p:cNvSpPr txBox="1"/>
-          <p:nvPr/>
-        </p:nvSpPr>
-        <p:spPr>
-          <a:xfrm>
-            <a:off x="2540000" y="6096000"/>
-            <a:ext cx="131778" cy="165100"/>
-          </a:xfrm>
-          <a:prstGeom prst="rect">
-            <a:avLst/>
-          </a:prstGeom>
-          <a:noFill/>
-          <a:ln/>
-        </p:spPr>
-        <p:txBody>
-          <a:bodyPr wrap="none" lIns="0" tIns="0" rIns="0" bIns="0" rtlCol="0" anchor="t"/>
-          <a:lstStyle/>
-          <a:p>
-            <a:pPr algn="l" indent="0" marL="0">
-              <a:lnSpc>
-                <a:spcPts val="1170"/>
-              </a:lnSpc>
-              <a:buNone/>
-            </a:pPr>
-            <a:r>
-              <a:rPr lang="en-US" sz="900" dirty="0">
-                <a:solidFill>
-                  <a:srgbClr val="888888"/>
-                </a:solidFill>
-                <a:latin typeface="Yu Gothic" pitchFamily="34" charset="0"/>
-                <a:ea typeface="Yu Gothic" pitchFamily="34" charset="-122"/>
-                <a:cs typeface="Yu Gothic" pitchFamily="34" charset="-120"/>
-              </a:rPr>
-              <a:t>→</a:t>
-            </a:r>
-            <a:endParaRPr lang="en-US" sz="900" dirty="0"/>
-          </a:p>
-        </p:txBody>
-      </p:sp>
-      <p:sp>
-        <p:nvSpPr>
-          <p:cNvPr id="42" name="t3_39"/>
-          <p:cNvSpPr txBox="1"/>
-          <p:nvPr/>
-        </p:nvSpPr>
-        <p:spPr>
-          <a:xfrm>
-            <a:off x="2768600" y="6019800"/>
-            <a:ext cx="1905000" cy="381000"/>
-          </a:xfrm>
-          <a:prstGeom prst="rect">
-            <a:avLst/>
-          </a:prstGeom>
-          <a:noFill/>
-          <a:ln w="12700">
-            <a:solidFill>
-              <a:srgbClr val="9AA0A6"/>
-            </a:solidFill>
-            <a:prstDash val="solid"/>
-          </a:ln>
-        </p:spPr>
-        <p:txBody>
-          <a:bodyPr wrap="square" lIns="25400" tIns="38100" rIns="38100" bIns="25400" rtlCol="0" anchor="ctr"/>
-          <a:lstStyle/>
-          <a:p>
-            <a:pPr algn="ctr" indent="0" marL="0">
-              <a:lnSpc>
-                <a:spcPts val="999"/>
-              </a:lnSpc>
-              <a:buNone/>
-            </a:pPr>
-            <a:r>
-              <a:rPr lang="en-US" sz="740" dirty="0">
-                <a:solidFill>
-                  <a:srgbClr val="222222"/>
-                </a:solidFill>
-                <a:latin typeface="Yu Gothic" pitchFamily="34" charset="0"/>
-                <a:ea typeface="Yu Gothic" pitchFamily="34" charset="-122"/>
-                <a:cs typeface="Yu Gothic" pitchFamily="34" charset="-120"/>
-              </a:rPr>
-              <a:t>RtM</a:t>
-            </a:r>
-            <a:endParaRPr lang="en-US" sz="740" dirty="0"/>
-          </a:p>
-          <a:p>
-            <a:pPr algn="ctr" indent="0" marL="0">
-              <a:lnSpc>
-                <a:spcPts val="999"/>
-              </a:lnSpc>
-              <a:buNone/>
-            </a:pPr>
-            <a:r>
-              <a:rPr lang="en-US" sz="740" dirty="0">
-                <a:solidFill>
-                  <a:srgbClr val="222222"/>
-                </a:solidFill>
-                <a:latin typeface="Yu Gothic" pitchFamily="34" charset="0"/>
-                <a:ea typeface="Yu Gothic" pitchFamily="34" charset="-122"/>
-                <a:cs typeface="Yu Gothic" pitchFamily="34" charset="-120"/>
-              </a:rPr>
-              <a:t>ヘッジ・在庫・物流を付加</a:t>
-            </a:r>
-            <a:endParaRPr lang="en-US" sz="740" dirty="0"/>
-          </a:p>
-        </p:txBody>
-      </p:sp>
-      <p:sp>
-        <p:nvSpPr>
-          <p:cNvPr id="43" name="t3_40"/>
-          <p:cNvSpPr txBox="1"/>
-          <p:nvPr/>
-        </p:nvSpPr>
-        <p:spPr>
-          <a:xfrm>
-            <a:off x="4699000" y="6096000"/>
-            <a:ext cx="131778" cy="165100"/>
-          </a:xfrm>
-          <a:prstGeom prst="rect">
-            <a:avLst/>
-          </a:prstGeom>
-          <a:noFill/>
-          <a:ln/>
-        </p:spPr>
-        <p:txBody>
-          <a:bodyPr wrap="none" lIns="0" tIns="0" rIns="0" bIns="0" rtlCol="0" anchor="t"/>
-          <a:lstStyle/>
-          <a:p>
-            <a:pPr algn="l" indent="0" marL="0">
-              <a:lnSpc>
-                <a:spcPts val="1170"/>
-              </a:lnSpc>
-              <a:buNone/>
-            </a:pPr>
-            <a:r>
-              <a:rPr lang="en-US" sz="900" dirty="0">
-                <a:solidFill>
-                  <a:srgbClr val="888888"/>
-                </a:solidFill>
-                <a:latin typeface="Yu Gothic" pitchFamily="34" charset="0"/>
-                <a:ea typeface="Yu Gothic" pitchFamily="34" charset="-122"/>
-                <a:cs typeface="Yu Gothic" pitchFamily="34" charset="-120"/>
-              </a:rPr>
-              <a:t>→</a:t>
-            </a:r>
-            <a:endParaRPr lang="en-US" sz="900" dirty="0"/>
-          </a:p>
-        </p:txBody>
-      </p:sp>
-      <p:sp>
-        <p:nvSpPr>
-          <p:cNvPr id="44" name="t3_41"/>
-          <p:cNvSpPr txBox="1"/>
-          <p:nvPr/>
-        </p:nvSpPr>
-        <p:spPr>
-          <a:xfrm>
-            <a:off x="4927600" y="6019800"/>
-            <a:ext cx="1905000" cy="381000"/>
-          </a:xfrm>
-          <a:prstGeom prst="rect">
-            <a:avLst/>
-          </a:prstGeom>
-          <a:noFill/>
-          <a:ln w="12700">
-            <a:solidFill>
-              <a:srgbClr val="9AA0A6"/>
-            </a:solidFill>
-            <a:prstDash val="solid"/>
-          </a:ln>
-        </p:spPr>
-        <p:txBody>
-          <a:bodyPr wrap="square" lIns="25400" tIns="38100" rIns="38100" bIns="25400" rtlCol="0" anchor="ctr"/>
-          <a:lstStyle/>
-          <a:p>
-            <a:pPr algn="ctr" indent="0" marL="0">
-              <a:lnSpc>
-                <a:spcPts val="999"/>
-              </a:lnSpc>
-              <a:buNone/>
-            </a:pPr>
-            <a:r>
-              <a:rPr lang="en-US" sz="740" dirty="0">
-                <a:solidFill>
-                  <a:srgbClr val="222222"/>
-                </a:solidFill>
-                <a:latin typeface="Yu Gothic" pitchFamily="34" charset="0"/>
-                <a:ea typeface="Yu Gothic" pitchFamily="34" charset="-122"/>
-                <a:cs typeface="Yu Gothic" pitchFamily="34" charset="-120"/>
-              </a:rPr>
-              <a:t>顧客</a:t>
-            </a:r>
-            <a:endParaRPr lang="en-US" sz="740" dirty="0"/>
-          </a:p>
-          <a:p>
-            <a:pPr algn="ctr" indent="0" marL="0">
-              <a:lnSpc>
-                <a:spcPts val="999"/>
-              </a:lnSpc>
-              <a:buNone/>
-            </a:pPr>
-            <a:r>
-              <a:rPr lang="en-US" sz="740" dirty="0">
-                <a:solidFill>
-                  <a:srgbClr val="222222"/>
-                </a:solidFill>
-                <a:latin typeface="Yu Gothic" pitchFamily="34" charset="0"/>
-                <a:ea typeface="Yu Gothic" pitchFamily="34" charset="-122"/>
-                <a:cs typeface="Yu Gothic" pitchFamily="34" charset="-120"/>
-              </a:rPr>
-              <a:t>欧州・シンガポール・米州</a:t>
-            </a:r>
-            <a:endParaRPr lang="en-US" sz="740" dirty="0"/>
-          </a:p>
-        </p:txBody>
-      </p:sp>
-      <p:sp>
-        <p:nvSpPr>
-          <p:cNvPr id="45" name="Shape 41"/>
-          <p:cNvSpPr/>
-          <p:nvPr/>
-        </p:nvSpPr>
-        <p:spPr>
-          <a:xfrm>
-            <a:off x="1117600" y="6451600"/>
-            <a:ext cx="5334000" cy="0"/>
-          </a:xfrm>
-          <a:prstGeom prst="line">
-            <a:avLst/>
-          </a:prstGeom>
-          <a:noFill/>
-          <a:ln w="12700">
-            <a:solidFill>
-              <a:srgbClr val="888888"/>
-            </a:solidFill>
-            <a:prstDash val="dash"/>
-          </a:ln>
-        </p:spPr>
-      </p:sp>
-      <p:sp>
-        <p:nvSpPr>
-          <p:cNvPr id="46" name="t3_42"/>
-          <p:cNvSpPr txBox="1"/>
-          <p:nvPr/>
-        </p:nvSpPr>
-        <p:spPr>
-          <a:xfrm>
-            <a:off x="1117600" y="6451600"/>
-            <a:ext cx="5560060" cy="165100"/>
-          </a:xfrm>
-          <a:prstGeom prst="rect">
-            <a:avLst/>
-          </a:prstGeom>
-          <a:noFill/>
-          <a:ln/>
-        </p:spPr>
-        <p:txBody>
-          <a:bodyPr wrap="square" lIns="0" tIns="0" rIns="0" bIns="0" rtlCol="0" anchor="t"/>
-          <a:lstStyle/>
-          <a:p>
-            <a:pPr algn="l" indent="0" marL="0">
-              <a:lnSpc>
-                <a:spcPts val="858"/>
-              </a:lnSpc>
-              <a:buNone/>
-            </a:pPr>
-            <a:r>
-              <a:rPr lang="en-US" sz="660" dirty="0">
-                <a:solidFill>
-                  <a:srgbClr val="555555"/>
-                </a:solidFill>
-                <a:latin typeface="Yu Gothic" pitchFamily="34" charset="0"/>
-                <a:ea typeface="Yu Gothic" pitchFamily="34" charset="-122"/>
-                <a:cs typeface="Yu Gothic" pitchFamily="34" charset="-120"/>
-              </a:rPr>
-              <a:t>← 市場の生きた情報を還元し、事業機会を発掘（好循環）</a:t>
-            </a:r>
-            <a:endParaRPr lang="en-US" sz="660" dirty="0"/>
-          </a:p>
-        </p:txBody>
-      </p:sp>
-      <p:sp>
-        <p:nvSpPr>
-          <p:cNvPr id="47" name="t3_43"/>
-          <p:cNvSpPr txBox="1"/>
-          <p:nvPr/>
-        </p:nvSpPr>
-        <p:spPr>
-          <a:xfrm>
-            <a:off x="609600" y="6654800"/>
-            <a:ext cx="6603492" cy="118070"/>
-          </a:xfrm>
-          <a:prstGeom prst="rect">
-            <a:avLst/>
-          </a:prstGeom>
-          <a:noFill/>
-          <a:ln/>
-        </p:spPr>
-        <p:txBody>
-          <a:bodyPr wrap="none" lIns="0" tIns="0" rIns="0" bIns="0" rtlCol="0" anchor="t"/>
-          <a:lstStyle/>
-          <a:p>
-            <a:pPr algn="l" indent="0" marL="0">
-              <a:lnSpc>
-                <a:spcPts val="930"/>
-              </a:lnSpc>
-              <a:buNone/>
-            </a:pPr>
-            <a:r>
-              <a:rPr lang="en-US" sz="620" dirty="0">
-                <a:solidFill>
-                  <a:srgbClr val="9A5A60"/>
-                </a:solidFill>
-                <a:latin typeface="Yu Gothic" pitchFamily="34" charset="0"/>
-                <a:ea typeface="Yu Gothic" pitchFamily="34" charset="-122"/>
-                <a:cs typeface="Yu Gothic" pitchFamily="34" charset="-120"/>
-              </a:rPr>
-              <a:t>※販売顧客に「投資目的の主体」と誤認されない表現に。RtMの追加資料（PwC様より別途共有）を反映予定</a:t>
-            </a:r>
-            <a:endParaRPr lang="en-US" sz="620" dirty="0"/>
-          </a:p>
-        </p:txBody>
-      </p:sp>
-      <p:sp>
-        <p:nvSpPr>
-          <p:cNvPr id="48" name="Shape 44"/>
-          <p:cNvSpPr/>
-          <p:nvPr/>
-        </p:nvSpPr>
-        <p:spPr>
-          <a:xfrm>
-            <a:off x="609600" y="6908800"/>
-            <a:ext cx="6337300" cy="0"/>
-          </a:xfrm>
-          <a:prstGeom prst="line">
-            <a:avLst/>
-          </a:prstGeom>
-          <a:noFill/>
-          <a:ln w="12700">
-            <a:solidFill>
-              <a:srgbClr val="CFD2D5"/>
-            </a:solidFill>
-            <a:prstDash val="solid"/>
-          </a:ln>
-        </p:spPr>
-      </p:sp>
-      <p:sp>
-        <p:nvSpPr>
-          <p:cNvPr id="49" name="t3_45"/>
-          <p:cNvSpPr txBox="1"/>
-          <p:nvPr/>
-        </p:nvSpPr>
-        <p:spPr>
-          <a:xfrm>
-            <a:off x="609600" y="7035800"/>
-            <a:ext cx="6352540" cy="320040"/>
-          </a:xfrm>
-          <a:prstGeom prst="rect">
-            <a:avLst/>
-          </a:prstGeom>
-          <a:noFill/>
-          <a:ln/>
-        </p:spPr>
-        <p:txBody>
-          <a:bodyPr wrap="none" lIns="0" tIns="0" rIns="0" bIns="0" rtlCol="0" anchor="t"/>
-          <a:lstStyle/>
-          <a:p>
-            <a:pPr algn="l" indent="0" marL="0">
-              <a:lnSpc>
-                <a:spcPts val="2520"/>
-              </a:lnSpc>
-              <a:buNone/>
-            </a:pPr>
-            <a:r>
-              <a:rPr lang="en-US" sz="1800" spc="80" kern="0" dirty="0">
-                <a:solidFill>
-                  <a:srgbClr val="222222"/>
-                </a:solidFill>
-                <a:latin typeface="Yu Gothic" pitchFamily="34" charset="0"/>
-                <a:ea typeface="Yu Gothic" pitchFamily="34" charset="-122"/>
-                <a:cs typeface="Yu Gothic" pitchFamily="34" charset="-120"/>
-              </a:rPr>
-              <a:t>トレーディング事業の事例（銅）</a:t>
-            </a:r>
-            <a:endParaRPr lang="en-US" sz="1800" dirty="0"/>
-          </a:p>
-        </p:txBody>
-      </p:sp>
-      <p:sp>
-        <p:nvSpPr>
-          <p:cNvPr id="50" name="t3_46"/>
-          <p:cNvSpPr txBox="1"/>
-          <p:nvPr/>
-        </p:nvSpPr>
-        <p:spPr>
-          <a:xfrm>
-            <a:off x="609600" y="7391400"/>
-            <a:ext cx="6352540" cy="196850"/>
-          </a:xfrm>
-          <a:prstGeom prst="rect">
-            <a:avLst/>
-          </a:prstGeom>
-          <a:noFill/>
-          <a:ln/>
-        </p:spPr>
-        <p:txBody>
-          <a:bodyPr wrap="none" lIns="0" tIns="0" rIns="0" bIns="0" rtlCol="0" anchor="t"/>
-          <a:lstStyle/>
-          <a:p>
-            <a:pPr algn="l" indent="0" marL="0">
-              <a:lnSpc>
-                <a:spcPts val="1550"/>
-              </a:lnSpc>
-              <a:buNone/>
-            </a:pPr>
-            <a:r>
-              <a:rPr lang="en-US" sz="1000" spc="30" kern="0" dirty="0">
-                <a:solidFill>
-                  <a:srgbClr val="444444"/>
-                </a:solidFill>
-                <a:latin typeface="Yu Gothic" pitchFamily="34" charset="0"/>
-                <a:ea typeface="Yu Gothic" pitchFamily="34" charset="-122"/>
-                <a:cs typeface="Yu Gothic" pitchFamily="34" charset="-120"/>
-              </a:rPr>
-              <a:t>一つの商品の中で、投資から販売まで一気通貫でつなぐ</a:t>
-            </a:r>
-            <a:endParaRPr lang="en-US" sz="1000" dirty="0"/>
-          </a:p>
-        </p:txBody>
-      </p:sp>
-      <p:sp>
-        <p:nvSpPr>
-          <p:cNvPr id="51" name="t3_47"/>
-          <p:cNvSpPr txBox="1"/>
-          <p:nvPr/>
-        </p:nvSpPr>
-        <p:spPr>
-          <a:xfrm>
-            <a:off x="609600" y="7620000"/>
-            <a:ext cx="6337300" cy="1524000"/>
+          <p:cNvPr id="45" name="t3_42"/>
+          <p:cNvSpPr txBox="1"/>
+          <p:nvPr/>
+        </p:nvSpPr>
+        <p:spPr>
+          <a:xfrm>
+            <a:off x="609600" y="5461000"/>
+            <a:ext cx="1524000" cy="330200"/>
           </a:xfrm>
           <a:prstGeom prst="rect">
             <a:avLst/>
@@ -20022,10 +19668,165 @@
                 <a:ea typeface="Yu Gothic" pitchFamily="34" charset="-122"/>
                 <a:cs typeface="Yu Gothic" pitchFamily="34" charset="-120"/>
               </a:rPr>
-              <a:t>事例図：銅の投資から販売までの一気通貫／複数地域・多機能にわたる展開</a:t>
+              <a:t>写真：〇〇</a:t>
             </a:r>
             <a:endParaRPr lang="en-US" sz="700" dirty="0"/>
           </a:p>
+        </p:txBody>
+      </p:sp>
+      <p:sp>
+        <p:nvSpPr>
+          <p:cNvPr id="46" name="t3_43"/>
+          <p:cNvSpPr txBox="1"/>
+          <p:nvPr/>
+        </p:nvSpPr>
+        <p:spPr>
+          <a:xfrm>
+            <a:off x="609600" y="5829300"/>
+            <a:ext cx="1597660" cy="131572"/>
+          </a:xfrm>
+          <a:prstGeom prst="rect">
+            <a:avLst/>
+          </a:prstGeom>
+          <a:noFill/>
+          <a:ln/>
+        </p:spPr>
+        <p:txBody>
+          <a:bodyPr wrap="none" lIns="0" tIns="0" rIns="0" bIns="0" rtlCol="0" anchor="t"/>
+          <a:lstStyle/>
+          <a:p>
+            <a:pPr algn="l" indent="0" marL="0">
+              <a:lnSpc>
+                <a:spcPts val="962"/>
+              </a:lnSpc>
+              <a:buNone/>
+            </a:pPr>
+            <a:r>
+              <a:rPr lang="en-US" sz="740" b="1" dirty="0">
+                <a:solidFill>
+                  <a:srgbClr val="222222"/>
+                </a:solidFill>
+                <a:latin typeface="Yu Gothic" pitchFamily="34" charset="0"/>
+                <a:ea typeface="Yu Gothic" pitchFamily="34" charset="-122"/>
+                <a:cs typeface="Yu Gothic" pitchFamily="34" charset="-120"/>
+              </a:rPr>
+              <a:t>Sustainability</a:t>
+            </a:r>
+            <a:endParaRPr lang="en-US" sz="740" dirty="0"/>
+          </a:p>
+        </p:txBody>
+      </p:sp>
+      <p:sp>
+        <p:nvSpPr>
+          <p:cNvPr id="47" name="t3_44"/>
+          <p:cNvSpPr txBox="1"/>
+          <p:nvPr/>
+        </p:nvSpPr>
+        <p:spPr>
+          <a:xfrm>
+            <a:off x="609600" y="5969000"/>
+            <a:ext cx="1597660" cy="235744"/>
+          </a:xfrm>
+          <a:prstGeom prst="rect">
+            <a:avLst/>
+          </a:prstGeom>
+          <a:noFill/>
+          <a:ln/>
+        </p:spPr>
+        <p:txBody>
+          <a:bodyPr wrap="square" lIns="0" tIns="0" rIns="0" bIns="0" rtlCol="0" anchor="t"/>
+          <a:lstStyle/>
+          <a:p>
+            <a:pPr algn="l" indent="0" marL="0">
+              <a:lnSpc>
+                <a:spcPts val="928"/>
+              </a:lnSpc>
+              <a:buNone/>
+            </a:pPr>
+            <a:r>
+              <a:rPr lang="en-US" sz="640" dirty="0">
+                <a:solidFill>
+                  <a:srgbClr val="555555"/>
+                </a:solidFill>
+                <a:latin typeface="Yu Gothic" pitchFamily="34" charset="0"/>
+                <a:ea typeface="Yu Gothic" pitchFamily="34" charset="-122"/>
+                <a:cs typeface="Yu Gothic" pitchFamily="34" charset="-120"/>
+              </a:rPr>
+              <a:t>世界の資産とパートナーシップを基盤に、最適な供給とファイナンスを提供</a:t>
+            </a:r>
+            <a:endParaRPr lang="en-US" sz="640" dirty="0"/>
+          </a:p>
+        </p:txBody>
+      </p:sp>
+      <p:sp>
+        <p:nvSpPr>
+          <p:cNvPr id="48" name="t3_45"/>
+          <p:cNvSpPr txBox="1"/>
+          <p:nvPr/>
+        </p:nvSpPr>
+        <p:spPr>
+          <a:xfrm>
+            <a:off x="609600" y="6223000"/>
+            <a:ext cx="1597660" cy="106561"/>
+          </a:xfrm>
+          <a:prstGeom prst="rect">
+            <a:avLst/>
+          </a:prstGeom>
+          <a:noFill/>
+          <a:ln/>
+        </p:spPr>
+        <p:txBody>
+          <a:bodyPr wrap="none" lIns="0" tIns="0" rIns="0" bIns="0" rtlCol="0" anchor="t"/>
+          <a:lstStyle/>
+          <a:p>
+            <a:pPr algn="l" indent="0" marL="0">
+              <a:lnSpc>
+                <a:spcPts val="840"/>
+              </a:lnSpc>
+              <a:buNone/>
+            </a:pPr>
+            <a:r>
+              <a:rPr lang="en-US" sz="560" dirty="0">
+                <a:solidFill>
+                  <a:srgbClr val="9AA0A6"/>
+                </a:solidFill>
+                <a:latin typeface="Yu Gothic" pitchFamily="34" charset="0"/>
+                <a:ea typeface="Yu Gothic" pitchFamily="34" charset="-122"/>
+                <a:cs typeface="Yu Gothic" pitchFamily="34" charset="-120"/>
+              </a:rPr>
+              <a:t>ＸＸＸＸＸＸＸＸＸＸＸＸ</a:t>
+            </a:r>
+            <a:endParaRPr lang="en-US" sz="560" dirty="0"/>
+          </a:p>
+        </p:txBody>
+      </p:sp>
+      <p:sp>
+        <p:nvSpPr>
+          <p:cNvPr id="49" name="t3_46"/>
+          <p:cNvSpPr txBox="1"/>
+          <p:nvPr/>
+        </p:nvSpPr>
+        <p:spPr>
+          <a:xfrm>
+            <a:off x="609600" y="6477000"/>
+            <a:ext cx="1524000" cy="330200"/>
+          </a:xfrm>
+          <a:prstGeom prst="rect">
+            <a:avLst/>
+          </a:prstGeom>
+          <a:solidFill>
+            <a:srgbClr val="EEF0F2"/>
+          </a:solidFill>
+          <a:ln w="12700">
+            <a:solidFill>
+              <a:srgbClr val="B6BBC0"/>
+            </a:solidFill>
+            <a:prstDash val="dash"/>
+          </a:ln>
+        </p:spPr>
+        <p:txBody>
+          <a:bodyPr wrap="square" lIns="25400" tIns="38100" rIns="38100" bIns="25400" rtlCol="0" anchor="ctr"/>
+          <a:lstStyle/>
           <a:p>
             <a:pPr algn="ctr" indent="0" marL="0">
               <a:lnSpc>
@@ -20042,7 +19843,7 @@
                 <a:ea typeface="Yu Gothic" pitchFamily="34" charset="-122"/>
                 <a:cs typeface="Yu Gothic" pitchFamily="34" charset="-120"/>
               </a:rPr>
-              <a:t>※PwC様にて情報収集中</a:t>
+              <a:t>写真：〇〇</a:t>
             </a:r>
             <a:endParaRPr lang="en-US" sz="700" dirty="0"/>
           </a:p>
@@ -20050,13 +19851,721 @@
       </p:sp>
       <p:sp>
         <p:nvSpPr>
-          <p:cNvPr id="52" name="t3_48"/>
-          <p:cNvSpPr txBox="1"/>
-          <p:nvPr/>
-        </p:nvSpPr>
-        <p:spPr>
-          <a:xfrm>
-            <a:off x="609600" y="9220200"/>
+          <p:cNvPr id="50" name="t3_47"/>
+          <p:cNvSpPr txBox="1"/>
+          <p:nvPr/>
+        </p:nvSpPr>
+        <p:spPr>
+          <a:xfrm>
+            <a:off x="609600" y="6845300"/>
+            <a:ext cx="1597660" cy="131572"/>
+          </a:xfrm>
+          <a:prstGeom prst="rect">
+            <a:avLst/>
+          </a:prstGeom>
+          <a:noFill/>
+          <a:ln/>
+        </p:spPr>
+        <p:txBody>
+          <a:bodyPr wrap="none" lIns="0" tIns="0" rIns="0" bIns="0" rtlCol="0" anchor="t"/>
+          <a:lstStyle/>
+          <a:p>
+            <a:pPr algn="l" indent="0" marL="0">
+              <a:lnSpc>
+                <a:spcPts val="962"/>
+              </a:lnSpc>
+              <a:buNone/>
+            </a:pPr>
+            <a:r>
+              <a:rPr lang="en-US" sz="740" b="1" dirty="0">
+                <a:solidFill>
+                  <a:srgbClr val="222222"/>
+                </a:solidFill>
+                <a:latin typeface="Yu Gothic" pitchFamily="34" charset="0"/>
+                <a:ea typeface="Yu Gothic" pitchFamily="34" charset="-122"/>
+                <a:cs typeface="Yu Gothic" pitchFamily="34" charset="-120"/>
+              </a:rPr>
+              <a:t>Professionalism</a:t>
+            </a:r>
+            <a:endParaRPr lang="en-US" sz="740" dirty="0"/>
+          </a:p>
+        </p:txBody>
+      </p:sp>
+      <p:sp>
+        <p:nvSpPr>
+          <p:cNvPr id="51" name="t3_48"/>
+          <p:cNvSpPr txBox="1"/>
+          <p:nvPr/>
+        </p:nvSpPr>
+        <p:spPr>
+          <a:xfrm>
+            <a:off x="609600" y="6985000"/>
+            <a:ext cx="1597660" cy="235744"/>
+          </a:xfrm>
+          <a:prstGeom prst="rect">
+            <a:avLst/>
+          </a:prstGeom>
+          <a:noFill/>
+          <a:ln/>
+        </p:spPr>
+        <p:txBody>
+          <a:bodyPr wrap="square" lIns="0" tIns="0" rIns="0" bIns="0" rtlCol="0" anchor="t"/>
+          <a:lstStyle/>
+          <a:p>
+            <a:pPr algn="l" indent="0" marL="0">
+              <a:lnSpc>
+                <a:spcPts val="928"/>
+              </a:lnSpc>
+              <a:buNone/>
+            </a:pPr>
+            <a:r>
+              <a:rPr lang="en-US" sz="640" dirty="0">
+                <a:solidFill>
+                  <a:srgbClr val="555555"/>
+                </a:solidFill>
+                <a:latin typeface="Yu Gothic" pitchFamily="34" charset="0"/>
+                <a:ea typeface="Yu Gothic" pitchFamily="34" charset="-122"/>
+                <a:cs typeface="Yu Gothic" pitchFamily="34" charset="-120"/>
+              </a:rPr>
+              <a:t>業界の専門性と総合商社の伝統による、信頼性の高いサービス</a:t>
+            </a:r>
+            <a:endParaRPr lang="en-US" sz="640" dirty="0"/>
+          </a:p>
+        </p:txBody>
+      </p:sp>
+      <p:sp>
+        <p:nvSpPr>
+          <p:cNvPr id="52" name="t3_49"/>
+          <p:cNvSpPr txBox="1"/>
+          <p:nvPr/>
+        </p:nvSpPr>
+        <p:spPr>
+          <a:xfrm>
+            <a:off x="609600" y="7239000"/>
+            <a:ext cx="1597660" cy="106561"/>
+          </a:xfrm>
+          <a:prstGeom prst="rect">
+            <a:avLst/>
+          </a:prstGeom>
+          <a:noFill/>
+          <a:ln/>
+        </p:spPr>
+        <p:txBody>
+          <a:bodyPr wrap="none" lIns="0" tIns="0" rIns="0" bIns="0" rtlCol="0" anchor="t"/>
+          <a:lstStyle/>
+          <a:p>
+            <a:pPr algn="l" indent="0" marL="0">
+              <a:lnSpc>
+                <a:spcPts val="840"/>
+              </a:lnSpc>
+              <a:buNone/>
+            </a:pPr>
+            <a:r>
+              <a:rPr lang="en-US" sz="560" dirty="0">
+                <a:solidFill>
+                  <a:srgbClr val="9AA0A6"/>
+                </a:solidFill>
+                <a:latin typeface="Yu Gothic" pitchFamily="34" charset="0"/>
+                <a:ea typeface="Yu Gothic" pitchFamily="34" charset="-122"/>
+                <a:cs typeface="Yu Gothic" pitchFamily="34" charset="-120"/>
+              </a:rPr>
+              <a:t>ＸＸＸＸＸＸＸＸＸＸＸＸ</a:t>
+            </a:r>
+            <a:endParaRPr lang="en-US" sz="560" dirty="0"/>
+          </a:p>
+        </p:txBody>
+      </p:sp>
+      <p:sp>
+        <p:nvSpPr>
+          <p:cNvPr id="53" name="t3_50"/>
+          <p:cNvSpPr txBox="1"/>
+          <p:nvPr/>
+        </p:nvSpPr>
+        <p:spPr>
+          <a:xfrm>
+            <a:off x="5422900" y="5461000"/>
+            <a:ext cx="1524000" cy="330200"/>
+          </a:xfrm>
+          <a:prstGeom prst="rect">
+            <a:avLst/>
+          </a:prstGeom>
+          <a:solidFill>
+            <a:srgbClr val="EEF0F2"/>
+          </a:solidFill>
+          <a:ln w="12700">
+            <a:solidFill>
+              <a:srgbClr val="B6BBC0"/>
+            </a:solidFill>
+            <a:prstDash val="dash"/>
+          </a:ln>
+        </p:spPr>
+        <p:txBody>
+          <a:bodyPr wrap="square" lIns="25400" tIns="38100" rIns="38100" bIns="25400" rtlCol="0" anchor="ctr"/>
+          <a:lstStyle/>
+          <a:p>
+            <a:pPr algn="ctr" indent="0" marL="0">
+              <a:lnSpc>
+                <a:spcPts val="2080"/>
+              </a:lnSpc>
+              <a:buNone/>
+            </a:pPr>
+            <a:r>
+              <a:rPr lang="en-US" sz="700" dirty="0">
+                <a:solidFill>
+                  <a:srgbClr val="6A7076"/>
+                </a:solidFill>
+                <a:latin typeface="Yu Gothic" pitchFamily="34" charset="0"/>
+                <a:ea typeface="Yu Gothic" pitchFamily="34" charset="-122"/>
+                <a:cs typeface="Yu Gothic" pitchFamily="34" charset="-120"/>
+              </a:rPr>
+              <a:t>写真：〇〇</a:t>
+            </a:r>
+            <a:endParaRPr lang="en-US" sz="700" dirty="0"/>
+          </a:p>
+        </p:txBody>
+      </p:sp>
+      <p:sp>
+        <p:nvSpPr>
+          <p:cNvPr id="54" name="t3_51"/>
+          <p:cNvSpPr txBox="1"/>
+          <p:nvPr/>
+        </p:nvSpPr>
+        <p:spPr>
+          <a:xfrm>
+            <a:off x="5422900" y="5829300"/>
+            <a:ext cx="1597660" cy="131572"/>
+          </a:xfrm>
+          <a:prstGeom prst="rect">
+            <a:avLst/>
+          </a:prstGeom>
+          <a:noFill/>
+          <a:ln/>
+        </p:spPr>
+        <p:txBody>
+          <a:bodyPr wrap="none" lIns="0" tIns="0" rIns="0" bIns="0" rtlCol="0" anchor="t"/>
+          <a:lstStyle/>
+          <a:p>
+            <a:pPr algn="l" indent="0" marL="0">
+              <a:lnSpc>
+                <a:spcPts val="962"/>
+              </a:lnSpc>
+              <a:buNone/>
+            </a:pPr>
+            <a:r>
+              <a:rPr lang="en-US" sz="740" b="1" dirty="0">
+                <a:solidFill>
+                  <a:srgbClr val="222222"/>
+                </a:solidFill>
+                <a:latin typeface="Yu Gothic" pitchFamily="34" charset="0"/>
+                <a:ea typeface="Yu Gothic" pitchFamily="34" charset="-122"/>
+                <a:cs typeface="Yu Gothic" pitchFamily="34" charset="-120"/>
+              </a:rPr>
+              <a:t>Market Intelligence</a:t>
+            </a:r>
+            <a:endParaRPr lang="en-US" sz="740" dirty="0"/>
+          </a:p>
+        </p:txBody>
+      </p:sp>
+      <p:sp>
+        <p:nvSpPr>
+          <p:cNvPr id="55" name="t3_52"/>
+          <p:cNvSpPr txBox="1"/>
+          <p:nvPr/>
+        </p:nvSpPr>
+        <p:spPr>
+          <a:xfrm>
+            <a:off x="5422900" y="5969000"/>
+            <a:ext cx="1597660" cy="235744"/>
+          </a:xfrm>
+          <a:prstGeom prst="rect">
+            <a:avLst/>
+          </a:prstGeom>
+          <a:noFill/>
+          <a:ln/>
+        </p:spPr>
+        <p:txBody>
+          <a:bodyPr wrap="square" lIns="0" tIns="0" rIns="0" bIns="0" rtlCol="0" anchor="t"/>
+          <a:lstStyle/>
+          <a:p>
+            <a:pPr algn="l" indent="0" marL="0">
+              <a:lnSpc>
+                <a:spcPts val="928"/>
+              </a:lnSpc>
+              <a:buNone/>
+            </a:pPr>
+            <a:r>
+              <a:rPr lang="en-US" sz="640" dirty="0">
+                <a:solidFill>
+                  <a:srgbClr val="555555"/>
+                </a:solidFill>
+                <a:latin typeface="Yu Gothic" pitchFamily="34" charset="0"/>
+                <a:ea typeface="Yu Gothic" pitchFamily="34" charset="-122"/>
+                <a:cs typeface="Yu Gothic" pitchFamily="34" charset="-120"/>
+              </a:rPr>
+              <a:t>実績と詳細な市場分析に基づく、顧客ごとの市場情報</a:t>
+            </a:r>
+            <a:endParaRPr lang="en-US" sz="640" dirty="0"/>
+          </a:p>
+        </p:txBody>
+      </p:sp>
+      <p:sp>
+        <p:nvSpPr>
+          <p:cNvPr id="56" name="t3_53"/>
+          <p:cNvSpPr txBox="1"/>
+          <p:nvPr/>
+        </p:nvSpPr>
+        <p:spPr>
+          <a:xfrm>
+            <a:off x="5422900" y="6223000"/>
+            <a:ext cx="1597660" cy="106561"/>
+          </a:xfrm>
+          <a:prstGeom prst="rect">
+            <a:avLst/>
+          </a:prstGeom>
+          <a:noFill/>
+          <a:ln/>
+        </p:spPr>
+        <p:txBody>
+          <a:bodyPr wrap="none" lIns="0" tIns="0" rIns="0" bIns="0" rtlCol="0" anchor="t"/>
+          <a:lstStyle/>
+          <a:p>
+            <a:pPr algn="l" indent="0" marL="0">
+              <a:lnSpc>
+                <a:spcPts val="840"/>
+              </a:lnSpc>
+              <a:buNone/>
+            </a:pPr>
+            <a:r>
+              <a:rPr lang="en-US" sz="560" dirty="0">
+                <a:solidFill>
+                  <a:srgbClr val="9AA0A6"/>
+                </a:solidFill>
+                <a:latin typeface="Yu Gothic" pitchFamily="34" charset="0"/>
+                <a:ea typeface="Yu Gothic" pitchFamily="34" charset="-122"/>
+                <a:cs typeface="Yu Gothic" pitchFamily="34" charset="-120"/>
+              </a:rPr>
+              <a:t>ＸＸＸＸＸＸＸＸＸＸＸＸ</a:t>
+            </a:r>
+            <a:endParaRPr lang="en-US" sz="560" dirty="0"/>
+          </a:p>
+        </p:txBody>
+      </p:sp>
+      <p:sp>
+        <p:nvSpPr>
+          <p:cNvPr id="57" name="t3_54"/>
+          <p:cNvSpPr txBox="1"/>
+          <p:nvPr/>
+        </p:nvSpPr>
+        <p:spPr>
+          <a:xfrm>
+            <a:off x="5422900" y="6477000"/>
+            <a:ext cx="1524000" cy="330200"/>
+          </a:xfrm>
+          <a:prstGeom prst="rect">
+            <a:avLst/>
+          </a:prstGeom>
+          <a:solidFill>
+            <a:srgbClr val="EEF0F2"/>
+          </a:solidFill>
+          <a:ln w="12700">
+            <a:solidFill>
+              <a:srgbClr val="B6BBC0"/>
+            </a:solidFill>
+            <a:prstDash val="dash"/>
+          </a:ln>
+        </p:spPr>
+        <p:txBody>
+          <a:bodyPr wrap="square" lIns="25400" tIns="38100" rIns="38100" bIns="25400" rtlCol="0" anchor="ctr"/>
+          <a:lstStyle/>
+          <a:p>
+            <a:pPr algn="ctr" indent="0" marL="0">
+              <a:lnSpc>
+                <a:spcPts val="2080"/>
+              </a:lnSpc>
+              <a:buNone/>
+            </a:pPr>
+            <a:r>
+              <a:rPr lang="en-US" sz="700" dirty="0">
+                <a:solidFill>
+                  <a:srgbClr val="6A7076"/>
+                </a:solidFill>
+                <a:latin typeface="Yu Gothic" pitchFamily="34" charset="0"/>
+                <a:ea typeface="Yu Gothic" pitchFamily="34" charset="-122"/>
+                <a:cs typeface="Yu Gothic" pitchFamily="34" charset="-120"/>
+              </a:rPr>
+              <a:t>写真：〇〇</a:t>
+            </a:r>
+            <a:endParaRPr lang="en-US" sz="700" dirty="0"/>
+          </a:p>
+        </p:txBody>
+      </p:sp>
+      <p:sp>
+        <p:nvSpPr>
+          <p:cNvPr id="58" name="t3_55"/>
+          <p:cNvSpPr txBox="1"/>
+          <p:nvPr/>
+        </p:nvSpPr>
+        <p:spPr>
+          <a:xfrm>
+            <a:off x="5422900" y="6845300"/>
+            <a:ext cx="1597660" cy="131572"/>
+          </a:xfrm>
+          <a:prstGeom prst="rect">
+            <a:avLst/>
+          </a:prstGeom>
+          <a:noFill/>
+          <a:ln/>
+        </p:spPr>
+        <p:txBody>
+          <a:bodyPr wrap="none" lIns="0" tIns="0" rIns="0" bIns="0" rtlCol="0" anchor="t"/>
+          <a:lstStyle/>
+          <a:p>
+            <a:pPr algn="l" indent="0" marL="0">
+              <a:lnSpc>
+                <a:spcPts val="962"/>
+              </a:lnSpc>
+              <a:buNone/>
+            </a:pPr>
+            <a:r>
+              <a:rPr lang="en-US" sz="740" b="1" dirty="0">
+                <a:solidFill>
+                  <a:srgbClr val="222222"/>
+                </a:solidFill>
+                <a:latin typeface="Yu Gothic" pitchFamily="34" charset="0"/>
+                <a:ea typeface="Yu Gothic" pitchFamily="34" charset="-122"/>
+                <a:cs typeface="Yu Gothic" pitchFamily="34" charset="-120"/>
+              </a:rPr>
+              <a:t>Global Network</a:t>
+            </a:r>
+            <a:endParaRPr lang="en-US" sz="740" dirty="0"/>
+          </a:p>
+        </p:txBody>
+      </p:sp>
+      <p:sp>
+        <p:nvSpPr>
+          <p:cNvPr id="59" name="t3_56"/>
+          <p:cNvSpPr txBox="1"/>
+          <p:nvPr/>
+        </p:nvSpPr>
+        <p:spPr>
+          <a:xfrm>
+            <a:off x="5422900" y="6985000"/>
+            <a:ext cx="1597660" cy="235744"/>
+          </a:xfrm>
+          <a:prstGeom prst="rect">
+            <a:avLst/>
+          </a:prstGeom>
+          <a:noFill/>
+          <a:ln/>
+        </p:spPr>
+        <p:txBody>
+          <a:bodyPr wrap="square" lIns="0" tIns="0" rIns="0" bIns="0" rtlCol="0" anchor="t"/>
+          <a:lstStyle/>
+          <a:p>
+            <a:pPr algn="l" indent="0" marL="0">
+              <a:lnSpc>
+                <a:spcPts val="928"/>
+              </a:lnSpc>
+              <a:buNone/>
+            </a:pPr>
+            <a:r>
+              <a:rPr lang="en-US" sz="640" dirty="0">
+                <a:solidFill>
+                  <a:srgbClr val="555555"/>
+                </a:solidFill>
+                <a:latin typeface="Yu Gothic" pitchFamily="34" charset="0"/>
+                <a:ea typeface="Yu Gothic" pitchFamily="34" charset="-122"/>
+                <a:cs typeface="Yu Gothic" pitchFamily="34" charset="-120"/>
+              </a:rPr>
+              <a:t>90カ国以上の拠点網で、市場情報と迅速な解決策を提供</a:t>
+            </a:r>
+            <a:endParaRPr lang="en-US" sz="640" dirty="0"/>
+          </a:p>
+        </p:txBody>
+      </p:sp>
+      <p:sp>
+        <p:nvSpPr>
+          <p:cNvPr id="60" name="t3_57"/>
+          <p:cNvSpPr txBox="1"/>
+          <p:nvPr/>
+        </p:nvSpPr>
+        <p:spPr>
+          <a:xfrm>
+            <a:off x="5422900" y="7239000"/>
+            <a:ext cx="1597660" cy="106561"/>
+          </a:xfrm>
+          <a:prstGeom prst="rect">
+            <a:avLst/>
+          </a:prstGeom>
+          <a:noFill/>
+          <a:ln/>
+        </p:spPr>
+        <p:txBody>
+          <a:bodyPr wrap="none" lIns="0" tIns="0" rIns="0" bIns="0" rtlCol="0" anchor="t"/>
+          <a:lstStyle/>
+          <a:p>
+            <a:pPr algn="l" indent="0" marL="0">
+              <a:lnSpc>
+                <a:spcPts val="840"/>
+              </a:lnSpc>
+              <a:buNone/>
+            </a:pPr>
+            <a:r>
+              <a:rPr lang="en-US" sz="560" dirty="0">
+                <a:solidFill>
+                  <a:srgbClr val="9AA0A6"/>
+                </a:solidFill>
+                <a:latin typeface="Yu Gothic" pitchFamily="34" charset="0"/>
+                <a:ea typeface="Yu Gothic" pitchFamily="34" charset="-122"/>
+                <a:cs typeface="Yu Gothic" pitchFamily="34" charset="-120"/>
+              </a:rPr>
+              <a:t>ＸＸＸＸＸＸＸＸＸＸＸＸ</a:t>
+            </a:r>
+            <a:endParaRPr lang="en-US" sz="560" dirty="0"/>
+          </a:p>
+        </p:txBody>
+      </p:sp>
+      <p:sp>
+        <p:nvSpPr>
+          <p:cNvPr id="61" name="t3_58"/>
+          <p:cNvSpPr txBox="1"/>
+          <p:nvPr/>
+        </p:nvSpPr>
+        <p:spPr>
+          <a:xfrm>
+            <a:off x="609600" y="7518400"/>
+            <a:ext cx="6603492" cy="101600"/>
+          </a:xfrm>
+          <a:prstGeom prst="rect">
+            <a:avLst/>
+          </a:prstGeom>
+          <a:noFill/>
+          <a:ln/>
+        </p:spPr>
+        <p:txBody>
+          <a:bodyPr wrap="none" lIns="0" tIns="0" rIns="0" bIns="0" rtlCol="0" anchor="t"/>
+          <a:lstStyle/>
+          <a:p>
+            <a:pPr algn="l" indent="0" marL="0">
+              <a:lnSpc>
+                <a:spcPts val="728"/>
+              </a:lnSpc>
+              <a:buNone/>
+            </a:pPr>
+            <a:r>
+              <a:rPr lang="en-US" sz="560" dirty="0">
+                <a:solidFill>
+                  <a:srgbClr val="888888"/>
+                </a:solidFill>
+                <a:latin typeface="Yu Gothic" pitchFamily="34" charset="0"/>
+                <a:ea typeface="Yu Gothic" pitchFamily="34" charset="-122"/>
+                <a:cs typeface="Yu Gothic" pitchFamily="34" charset="-120"/>
+              </a:rPr>
+              <a:t>図の出典・簡略化元：金属資源G_P9（RtM事業のビジネスモデル）、Resource to Market（RtM紹介資料）。左右のカードは顧客への提供価値</a:t>
+            </a:r>
+            <a:endParaRPr lang="en-US" sz="560" dirty="0"/>
+          </a:p>
+        </p:txBody>
+      </p:sp>
+      <p:sp>
+        <p:nvSpPr>
+          <p:cNvPr id="62" name="t3_59"/>
+          <p:cNvSpPr txBox="1"/>
+          <p:nvPr/>
+        </p:nvSpPr>
+        <p:spPr>
+          <a:xfrm>
+            <a:off x="609600" y="7645400"/>
+            <a:ext cx="6603492" cy="236141"/>
+          </a:xfrm>
+          <a:prstGeom prst="rect">
+            <a:avLst/>
+          </a:prstGeom>
+          <a:noFill/>
+          <a:ln/>
+        </p:spPr>
+        <p:txBody>
+          <a:bodyPr wrap="square" lIns="0" tIns="0" rIns="0" bIns="0" rtlCol="0" anchor="t"/>
+          <a:lstStyle/>
+          <a:p>
+            <a:pPr algn="l" indent="0" marL="0">
+              <a:lnSpc>
+                <a:spcPts val="930"/>
+              </a:lnSpc>
+              <a:buNone/>
+            </a:pPr>
+            <a:r>
+              <a:rPr lang="en-US" sz="620" dirty="0">
+                <a:solidFill>
+                  <a:srgbClr val="9A5A60"/>
+                </a:solidFill>
+                <a:latin typeface="Yu Gothic" pitchFamily="34" charset="0"/>
+                <a:ea typeface="Yu Gothic" pitchFamily="34" charset="-122"/>
+                <a:cs typeface="Yu Gothic" pitchFamily="34" charset="-120"/>
+              </a:rPr>
+              <a:t>※PwC様フィードバック①：RtMの事業ビジネスモデルを中心にした内容に差し替え。「トレーディング事業の事例（銅）」の枠は、このビジネスモデルと下記②の説明文（銅の事例）に統合</a:t>
+            </a:r>
+            <a:endParaRPr lang="en-US" sz="620" dirty="0"/>
+          </a:p>
+        </p:txBody>
+      </p:sp>
+      <p:sp>
+        <p:nvSpPr>
+          <p:cNvPr id="63" name="Shape 57"/>
+          <p:cNvSpPr/>
+          <p:nvPr/>
+        </p:nvSpPr>
+        <p:spPr>
+          <a:xfrm>
+            <a:off x="609600" y="7950200"/>
+            <a:ext cx="6337300" cy="0"/>
+          </a:xfrm>
+          <a:prstGeom prst="line">
+            <a:avLst/>
+          </a:prstGeom>
+          <a:noFill/>
+          <a:ln w="12700">
+            <a:solidFill>
+              <a:srgbClr val="CFD2D5"/>
+            </a:solidFill>
+            <a:prstDash val="solid"/>
+          </a:ln>
+        </p:spPr>
+      </p:sp>
+      <p:sp>
+        <p:nvSpPr>
+          <p:cNvPr id="64" name="t3_61"/>
+          <p:cNvSpPr txBox="1"/>
+          <p:nvPr/>
+        </p:nvSpPr>
+        <p:spPr>
+          <a:xfrm>
+            <a:off x="609600" y="8026400"/>
+            <a:ext cx="6352540" cy="320040"/>
+          </a:xfrm>
+          <a:prstGeom prst="rect">
+            <a:avLst/>
+          </a:prstGeom>
+          <a:noFill/>
+          <a:ln/>
+        </p:spPr>
+        <p:txBody>
+          <a:bodyPr wrap="none" lIns="0" tIns="0" rIns="0" bIns="0" rtlCol="0" anchor="t"/>
+          <a:lstStyle/>
+          <a:p>
+            <a:pPr algn="l" indent="0" marL="0">
+              <a:lnSpc>
+                <a:spcPts val="2520"/>
+              </a:lnSpc>
+              <a:buNone/>
+            </a:pPr>
+            <a:r>
+              <a:rPr lang="en-US" sz="1800" spc="80" kern="0" dirty="0">
+                <a:solidFill>
+                  <a:srgbClr val="222222"/>
+                </a:solidFill>
+                <a:latin typeface="Yu Gothic" pitchFamily="34" charset="0"/>
+                <a:ea typeface="Yu Gothic" pitchFamily="34" charset="-122"/>
+                <a:cs typeface="Yu Gothic" pitchFamily="34" charset="-120"/>
+              </a:rPr>
+              <a:t>RtMの多様な機能</a:t>
+            </a:r>
+            <a:endParaRPr lang="en-US" sz="1800" dirty="0"/>
+          </a:p>
+        </p:txBody>
+      </p:sp>
+      <p:sp>
+        <p:nvSpPr>
+          <p:cNvPr id="65" name="t3_62"/>
+          <p:cNvSpPr txBox="1"/>
+          <p:nvPr/>
+        </p:nvSpPr>
+        <p:spPr>
+          <a:xfrm>
+            <a:off x="609600" y="8382000"/>
+            <a:ext cx="6352540" cy="196850"/>
+          </a:xfrm>
+          <a:prstGeom prst="rect">
+            <a:avLst/>
+          </a:prstGeom>
+          <a:noFill/>
+          <a:ln/>
+        </p:spPr>
+        <p:txBody>
+          <a:bodyPr wrap="none" lIns="0" tIns="0" rIns="0" bIns="0" rtlCol="0" anchor="t"/>
+          <a:lstStyle/>
+          <a:p>
+            <a:pPr algn="l" indent="0" marL="0">
+              <a:lnSpc>
+                <a:spcPts val="1550"/>
+              </a:lnSpc>
+              <a:buNone/>
+            </a:pPr>
+            <a:r>
+              <a:rPr lang="en-US" sz="1000" spc="30" kern="0" dirty="0">
+                <a:solidFill>
+                  <a:srgbClr val="444444"/>
+                </a:solidFill>
+                <a:latin typeface="Yu Gothic" pitchFamily="34" charset="0"/>
+                <a:ea typeface="Yu Gothic" pitchFamily="34" charset="-122"/>
+                <a:cs typeface="Yu Gothic" pitchFamily="34" charset="-120"/>
+              </a:rPr>
+              <a:t>調達から販売まで、取引に付加価値を加える5つの機能</a:t>
+            </a:r>
+            <a:endParaRPr lang="en-US" sz="1000" dirty="0"/>
+          </a:p>
+        </p:txBody>
+      </p:sp>
+      <p:sp>
+        <p:nvSpPr>
+          <p:cNvPr id="66" name="t3_63"/>
+          <p:cNvSpPr txBox="1"/>
+          <p:nvPr/>
+        </p:nvSpPr>
+        <p:spPr>
+          <a:xfrm>
+            <a:off x="2768600" y="8102600"/>
+            <a:ext cx="561777" cy="139700"/>
+          </a:xfrm>
+          <a:prstGeom prst="rect">
+            <a:avLst/>
+          </a:prstGeom>
+          <a:solidFill>
+            <a:srgbClr val="2A6FB0"/>
+          </a:solidFill>
+          <a:ln/>
+        </p:spPr>
+        <p:txBody>
+          <a:bodyPr wrap="none" lIns="25400" tIns="38100" rIns="38100" bIns="25400" rtlCol="0" anchor="ctr"/>
+          <a:lstStyle/>
+          <a:p>
+            <a:pPr algn="l" indent="0" marL="0">
+              <a:buNone/>
+            </a:pPr>
+            <a:r>
+              <a:rPr lang="en-US" sz="620" spc="30" kern="0" dirty="0">
+                <a:solidFill>
+                  <a:srgbClr val="FFFFFF"/>
+                </a:solidFill>
+                <a:latin typeface="Yu Gothic" pitchFamily="34" charset="0"/>
+                <a:ea typeface="Yu Gothic" pitchFamily="34" charset="-122"/>
+                <a:cs typeface="Yu Gothic" pitchFamily="34" charset="-120"/>
+              </a:rPr>
+              <a:t>PwC様FB②</a:t>
+            </a:r>
+            <a:endParaRPr lang="en-US" sz="620" dirty="0"/>
+          </a:p>
+        </p:txBody>
+      </p:sp>
+      <p:sp>
+        <p:nvSpPr>
+          <p:cNvPr id="67" name="t3_64"/>
+          <p:cNvSpPr txBox="1"/>
+          <p:nvPr/>
+        </p:nvSpPr>
+        <p:spPr>
+          <a:xfrm>
+            <a:off x="609600" y="8610600"/>
             <a:ext cx="6603492" cy="346472"/>
           </a:xfrm>
           <a:prstGeom prst="rect">
@@ -20084,7 +20593,7 @@
                 <a:ea typeface="Yu Gothic" pitchFamily="34" charset="-122"/>
                 <a:cs typeface="Yu Gothic" pitchFamily="34" charset="-120"/>
               </a:rPr>
-              <a:t>ＸＸＸＸＸＸＸＸＸＸＸＸＸＸＸＸＸＸＸＸＸＸＸＸＸＸＸＸＸＸＸＸＸＸＸＸＸＸＸＸＸＸＸＸＸＸＸＸＸＸＸＸＸＸＸＸＸＸＸＸＸＸＸＸＸＸＸＸＸＸＸＸＸＸＸＸＸＸＸＸＸＸＸＸＸＸＸＸＸＸＸＸＸＸＸＸＸＸＸＸ</a:t>
+              <a:t>ＸＸＸＸＸＸＸＸＸＸＸＸＸＸＸＸＸＸＸＸＸＸＸＸＸＸＸＸＸＸＸＸＸＸＸＸＸＸＸＸＸＸＸＸＸＸＸＸＸＸＸＸＸＸＸＸＸＸＸＸＸＸＸＸＸＸＸＸＸＸＸＸＸＸＸＸＸＸＸＸ</a:t>
             </a:r>
             <a:endParaRPr lang="en-US" sz="780" dirty="0"/>
           </a:p>
@@ -20092,14 +20601,14 @@
       </p:sp>
       <p:sp>
         <p:nvSpPr>
-          <p:cNvPr id="53" name="t3_49"/>
-          <p:cNvSpPr txBox="1"/>
-          <p:nvPr/>
-        </p:nvSpPr>
-        <p:spPr>
-          <a:xfrm>
-            <a:off x="609600" y="9579570"/>
-            <a:ext cx="985965" cy="114300"/>
+          <p:cNvPr id="68" name="t3_65"/>
+          <p:cNvSpPr txBox="1"/>
+          <p:nvPr/>
+        </p:nvSpPr>
+        <p:spPr>
+          <a:xfrm>
+            <a:off x="609600" y="8969970"/>
+            <a:ext cx="938292" cy="114300"/>
           </a:xfrm>
           <a:prstGeom prst="rect">
             <a:avLst/>
@@ -20126,7 +20635,7 @@
                 <a:ea typeface="Yu Gothic" pitchFamily="34" charset="-122"/>
                 <a:cs typeface="Yu Gothic" pitchFamily="34" charset="-120"/>
               </a:rPr>
-              <a:t>▸本文 100字／英語 約55語</a:t>
+              <a:t>▸本文 80字／英語 約44語</a:t>
             </a:r>
             <a:endParaRPr lang="en-US" sz="580" dirty="0"/>
           </a:p>
@@ -20134,7 +20643,909 @@
       </p:sp>
       <p:sp>
         <p:nvSpPr>
-          <p:cNvPr id="54" name="t3_50"/>
+          <p:cNvPr id="69" name="t3_66"/>
+          <p:cNvSpPr txBox="1"/>
+          <p:nvPr/>
+        </p:nvSpPr>
+        <p:spPr>
+          <a:xfrm>
+            <a:off x="609600" y="9144000"/>
+            <a:ext cx="177800" cy="177800"/>
+          </a:xfrm>
+          <a:prstGeom prst="roundRect">
+            <a:avLst>
+              <a:gd name="adj" fmla="val 257143"/>
+            </a:avLst>
+          </a:prstGeom>
+          <a:noFill/>
+          <a:ln w="12700">
+            <a:solidFill>
+              <a:srgbClr val="3C4045"/>
+            </a:solidFill>
+            <a:prstDash val="solid"/>
+          </a:ln>
+        </p:spPr>
+        <p:txBody>
+          <a:bodyPr wrap="none" lIns="25400" tIns="38100" rIns="38100" bIns="25400" rtlCol="0" anchor="ctr"/>
+          <a:lstStyle/>
+          <a:p>
+            <a:pPr algn="ctr" indent="0" marL="0">
+              <a:buNone/>
+            </a:pPr>
+            <a:r>
+              <a:rPr lang="en-US" sz="700" dirty="0">
+                <a:solidFill>
+                  <a:srgbClr val="222222"/>
+                </a:solidFill>
+                <a:latin typeface="Yu Gothic" pitchFamily="34" charset="0"/>
+                <a:ea typeface="Yu Gothic" pitchFamily="34" charset="-122"/>
+                <a:cs typeface="Yu Gothic" pitchFamily="34" charset="-120"/>
+              </a:rPr>
+              <a:t>1</a:t>
+            </a:r>
+            <a:endParaRPr lang="en-US" sz="700" dirty="0"/>
+          </a:p>
+        </p:txBody>
+      </p:sp>
+      <p:sp>
+        <p:nvSpPr>
+          <p:cNvPr id="70" name="t3_67"/>
+          <p:cNvSpPr txBox="1"/>
+          <p:nvPr/>
+        </p:nvSpPr>
+        <p:spPr>
+          <a:xfrm>
+            <a:off x="838200" y="9156700"/>
+            <a:ext cx="1016508" cy="124460"/>
+          </a:xfrm>
+          <a:prstGeom prst="rect">
+            <a:avLst/>
+          </a:prstGeom>
+          <a:noFill/>
+          <a:ln/>
+        </p:spPr>
+        <p:txBody>
+          <a:bodyPr wrap="none" lIns="0" tIns="0" rIns="0" bIns="0" rtlCol="0" anchor="t"/>
+          <a:lstStyle/>
+          <a:p>
+            <a:pPr algn="l" indent="0" marL="0">
+              <a:lnSpc>
+                <a:spcPts val="875"/>
+              </a:lnSpc>
+              <a:buNone/>
+            </a:pPr>
+            <a:r>
+              <a:rPr lang="en-US" sz="700" b="1" dirty="0">
+                <a:solidFill>
+                  <a:srgbClr val="222222"/>
+                </a:solidFill>
+                <a:latin typeface="Yu Gothic" pitchFamily="34" charset="0"/>
+                <a:ea typeface="Yu Gothic" pitchFamily="34" charset="-122"/>
+                <a:cs typeface="Yu Gothic" pitchFamily="34" charset="-120"/>
+              </a:rPr>
+              <a:t>Risk Management</a:t>
+            </a:r>
+            <a:endParaRPr lang="en-US" sz="700" dirty="0"/>
+          </a:p>
+        </p:txBody>
+      </p:sp>
+      <p:sp>
+        <p:nvSpPr>
+          <p:cNvPr id="71" name="t3_68"/>
+          <p:cNvSpPr txBox="1"/>
+          <p:nvPr/>
+        </p:nvSpPr>
+        <p:spPr>
+          <a:xfrm>
+            <a:off x="609600" y="9423400"/>
+            <a:ext cx="1254252" cy="235744"/>
+          </a:xfrm>
+          <a:prstGeom prst="rect">
+            <a:avLst/>
+          </a:prstGeom>
+          <a:noFill/>
+          <a:ln/>
+        </p:spPr>
+        <p:txBody>
+          <a:bodyPr wrap="square" lIns="0" tIns="0" rIns="0" bIns="0" rtlCol="0" anchor="t"/>
+          <a:lstStyle/>
+          <a:p>
+            <a:pPr algn="l" indent="0" marL="0">
+              <a:lnSpc>
+                <a:spcPts val="928"/>
+              </a:lnSpc>
+              <a:buNone/>
+            </a:pPr>
+            <a:r>
+              <a:rPr lang="en-US" sz="640" dirty="0">
+                <a:solidFill>
+                  <a:srgbClr val="555555"/>
+                </a:solidFill>
+                <a:latin typeface="Yu Gothic" pitchFamily="34" charset="0"/>
+                <a:ea typeface="Yu Gothic" pitchFamily="34" charset="-122"/>
+                <a:cs typeface="Yu Gothic" pitchFamily="34" charset="-120"/>
+              </a:rPr>
+              <a:t>市場リスク・信用リスク・品質管理</a:t>
+            </a:r>
+            <a:endParaRPr lang="en-US" sz="640" dirty="0"/>
+          </a:p>
+        </p:txBody>
+      </p:sp>
+      <p:sp>
+        <p:nvSpPr>
+          <p:cNvPr id="72" name="t3_69"/>
+          <p:cNvSpPr txBox="1"/>
+          <p:nvPr/>
+        </p:nvSpPr>
+        <p:spPr>
+          <a:xfrm>
+            <a:off x="609600" y="9702800"/>
+            <a:ext cx="1254252" cy="106561"/>
+          </a:xfrm>
+          <a:prstGeom prst="rect">
+            <a:avLst/>
+          </a:prstGeom>
+          <a:noFill/>
+          <a:ln/>
+        </p:spPr>
+        <p:txBody>
+          <a:bodyPr wrap="none" lIns="0" tIns="0" rIns="0" bIns="0" rtlCol="0" anchor="t"/>
+          <a:lstStyle/>
+          <a:p>
+            <a:pPr algn="l" indent="0" marL="0">
+              <a:lnSpc>
+                <a:spcPts val="840"/>
+              </a:lnSpc>
+              <a:buNone/>
+            </a:pPr>
+            <a:r>
+              <a:rPr lang="en-US" sz="560" dirty="0">
+                <a:solidFill>
+                  <a:srgbClr val="9AA0A6"/>
+                </a:solidFill>
+                <a:latin typeface="Yu Gothic" pitchFamily="34" charset="0"/>
+                <a:ea typeface="Yu Gothic" pitchFamily="34" charset="-122"/>
+                <a:cs typeface="Yu Gothic" pitchFamily="34" charset="-120"/>
+              </a:rPr>
+              <a:t>ＸＸＸＸＸＸＸＸＸＸＸＸＸＸ</a:t>
+            </a:r>
+            <a:endParaRPr lang="en-US" sz="560" dirty="0"/>
+          </a:p>
+        </p:txBody>
+      </p:sp>
+      <p:sp>
+        <p:nvSpPr>
+          <p:cNvPr id="73" name="t3_70"/>
+          <p:cNvSpPr txBox="1"/>
+          <p:nvPr/>
+        </p:nvSpPr>
+        <p:spPr>
+          <a:xfrm>
+            <a:off x="1887141" y="9144000"/>
+            <a:ext cx="177800" cy="177800"/>
+          </a:xfrm>
+          <a:prstGeom prst="roundRect">
+            <a:avLst>
+              <a:gd name="adj" fmla="val 257143"/>
+            </a:avLst>
+          </a:prstGeom>
+          <a:noFill/>
+          <a:ln w="12700">
+            <a:solidFill>
+              <a:srgbClr val="3C4045"/>
+            </a:solidFill>
+            <a:prstDash val="solid"/>
+          </a:ln>
+        </p:spPr>
+        <p:txBody>
+          <a:bodyPr wrap="none" lIns="25400" tIns="38100" rIns="38100" bIns="25400" rtlCol="0" anchor="ctr"/>
+          <a:lstStyle/>
+          <a:p>
+            <a:pPr algn="ctr" indent="0" marL="0">
+              <a:buNone/>
+            </a:pPr>
+            <a:r>
+              <a:rPr lang="en-US" sz="700" dirty="0">
+                <a:solidFill>
+                  <a:srgbClr val="222222"/>
+                </a:solidFill>
+                <a:latin typeface="Yu Gothic" pitchFamily="34" charset="0"/>
+                <a:ea typeface="Yu Gothic" pitchFamily="34" charset="-122"/>
+                <a:cs typeface="Yu Gothic" pitchFamily="34" charset="-120"/>
+              </a:rPr>
+              <a:t>2</a:t>
+            </a:r>
+            <a:endParaRPr lang="en-US" sz="700" dirty="0"/>
+          </a:p>
+        </p:txBody>
+      </p:sp>
+      <p:sp>
+        <p:nvSpPr>
+          <p:cNvPr id="74" name="t3_71"/>
+          <p:cNvSpPr txBox="1"/>
+          <p:nvPr/>
+        </p:nvSpPr>
+        <p:spPr>
+          <a:xfrm>
+            <a:off x="2115741" y="9156700"/>
+            <a:ext cx="1016508" cy="124460"/>
+          </a:xfrm>
+          <a:prstGeom prst="rect">
+            <a:avLst/>
+          </a:prstGeom>
+          <a:noFill/>
+          <a:ln/>
+        </p:spPr>
+        <p:txBody>
+          <a:bodyPr wrap="none" lIns="0" tIns="0" rIns="0" bIns="0" rtlCol="0" anchor="t"/>
+          <a:lstStyle/>
+          <a:p>
+            <a:pPr algn="l" indent="0" marL="0">
+              <a:lnSpc>
+                <a:spcPts val="875"/>
+              </a:lnSpc>
+              <a:buNone/>
+            </a:pPr>
+            <a:r>
+              <a:rPr lang="en-US" sz="700" b="1" dirty="0">
+                <a:solidFill>
+                  <a:srgbClr val="222222"/>
+                </a:solidFill>
+                <a:latin typeface="Yu Gothic" pitchFamily="34" charset="0"/>
+                <a:ea typeface="Yu Gothic" pitchFamily="34" charset="-122"/>
+                <a:cs typeface="Yu Gothic" pitchFamily="34" charset="-120"/>
+              </a:rPr>
+              <a:t>Logistics</a:t>
+            </a:r>
+            <a:endParaRPr lang="en-US" sz="700" dirty="0"/>
+          </a:p>
+        </p:txBody>
+      </p:sp>
+      <p:sp>
+        <p:nvSpPr>
+          <p:cNvPr id="75" name="t3_72"/>
+          <p:cNvSpPr txBox="1"/>
+          <p:nvPr/>
+        </p:nvSpPr>
+        <p:spPr>
+          <a:xfrm>
+            <a:off x="1887141" y="9423400"/>
+            <a:ext cx="1254252" cy="235744"/>
+          </a:xfrm>
+          <a:prstGeom prst="rect">
+            <a:avLst/>
+          </a:prstGeom>
+          <a:noFill/>
+          <a:ln/>
+        </p:spPr>
+        <p:txBody>
+          <a:bodyPr wrap="square" lIns="0" tIns="0" rIns="0" bIns="0" rtlCol="0" anchor="t"/>
+          <a:lstStyle/>
+          <a:p>
+            <a:pPr algn="l" indent="0" marL="0">
+              <a:lnSpc>
+                <a:spcPts val="928"/>
+              </a:lnSpc>
+              <a:buNone/>
+            </a:pPr>
+            <a:r>
+              <a:rPr lang="en-US" sz="640" dirty="0">
+                <a:solidFill>
+                  <a:srgbClr val="555555"/>
+                </a:solidFill>
+                <a:latin typeface="Yu Gothic" pitchFamily="34" charset="0"/>
+                <a:ea typeface="Yu Gothic" pitchFamily="34" charset="-122"/>
+                <a:cs typeface="Yu Gothic" pitchFamily="34" charset="-120"/>
+              </a:rPr>
+              <a:t>用船・委託販売・在庫運用・ジャストインタイム納入</a:t>
+            </a:r>
+            <a:endParaRPr lang="en-US" sz="640" dirty="0"/>
+          </a:p>
+        </p:txBody>
+      </p:sp>
+      <p:sp>
+        <p:nvSpPr>
+          <p:cNvPr id="76" name="t3_73"/>
+          <p:cNvSpPr txBox="1"/>
+          <p:nvPr/>
+        </p:nvSpPr>
+        <p:spPr>
+          <a:xfrm>
+            <a:off x="1887141" y="9702800"/>
+            <a:ext cx="1254252" cy="106561"/>
+          </a:xfrm>
+          <a:prstGeom prst="rect">
+            <a:avLst/>
+          </a:prstGeom>
+          <a:noFill/>
+          <a:ln/>
+        </p:spPr>
+        <p:txBody>
+          <a:bodyPr wrap="none" lIns="0" tIns="0" rIns="0" bIns="0" rtlCol="0" anchor="t"/>
+          <a:lstStyle/>
+          <a:p>
+            <a:pPr algn="l" indent="0" marL="0">
+              <a:lnSpc>
+                <a:spcPts val="840"/>
+              </a:lnSpc>
+              <a:buNone/>
+            </a:pPr>
+            <a:r>
+              <a:rPr lang="en-US" sz="560" dirty="0">
+                <a:solidFill>
+                  <a:srgbClr val="9AA0A6"/>
+                </a:solidFill>
+                <a:latin typeface="Yu Gothic" pitchFamily="34" charset="0"/>
+                <a:ea typeface="Yu Gothic" pitchFamily="34" charset="-122"/>
+                <a:cs typeface="Yu Gothic" pitchFamily="34" charset="-120"/>
+              </a:rPr>
+              <a:t>ＸＸＸＸＸＸＸＸＸＸＸＸＸＸ</a:t>
+            </a:r>
+            <a:endParaRPr lang="en-US" sz="560" dirty="0"/>
+          </a:p>
+        </p:txBody>
+      </p:sp>
+      <p:sp>
+        <p:nvSpPr>
+          <p:cNvPr id="77" name="t3_74"/>
+          <p:cNvSpPr txBox="1"/>
+          <p:nvPr/>
+        </p:nvSpPr>
+        <p:spPr>
+          <a:xfrm>
+            <a:off x="3164681" y="9144000"/>
+            <a:ext cx="177800" cy="177800"/>
+          </a:xfrm>
+          <a:prstGeom prst="roundRect">
+            <a:avLst>
+              <a:gd name="adj" fmla="val 257143"/>
+            </a:avLst>
+          </a:prstGeom>
+          <a:noFill/>
+          <a:ln w="12700">
+            <a:solidFill>
+              <a:srgbClr val="3C4045"/>
+            </a:solidFill>
+            <a:prstDash val="solid"/>
+          </a:ln>
+        </p:spPr>
+        <p:txBody>
+          <a:bodyPr wrap="none" lIns="25400" tIns="38100" rIns="38100" bIns="25400" rtlCol="0" anchor="ctr"/>
+          <a:lstStyle/>
+          <a:p>
+            <a:pPr algn="ctr" indent="0" marL="0">
+              <a:buNone/>
+            </a:pPr>
+            <a:r>
+              <a:rPr lang="en-US" sz="700" dirty="0">
+                <a:solidFill>
+                  <a:srgbClr val="222222"/>
+                </a:solidFill>
+                <a:latin typeface="Yu Gothic" pitchFamily="34" charset="0"/>
+                <a:ea typeface="Yu Gothic" pitchFamily="34" charset="-122"/>
+                <a:cs typeface="Yu Gothic" pitchFamily="34" charset="-120"/>
+              </a:rPr>
+              <a:t>3</a:t>
+            </a:r>
+            <a:endParaRPr lang="en-US" sz="700" dirty="0"/>
+          </a:p>
+        </p:txBody>
+      </p:sp>
+      <p:sp>
+        <p:nvSpPr>
+          <p:cNvPr id="78" name="t3_75"/>
+          <p:cNvSpPr txBox="1"/>
+          <p:nvPr/>
+        </p:nvSpPr>
+        <p:spPr>
+          <a:xfrm>
+            <a:off x="3393281" y="9156700"/>
+            <a:ext cx="1016508" cy="124460"/>
+          </a:xfrm>
+          <a:prstGeom prst="rect">
+            <a:avLst/>
+          </a:prstGeom>
+          <a:noFill/>
+          <a:ln/>
+        </p:spPr>
+        <p:txBody>
+          <a:bodyPr wrap="none" lIns="0" tIns="0" rIns="0" bIns="0" rtlCol="0" anchor="t"/>
+          <a:lstStyle/>
+          <a:p>
+            <a:pPr algn="l" indent="0" marL="0">
+              <a:lnSpc>
+                <a:spcPts val="875"/>
+              </a:lnSpc>
+              <a:buNone/>
+            </a:pPr>
+            <a:r>
+              <a:rPr lang="en-US" sz="700" b="1" dirty="0">
+                <a:solidFill>
+                  <a:srgbClr val="222222"/>
+                </a:solidFill>
+                <a:latin typeface="Yu Gothic" pitchFamily="34" charset="0"/>
+                <a:ea typeface="Yu Gothic" pitchFamily="34" charset="-122"/>
+                <a:cs typeface="Yu Gothic" pitchFamily="34" charset="-120"/>
+              </a:rPr>
+              <a:t>Financing</a:t>
+            </a:r>
+            <a:endParaRPr lang="en-US" sz="700" dirty="0"/>
+          </a:p>
+        </p:txBody>
+      </p:sp>
+      <p:sp>
+        <p:nvSpPr>
+          <p:cNvPr id="79" name="t3_76"/>
+          <p:cNvSpPr txBox="1"/>
+          <p:nvPr/>
+        </p:nvSpPr>
+        <p:spPr>
+          <a:xfrm>
+            <a:off x="3164681" y="9423400"/>
+            <a:ext cx="1254252" cy="117872"/>
+          </a:xfrm>
+          <a:prstGeom prst="rect">
+            <a:avLst/>
+          </a:prstGeom>
+          <a:noFill/>
+          <a:ln/>
+        </p:spPr>
+        <p:txBody>
+          <a:bodyPr wrap="none" lIns="0" tIns="0" rIns="0" bIns="0" rtlCol="0" anchor="t"/>
+          <a:lstStyle/>
+          <a:p>
+            <a:pPr algn="l" indent="0" marL="0">
+              <a:lnSpc>
+                <a:spcPts val="928"/>
+              </a:lnSpc>
+              <a:buNone/>
+            </a:pPr>
+            <a:r>
+              <a:rPr lang="en-US" sz="640" dirty="0">
+                <a:solidFill>
+                  <a:srgbClr val="555555"/>
+                </a:solidFill>
+                <a:latin typeface="Yu Gothic" pitchFamily="34" charset="0"/>
+                <a:ea typeface="Yu Gothic" pitchFamily="34" charset="-122"/>
+                <a:cs typeface="Yu Gothic" pitchFamily="34" charset="-120"/>
+              </a:rPr>
+              <a:t>オフテイク契約・貿易金融</a:t>
+            </a:r>
+            <a:endParaRPr lang="en-US" sz="640" dirty="0"/>
+          </a:p>
+        </p:txBody>
+      </p:sp>
+      <p:sp>
+        <p:nvSpPr>
+          <p:cNvPr id="80" name="t3_77"/>
+          <p:cNvSpPr txBox="1"/>
+          <p:nvPr/>
+        </p:nvSpPr>
+        <p:spPr>
+          <a:xfrm>
+            <a:off x="3164681" y="9702800"/>
+            <a:ext cx="1254252" cy="106561"/>
+          </a:xfrm>
+          <a:prstGeom prst="rect">
+            <a:avLst/>
+          </a:prstGeom>
+          <a:noFill/>
+          <a:ln/>
+        </p:spPr>
+        <p:txBody>
+          <a:bodyPr wrap="none" lIns="0" tIns="0" rIns="0" bIns="0" rtlCol="0" anchor="t"/>
+          <a:lstStyle/>
+          <a:p>
+            <a:pPr algn="l" indent="0" marL="0">
+              <a:lnSpc>
+                <a:spcPts val="840"/>
+              </a:lnSpc>
+              <a:buNone/>
+            </a:pPr>
+            <a:r>
+              <a:rPr lang="en-US" sz="560" dirty="0">
+                <a:solidFill>
+                  <a:srgbClr val="9AA0A6"/>
+                </a:solidFill>
+                <a:latin typeface="Yu Gothic" pitchFamily="34" charset="0"/>
+                <a:ea typeface="Yu Gothic" pitchFamily="34" charset="-122"/>
+                <a:cs typeface="Yu Gothic" pitchFamily="34" charset="-120"/>
+              </a:rPr>
+              <a:t>ＸＸＸＸＸＸＸＸＸＸＸＸＸＸ</a:t>
+            </a:r>
+            <a:endParaRPr lang="en-US" sz="560" dirty="0"/>
+          </a:p>
+        </p:txBody>
+      </p:sp>
+      <p:sp>
+        <p:nvSpPr>
+          <p:cNvPr id="81" name="t3_78"/>
+          <p:cNvSpPr txBox="1"/>
+          <p:nvPr/>
+        </p:nvSpPr>
+        <p:spPr>
+          <a:xfrm>
+            <a:off x="4442420" y="9144000"/>
+            <a:ext cx="177800" cy="177800"/>
+          </a:xfrm>
+          <a:prstGeom prst="roundRect">
+            <a:avLst>
+              <a:gd name="adj" fmla="val 257143"/>
+            </a:avLst>
+          </a:prstGeom>
+          <a:noFill/>
+          <a:ln w="12700">
+            <a:solidFill>
+              <a:srgbClr val="3C4045"/>
+            </a:solidFill>
+            <a:prstDash val="solid"/>
+          </a:ln>
+        </p:spPr>
+        <p:txBody>
+          <a:bodyPr wrap="none" lIns="25400" tIns="38100" rIns="38100" bIns="25400" rtlCol="0" anchor="ctr"/>
+          <a:lstStyle/>
+          <a:p>
+            <a:pPr algn="ctr" indent="0" marL="0">
+              <a:buNone/>
+            </a:pPr>
+            <a:r>
+              <a:rPr lang="en-US" sz="700" dirty="0">
+                <a:solidFill>
+                  <a:srgbClr val="222222"/>
+                </a:solidFill>
+                <a:latin typeface="Yu Gothic" pitchFamily="34" charset="0"/>
+                <a:ea typeface="Yu Gothic" pitchFamily="34" charset="-122"/>
+                <a:cs typeface="Yu Gothic" pitchFamily="34" charset="-120"/>
+              </a:rPr>
+              <a:t>4</a:t>
+            </a:r>
+            <a:endParaRPr lang="en-US" sz="700" dirty="0"/>
+          </a:p>
+        </p:txBody>
+      </p:sp>
+      <p:sp>
+        <p:nvSpPr>
+          <p:cNvPr id="82" name="t3_79"/>
+          <p:cNvSpPr txBox="1"/>
+          <p:nvPr/>
+        </p:nvSpPr>
+        <p:spPr>
+          <a:xfrm>
+            <a:off x="4671020" y="9156700"/>
+            <a:ext cx="1016508" cy="222250"/>
+          </a:xfrm>
+          <a:prstGeom prst="rect">
+            <a:avLst/>
+          </a:prstGeom>
+          <a:noFill/>
+          <a:ln/>
+        </p:spPr>
+        <p:txBody>
+          <a:bodyPr wrap="square" lIns="0" tIns="0" rIns="0" bIns="0" rtlCol="0" anchor="t"/>
+          <a:lstStyle/>
+          <a:p>
+            <a:pPr algn="l" indent="0" marL="0">
+              <a:lnSpc>
+                <a:spcPts val="875"/>
+              </a:lnSpc>
+              <a:buNone/>
+            </a:pPr>
+            <a:r>
+              <a:rPr lang="en-US" sz="700" b="1" dirty="0">
+                <a:solidFill>
+                  <a:srgbClr val="222222"/>
+                </a:solidFill>
+                <a:latin typeface="Yu Gothic" pitchFamily="34" charset="0"/>
+                <a:ea typeface="Yu Gothic" pitchFamily="34" charset="-122"/>
+                <a:cs typeface="Yu Gothic" pitchFamily="34" charset="-120"/>
+              </a:rPr>
+              <a:t>Marketing and Procurement</a:t>
+            </a:r>
+            <a:endParaRPr lang="en-US" sz="700" dirty="0"/>
+          </a:p>
+        </p:txBody>
+      </p:sp>
+      <p:sp>
+        <p:nvSpPr>
+          <p:cNvPr id="83" name="t3_80"/>
+          <p:cNvSpPr txBox="1"/>
+          <p:nvPr/>
+        </p:nvSpPr>
+        <p:spPr>
+          <a:xfrm>
+            <a:off x="4442420" y="9423400"/>
+            <a:ext cx="1254252" cy="235744"/>
+          </a:xfrm>
+          <a:prstGeom prst="rect">
+            <a:avLst/>
+          </a:prstGeom>
+          <a:noFill/>
+          <a:ln/>
+        </p:spPr>
+        <p:txBody>
+          <a:bodyPr wrap="square" lIns="0" tIns="0" rIns="0" bIns="0" rtlCol="0" anchor="t"/>
+          <a:lstStyle/>
+          <a:p>
+            <a:pPr algn="l" indent="0" marL="0">
+              <a:lnSpc>
+                <a:spcPts val="928"/>
+              </a:lnSpc>
+              <a:buNone/>
+            </a:pPr>
+            <a:r>
+              <a:rPr lang="en-US" sz="640" dirty="0">
+                <a:solidFill>
+                  <a:srgbClr val="555555"/>
+                </a:solidFill>
+                <a:latin typeface="Yu Gothic" pitchFamily="34" charset="0"/>
+                <a:ea typeface="Yu Gothic" pitchFamily="34" charset="-122"/>
+                <a:cs typeface="Yu Gothic" pitchFamily="34" charset="-120"/>
+              </a:rPr>
+              <a:t>市場分析・マーケティング戦略・調達先の多様化</a:t>
+            </a:r>
+            <a:endParaRPr lang="en-US" sz="640" dirty="0"/>
+          </a:p>
+        </p:txBody>
+      </p:sp>
+      <p:sp>
+        <p:nvSpPr>
+          <p:cNvPr id="84" name="t3_81"/>
+          <p:cNvSpPr txBox="1"/>
+          <p:nvPr/>
+        </p:nvSpPr>
+        <p:spPr>
+          <a:xfrm>
+            <a:off x="4442420" y="9702800"/>
+            <a:ext cx="1254252" cy="106561"/>
+          </a:xfrm>
+          <a:prstGeom prst="rect">
+            <a:avLst/>
+          </a:prstGeom>
+          <a:noFill/>
+          <a:ln/>
+        </p:spPr>
+        <p:txBody>
+          <a:bodyPr wrap="none" lIns="0" tIns="0" rIns="0" bIns="0" rtlCol="0" anchor="t"/>
+          <a:lstStyle/>
+          <a:p>
+            <a:pPr algn="l" indent="0" marL="0">
+              <a:lnSpc>
+                <a:spcPts val="840"/>
+              </a:lnSpc>
+              <a:buNone/>
+            </a:pPr>
+            <a:r>
+              <a:rPr lang="en-US" sz="560" dirty="0">
+                <a:solidFill>
+                  <a:srgbClr val="9AA0A6"/>
+                </a:solidFill>
+                <a:latin typeface="Yu Gothic" pitchFamily="34" charset="0"/>
+                <a:ea typeface="Yu Gothic" pitchFamily="34" charset="-122"/>
+                <a:cs typeface="Yu Gothic" pitchFamily="34" charset="-120"/>
+              </a:rPr>
+              <a:t>ＸＸＸＸＸＸＸＸＸＸＸＸＸＸ</a:t>
+            </a:r>
+            <a:endParaRPr lang="en-US" sz="560" dirty="0"/>
+          </a:p>
+        </p:txBody>
+      </p:sp>
+      <p:sp>
+        <p:nvSpPr>
+          <p:cNvPr id="85" name="t3_82"/>
+          <p:cNvSpPr txBox="1"/>
+          <p:nvPr/>
+        </p:nvSpPr>
+        <p:spPr>
+          <a:xfrm>
+            <a:off x="5719961" y="9144000"/>
+            <a:ext cx="177800" cy="177800"/>
+          </a:xfrm>
+          <a:prstGeom prst="roundRect">
+            <a:avLst>
+              <a:gd name="adj" fmla="val 257143"/>
+            </a:avLst>
+          </a:prstGeom>
+          <a:noFill/>
+          <a:ln w="12700">
+            <a:solidFill>
+              <a:srgbClr val="3C4045"/>
+            </a:solidFill>
+            <a:prstDash val="solid"/>
+          </a:ln>
+        </p:spPr>
+        <p:txBody>
+          <a:bodyPr wrap="none" lIns="25400" tIns="38100" rIns="38100" bIns="25400" rtlCol="0" anchor="ctr"/>
+          <a:lstStyle/>
+          <a:p>
+            <a:pPr algn="ctr" indent="0" marL="0">
+              <a:buNone/>
+            </a:pPr>
+            <a:r>
+              <a:rPr lang="en-US" sz="700" dirty="0">
+                <a:solidFill>
+                  <a:srgbClr val="222222"/>
+                </a:solidFill>
+                <a:latin typeface="Yu Gothic" pitchFamily="34" charset="0"/>
+                <a:ea typeface="Yu Gothic" pitchFamily="34" charset="-122"/>
+                <a:cs typeface="Yu Gothic" pitchFamily="34" charset="-120"/>
+              </a:rPr>
+              <a:t>5</a:t>
+            </a:r>
+            <a:endParaRPr lang="en-US" sz="700" dirty="0"/>
+          </a:p>
+        </p:txBody>
+      </p:sp>
+      <p:sp>
+        <p:nvSpPr>
+          <p:cNvPr id="86" name="t3_83"/>
+          <p:cNvSpPr txBox="1"/>
+          <p:nvPr/>
+        </p:nvSpPr>
+        <p:spPr>
+          <a:xfrm>
+            <a:off x="5948561" y="9156700"/>
+            <a:ext cx="1016508" cy="124460"/>
+          </a:xfrm>
+          <a:prstGeom prst="rect">
+            <a:avLst/>
+          </a:prstGeom>
+          <a:noFill/>
+          <a:ln/>
+        </p:spPr>
+        <p:txBody>
+          <a:bodyPr wrap="none" lIns="0" tIns="0" rIns="0" bIns="0" rtlCol="0" anchor="t"/>
+          <a:lstStyle/>
+          <a:p>
+            <a:pPr algn="l" indent="0" marL="0">
+              <a:lnSpc>
+                <a:spcPts val="875"/>
+              </a:lnSpc>
+              <a:buNone/>
+            </a:pPr>
+            <a:r>
+              <a:rPr lang="en-US" sz="700" b="1" dirty="0">
+                <a:solidFill>
+                  <a:srgbClr val="222222"/>
+                </a:solidFill>
+                <a:latin typeface="Yu Gothic" pitchFamily="34" charset="0"/>
+                <a:ea typeface="Yu Gothic" pitchFamily="34" charset="-122"/>
+                <a:cs typeface="Yu Gothic" pitchFamily="34" charset="-120"/>
+              </a:rPr>
+              <a:t>Carbon Reduction</a:t>
+            </a:r>
+            <a:endParaRPr lang="en-US" sz="700" dirty="0"/>
+          </a:p>
+        </p:txBody>
+      </p:sp>
+      <p:sp>
+        <p:nvSpPr>
+          <p:cNvPr id="87" name="t3_84"/>
+          <p:cNvSpPr txBox="1"/>
+          <p:nvPr/>
+        </p:nvSpPr>
+        <p:spPr>
+          <a:xfrm>
+            <a:off x="5719961" y="9423400"/>
+            <a:ext cx="1254252" cy="235744"/>
+          </a:xfrm>
+          <a:prstGeom prst="rect">
+            <a:avLst/>
+          </a:prstGeom>
+          <a:noFill/>
+          <a:ln/>
+        </p:spPr>
+        <p:txBody>
+          <a:bodyPr wrap="square" lIns="0" tIns="0" rIns="0" bIns="0" rtlCol="0" anchor="t"/>
+          <a:lstStyle/>
+          <a:p>
+            <a:pPr algn="l" indent="0" marL="0">
+              <a:lnSpc>
+                <a:spcPts val="928"/>
+              </a:lnSpc>
+              <a:buNone/>
+            </a:pPr>
+            <a:r>
+              <a:rPr lang="en-US" sz="640" dirty="0">
+                <a:solidFill>
+                  <a:srgbClr val="555555"/>
+                </a:solidFill>
+                <a:latin typeface="Yu Gothic" pitchFamily="34" charset="0"/>
+                <a:ea typeface="Yu Gothic" pitchFamily="34" charset="-122"/>
+                <a:cs typeface="Yu Gothic" pitchFamily="34" charset="-120"/>
+              </a:rPr>
+              <a:t>カーボンオフセット・低炭素素材</a:t>
+            </a:r>
+            <a:endParaRPr lang="en-US" sz="640" dirty="0"/>
+          </a:p>
+        </p:txBody>
+      </p:sp>
+      <p:sp>
+        <p:nvSpPr>
+          <p:cNvPr id="88" name="t3_85"/>
+          <p:cNvSpPr txBox="1"/>
+          <p:nvPr/>
+        </p:nvSpPr>
+        <p:spPr>
+          <a:xfrm>
+            <a:off x="5719961" y="9702800"/>
+            <a:ext cx="1254252" cy="106561"/>
+          </a:xfrm>
+          <a:prstGeom prst="rect">
+            <a:avLst/>
+          </a:prstGeom>
+          <a:noFill/>
+          <a:ln/>
+        </p:spPr>
+        <p:txBody>
+          <a:bodyPr wrap="none" lIns="0" tIns="0" rIns="0" bIns="0" rtlCol="0" anchor="t"/>
+          <a:lstStyle/>
+          <a:p>
+            <a:pPr algn="l" indent="0" marL="0">
+              <a:lnSpc>
+                <a:spcPts val="840"/>
+              </a:lnSpc>
+              <a:buNone/>
+            </a:pPr>
+            <a:r>
+              <a:rPr lang="en-US" sz="560" dirty="0">
+                <a:solidFill>
+                  <a:srgbClr val="9AA0A6"/>
+                </a:solidFill>
+                <a:latin typeface="Yu Gothic" pitchFamily="34" charset="0"/>
+                <a:ea typeface="Yu Gothic" pitchFamily="34" charset="-122"/>
+                <a:cs typeface="Yu Gothic" pitchFamily="34" charset="-120"/>
+              </a:rPr>
+              <a:t>ＸＸＸＸＸＸＸＸＸＸＸＸＸＸ</a:t>
+            </a:r>
+            <a:endParaRPr lang="en-US" sz="560" dirty="0"/>
+          </a:p>
+        </p:txBody>
+      </p:sp>
+      <p:sp>
+        <p:nvSpPr>
+          <p:cNvPr id="89" name="t3_86"/>
+          <p:cNvSpPr txBox="1"/>
+          <p:nvPr/>
+        </p:nvSpPr>
+        <p:spPr>
+          <a:xfrm>
+            <a:off x="609600" y="9829800"/>
+            <a:ext cx="6603492" cy="236141"/>
+          </a:xfrm>
+          <a:prstGeom prst="rect">
+            <a:avLst/>
+          </a:prstGeom>
+          <a:noFill/>
+          <a:ln/>
+        </p:spPr>
+        <p:txBody>
+          <a:bodyPr wrap="square" lIns="0" tIns="0" rIns="0" bIns="0" rtlCol="0" anchor="t"/>
+          <a:lstStyle/>
+          <a:p>
+            <a:pPr algn="l" indent="0" marL="0">
+              <a:lnSpc>
+                <a:spcPts val="930"/>
+              </a:lnSpc>
+              <a:buNone/>
+            </a:pPr>
+            <a:r>
+              <a:rPr lang="en-US" sz="620" dirty="0">
+                <a:solidFill>
+                  <a:srgbClr val="9A5A60"/>
+                </a:solidFill>
+                <a:latin typeface="Yu Gothic" pitchFamily="34" charset="0"/>
+                <a:ea typeface="Yu Gothic" pitchFamily="34" charset="-122"/>
+                <a:cs typeface="Yu Gothic" pitchFamily="34" charset="-120"/>
+              </a:rPr>
+              <a:t>※PwC様フィードバック②：見出しを「RtMの多様な機能」とし、機能一覧を5項目に差し替え。本文は銅の事例を交えた説明文を想定（参照：RtM Group Main Products and Business Solutions）</a:t>
+            </a:r>
+            <a:endParaRPr lang="en-US" sz="620" dirty="0"/>
+          </a:p>
+        </p:txBody>
+      </p:sp>
+      <p:sp>
+        <p:nvSpPr>
+          <p:cNvPr id="90" name="t3_87"/>
           <p:cNvSpPr txBox="1"/>
           <p:nvPr/>
         </p:nvSpPr>
@@ -20176,7 +21587,7 @@
       </p:sp>
       <p:sp>
         <p:nvSpPr>
-          <p:cNvPr id="55" name="t3_51"/>
+          <p:cNvPr id="91" name="t3_88"/>
           <p:cNvSpPr txBox="1"/>
           <p:nvPr/>
         </p:nvSpPr>
@@ -20199,13 +21610,10 @@
           </a:ln>
         </p:spPr>
         <p:txBody>
-          <a:bodyPr wrap="square" lIns="25400" tIns="38100" rIns="38100" bIns="25400" rtlCol="0" anchor="t"/>
-          <a:lstStyle/>
-          <a:p>
-            <a:pPr algn="l" indent="0" marL="0">
-              <a:lnSpc>
-                <a:spcPts val="858"/>
-              </a:lnSpc>
+          <a:bodyPr wrap="square" lIns="25400" tIns="38100" rIns="38100" bIns="25400" rtlCol="0" anchor="ctr"/>
+          <a:lstStyle/>
+          <a:p>
+            <a:pPr algn="l" indent="0" marL="0">
               <a:buNone/>
             </a:pPr>
             <a:r>
@@ -20225,7 +21633,7 @@
       </p:sp>
       <p:sp>
         <p:nvSpPr>
-          <p:cNvPr id="56" name="t3_52"/>
+          <p:cNvPr id="92" name="t3_89"/>
           <p:cNvSpPr txBox="1"/>
           <p:nvPr/>
         </p:nvSpPr>
@@ -20267,7 +21675,7 @@
       </p:sp>
       <p:sp>
         <p:nvSpPr>
-          <p:cNvPr id="57" name="t3_53"/>
+          <p:cNvPr id="93" name="t3_90"/>
           <p:cNvSpPr txBox="1"/>
           <p:nvPr/>
         </p:nvSpPr>
@@ -20309,14 +21717,14 @@
       </p:sp>
       <p:pic>
         <p:nvPicPr>
-          <p:cNvPr id="58" name="Image 1" descr="preencoded.png">    </p:cNvPr>
+          <p:cNvPr id="94" name="Image 3" descr="preencoded.png">    </p:cNvPr>
           <p:cNvPicPr>
             <a:picLocks noChangeAspect="1"/>
           </p:cNvPicPr>
           <p:nvPr/>
         </p:nvPicPr>
         <p:blipFill>
-          <a:blip r:embed="rId2"/>
+          <a:blip r:embed="rId4"/>
           <a:stretch>
             <a:fillRect/>
           </a:stretch>
@@ -20333,7 +21741,7 @@
       </p:pic>
       <p:sp>
         <p:nvSpPr>
-          <p:cNvPr id="59" name="Shape 54"/>
+          <p:cNvPr id="95" name="Shape 88"/>
           <p:cNvSpPr/>
           <p:nvPr/>
         </p:nvSpPr>
@@ -20358,7 +21766,7 @@
       </p:sp>
       <p:sp>
         <p:nvSpPr>
-          <p:cNvPr id="60" name="Shape 55"/>
+          <p:cNvPr id="96" name="Shape 89"/>
           <p:cNvSpPr/>
           <p:nvPr/>
         </p:nvSpPr>
@@ -20383,7 +21791,7 @@
       </p:sp>
       <p:sp>
         <p:nvSpPr>
-          <p:cNvPr id="61" name="Shape 56"/>
+          <p:cNvPr id="97" name="Shape 90"/>
           <p:cNvSpPr/>
           <p:nvPr/>
         </p:nvSpPr>
@@ -20408,7 +21816,7 @@
       </p:sp>
       <p:sp>
         <p:nvSpPr>
-          <p:cNvPr id="62" name="Shape 57"/>
+          <p:cNvPr id="98" name="Shape 91"/>
           <p:cNvSpPr/>
           <p:nvPr/>
         </p:nvSpPr>
@@ -20433,7 +21841,7 @@
       </p:sp>
       <p:sp>
         <p:nvSpPr>
-          <p:cNvPr id="63" name="Shape 58"/>
+          <p:cNvPr id="99" name="Shape 92"/>
           <p:cNvSpPr/>
           <p:nvPr/>
         </p:nvSpPr>
@@ -20458,7 +21866,7 @@
       </p:sp>
       <p:sp>
         <p:nvSpPr>
-          <p:cNvPr id="64" name="Shape 59"/>
+          <p:cNvPr id="100" name="Shape 93"/>
           <p:cNvSpPr/>
           <p:nvPr/>
         </p:nvSpPr>
@@ -20483,7 +21891,7 @@
       </p:sp>
       <p:sp>
         <p:nvSpPr>
-          <p:cNvPr id="65" name="Shape 60"/>
+          <p:cNvPr id="101" name="Shape 94"/>
           <p:cNvSpPr/>
           <p:nvPr/>
         </p:nvSpPr>
@@ -20508,7 +21916,7 @@
       </p:sp>
       <p:sp>
         <p:nvSpPr>
-          <p:cNvPr id="66" name="Shape 61"/>
+          <p:cNvPr id="102" name="Shape 95"/>
           <p:cNvSpPr/>
           <p:nvPr/>
         </p:nvSpPr>
@@ -20533,7 +21941,7 @@
       </p:sp>
       <p:sp>
         <p:nvSpPr>
-          <p:cNvPr id="67" name="Shape 62"/>
+          <p:cNvPr id="103" name="Shape 96"/>
           <p:cNvSpPr/>
           <p:nvPr/>
         </p:nvSpPr>
@@ -20558,7 +21966,7 @@
       </p:sp>
       <p:sp>
         <p:nvSpPr>
-          <p:cNvPr id="68" name="Shape 63"/>
+          <p:cNvPr id="104" name="Shape 97"/>
           <p:cNvSpPr/>
           <p:nvPr/>
         </p:nvSpPr>
@@ -20583,7 +21991,7 @@
       </p:sp>
       <p:sp>
         <p:nvSpPr>
-          <p:cNvPr id="69" name="Shape 64"/>
+          <p:cNvPr id="105" name="Shape 98"/>
           <p:cNvSpPr/>
           <p:nvPr/>
         </p:nvSpPr>
@@ -20608,7 +22016,7 @@
       </p:sp>
       <p:sp>
         <p:nvSpPr>
-          <p:cNvPr id="70" name="Shape 65"/>
+          <p:cNvPr id="106" name="Shape 99"/>
           <p:cNvSpPr/>
           <p:nvPr/>
         </p:nvSpPr>
@@ -20633,7 +22041,7 @@
       </p:sp>
       <p:sp>
         <p:nvSpPr>
-          <p:cNvPr id="71" name="Shape 66"/>
+          <p:cNvPr id="107" name="Shape 100"/>
           <p:cNvSpPr/>
           <p:nvPr/>
         </p:nvSpPr>
@@ -20658,7 +22066,7 @@
       </p:sp>
       <p:sp>
         <p:nvSpPr>
-          <p:cNvPr id="72" name="Shape 67"/>
+          <p:cNvPr id="108" name="Shape 101"/>
           <p:cNvSpPr/>
           <p:nvPr/>
         </p:nvSpPr>
@@ -20683,7 +22091,7 @@
       </p:sp>
       <p:sp>
         <p:nvSpPr>
-          <p:cNvPr id="73" name="Shape 68"/>
+          <p:cNvPr id="109" name="Shape 102"/>
           <p:cNvSpPr/>
           <p:nvPr/>
         </p:nvSpPr>
@@ -20708,7 +22116,7 @@
       </p:sp>
       <p:sp>
         <p:nvSpPr>
-          <p:cNvPr id="74" name="Shape 69"/>
+          <p:cNvPr id="110" name="Shape 103"/>
           <p:cNvSpPr/>
           <p:nvPr/>
         </p:nvSpPr>
@@ -20733,7 +22141,7 @@
       </p:sp>
       <p:sp>
         <p:nvSpPr>
-          <p:cNvPr id="75" name="Shape 70"/>
+          <p:cNvPr id="111" name="Shape 104"/>
           <p:cNvSpPr/>
           <p:nvPr/>
         </p:nvSpPr>
@@ -20758,7 +22166,7 @@
       </p:sp>
       <p:sp>
         <p:nvSpPr>
-          <p:cNvPr id="76" name="Shape 71"/>
+          <p:cNvPr id="112" name="Shape 105"/>
           <p:cNvSpPr/>
           <p:nvPr/>
         </p:nvSpPr>
@@ -20783,7 +22191,7 @@
       </p:sp>
       <p:sp>
         <p:nvSpPr>
-          <p:cNvPr id="77" name="Shape 72"/>
+          <p:cNvPr id="113" name="Shape 106"/>
           <p:cNvSpPr/>
           <p:nvPr/>
         </p:nvSpPr>
@@ -20808,7 +22216,7 @@
       </p:sp>
       <p:sp>
         <p:nvSpPr>
-          <p:cNvPr id="78" name="Shape 73"/>
+          <p:cNvPr id="114" name="Shape 107"/>
           <p:cNvSpPr/>
           <p:nvPr/>
         </p:nvSpPr>
@@ -20833,7 +22241,7 @@
       </p:sp>
       <p:sp>
         <p:nvSpPr>
-          <p:cNvPr id="79" name="Shape 74"/>
+          <p:cNvPr id="115" name="Shape 108"/>
           <p:cNvSpPr/>
           <p:nvPr/>
         </p:nvSpPr>
@@ -20858,7 +22266,7 @@
       </p:sp>
       <p:sp>
         <p:nvSpPr>
-          <p:cNvPr id="80" name="Shape 75"/>
+          <p:cNvPr id="116" name="Shape 109"/>
           <p:cNvSpPr/>
           <p:nvPr/>
         </p:nvSpPr>
@@ -20883,7 +22291,7 @@
       </p:sp>
       <p:sp>
         <p:nvSpPr>
-          <p:cNvPr id="81" name="t3_77"/>
+          <p:cNvPr id="117" name="t3_114"/>
           <p:cNvSpPr txBox="1"/>
           <p:nvPr/>
         </p:nvSpPr>
@@ -20925,7 +22333,7 @@
       </p:sp>
       <p:sp>
         <p:nvSpPr>
-          <p:cNvPr id="82" name="t3_78"/>
+          <p:cNvPr id="118" name="t3_115"/>
           <p:cNvSpPr txBox="1"/>
           <p:nvPr/>
         </p:nvSpPr>
@@ -20967,7 +22375,7 @@
       </p:sp>
       <p:sp>
         <p:nvSpPr>
-          <p:cNvPr id="83" name="t3_79"/>
+          <p:cNvPr id="119" name="t3_116"/>
           <p:cNvSpPr txBox="1"/>
           <p:nvPr/>
         </p:nvSpPr>
@@ -21009,7 +22417,7 @@
       </p:sp>
       <p:sp>
         <p:nvSpPr>
-          <p:cNvPr id="84" name="t3_80"/>
+          <p:cNvPr id="120" name="t3_117"/>
           <p:cNvSpPr txBox="1"/>
           <p:nvPr/>
         </p:nvSpPr>
@@ -21051,7 +22459,7 @@
       </p:sp>
       <p:sp>
         <p:nvSpPr>
-          <p:cNvPr id="85" name="t3_81"/>
+          <p:cNvPr id="121" name="t3_118"/>
           <p:cNvSpPr txBox="1"/>
           <p:nvPr/>
         </p:nvSpPr>
@@ -21093,7 +22501,7 @@
       </p:sp>
       <p:sp>
         <p:nvSpPr>
-          <p:cNvPr id="86" name="t3_82"/>
+          <p:cNvPr id="122" name="t3_119"/>
           <p:cNvSpPr txBox="1"/>
           <p:nvPr/>
         </p:nvSpPr>
@@ -21135,7 +22543,7 @@
       </p:sp>
       <p:sp>
         <p:nvSpPr>
-          <p:cNvPr id="87" name="t3_83"/>
+          <p:cNvPr id="123" name="t3_120"/>
           <p:cNvSpPr txBox="1"/>
           <p:nvPr/>
         </p:nvSpPr>
@@ -21177,7 +22585,7 @@
       </p:sp>
       <p:sp>
         <p:nvSpPr>
-          <p:cNvPr id="88" name="t3_84"/>
+          <p:cNvPr id="124" name="t3_121"/>
           <p:cNvSpPr txBox="1"/>
           <p:nvPr/>
         </p:nvSpPr>
@@ -21219,7 +22627,7 @@
       </p:sp>
       <p:sp>
         <p:nvSpPr>
-          <p:cNvPr id="89" name="t3_85"/>
+          <p:cNvPr id="125" name="t3_122"/>
           <p:cNvSpPr txBox="1"/>
           <p:nvPr/>
         </p:nvSpPr>
@@ -21261,7 +22669,7 @@
       </p:sp>
       <p:sp>
         <p:nvSpPr>
-          <p:cNvPr id="90" name="t3_86"/>
+          <p:cNvPr id="126" name="t3_123"/>
           <p:cNvSpPr txBox="1"/>
           <p:nvPr/>
         </p:nvSpPr>
@@ -21303,7 +22711,7 @@
       </p:sp>
       <p:sp>
         <p:nvSpPr>
-          <p:cNvPr id="91" name="t3_87"/>
+          <p:cNvPr id="127" name="t3_124"/>
           <p:cNvSpPr txBox="1"/>
           <p:nvPr/>
         </p:nvSpPr>
@@ -21345,7 +22753,7 @@
       </p:sp>
       <p:sp>
         <p:nvSpPr>
-          <p:cNvPr id="92" name="t3_88"/>
+          <p:cNvPr id="128" name="t3_125"/>
           <p:cNvSpPr txBox="1"/>
           <p:nvPr/>
         </p:nvSpPr>
@@ -21387,7 +22795,7 @@
       </p:sp>
       <p:sp>
         <p:nvSpPr>
-          <p:cNvPr id="93" name="t3_89"/>
+          <p:cNvPr id="129" name="t3_126"/>
           <p:cNvSpPr txBox="1"/>
           <p:nvPr/>
         </p:nvSpPr>
@@ -21429,7 +22837,7 @@
       </p:sp>
       <p:sp>
         <p:nvSpPr>
-          <p:cNvPr id="94" name="t3_90"/>
+          <p:cNvPr id="130" name="t3_127"/>
           <p:cNvSpPr txBox="1"/>
           <p:nvPr/>
         </p:nvSpPr>
@@ -21471,7 +22879,7 @@
       </p:sp>
       <p:sp>
         <p:nvSpPr>
-          <p:cNvPr id="95" name="t3_91"/>
+          <p:cNvPr id="131" name="t3_128"/>
           <p:cNvSpPr txBox="1"/>
           <p:nvPr/>
         </p:nvSpPr>
@@ -21513,7 +22921,7 @@
       </p:sp>
       <p:sp>
         <p:nvSpPr>
-          <p:cNvPr id="96" name="t3_92"/>
+          <p:cNvPr id="132" name="t3_129"/>
           <p:cNvSpPr txBox="1"/>
           <p:nvPr/>
         </p:nvSpPr>
@@ -21810,7 +23218,7 @@
       </p:sp>
       <p:sp>
         <p:nvSpPr>
-          <p:cNvPr id="97" name="t3_93"/>
+          <p:cNvPr id="133" name="t3_130"/>
           <p:cNvSpPr txBox="1"/>
           <p:nvPr/>
         </p:nvSpPr>
@@ -21852,7 +23260,7 @@
       </p:sp>
       <p:sp>
         <p:nvSpPr>
-          <p:cNvPr id="98" name="t3_94"/>
+          <p:cNvPr id="134" name="t3_131"/>
           <p:cNvSpPr txBox="1"/>
           <p:nvPr/>
         </p:nvSpPr>
@@ -21894,223 +23302,7 @@
       </p:sp>
       <p:pic>
         <p:nvPicPr>
-          <p:cNvPr id="99" name="Image 2" descr="preencoded.png">    </p:cNvPr>
-          <p:cNvPicPr>
-            <a:picLocks noChangeAspect="1"/>
-          </p:cNvPicPr>
-          <p:nvPr/>
-        </p:nvPicPr>
-        <p:blipFill>
-          <a:blip r:embed="rId3"/>
-          <a:stretch>
-            <a:fillRect/>
-          </a:stretch>
-        </p:blipFill>
-        <p:spPr>
-          <a:xfrm>
-            <a:off x="8166100" y="4152900"/>
-            <a:ext cx="990600" cy="508000"/>
-          </a:xfrm>
-          <a:prstGeom prst="rect">
-            <a:avLst/>
-          </a:prstGeom>
-        </p:spPr>
-      </p:pic>
-      <p:sp>
-        <p:nvSpPr>
-          <p:cNvPr id="100" name="t3_96"/>
-          <p:cNvSpPr txBox="1"/>
-          <p:nvPr/>
-        </p:nvSpPr>
-        <p:spPr>
-          <a:xfrm>
-            <a:off x="8166100" y="4686300"/>
-            <a:ext cx="1095756" cy="127000"/>
-          </a:xfrm>
-          <a:prstGeom prst="rect">
-            <a:avLst/>
-          </a:prstGeom>
-          <a:noFill/>
-          <a:ln/>
-        </p:spPr>
-        <p:txBody>
-          <a:bodyPr wrap="none" lIns="0" tIns="0" rIns="0" bIns="0" rtlCol="0" anchor="t"/>
-          <a:lstStyle/>
-          <a:p>
-            <a:pPr algn="l" indent="0" marL="0">
-              <a:lnSpc>
-                <a:spcPts val="858"/>
-              </a:lnSpc>
-              <a:buNone/>
-            </a:pPr>
-            <a:r>
-              <a:rPr lang="en-US" sz="660" dirty="0">
-                <a:solidFill>
-                  <a:srgbClr val="222222"/>
-                </a:solidFill>
-                <a:latin typeface="Yu Gothic" pitchFamily="34" charset="0"/>
-                <a:ea typeface="Yu Gothic" pitchFamily="34" charset="-122"/>
-                <a:cs typeface="Yu Gothic" pitchFamily="34" charset="-120"/>
-              </a:rPr>
-              <a:t>鉄鉱石</a:t>
-            </a:r>
-            <a:endParaRPr lang="en-US" sz="660" dirty="0"/>
-          </a:p>
-        </p:txBody>
-      </p:sp>
-      <p:sp>
-        <p:nvSpPr>
-          <p:cNvPr id="101" name="t3_97"/>
-          <p:cNvSpPr txBox="1"/>
-          <p:nvPr/>
-        </p:nvSpPr>
-        <p:spPr>
-          <a:xfrm>
-            <a:off x="8166100" y="4813300"/>
-            <a:ext cx="1042924" cy="213122"/>
-          </a:xfrm>
-          <a:prstGeom prst="rect">
-            <a:avLst/>
-          </a:prstGeom>
-          <a:noFill/>
-          <a:ln/>
-        </p:spPr>
-        <p:txBody>
-          <a:bodyPr wrap="square" lIns="0" tIns="0" rIns="0" bIns="0" rtlCol="0" anchor="t"/>
-          <a:lstStyle/>
-          <a:p>
-            <a:pPr algn="l" indent="0" marL="0">
-              <a:lnSpc>
-                <a:spcPts val="840"/>
-              </a:lnSpc>
-              <a:buNone/>
-            </a:pPr>
-            <a:r>
-              <a:rPr lang="en-US" sz="560" dirty="0">
-                <a:solidFill>
-                  <a:srgbClr val="9AA0A6"/>
-                </a:solidFill>
-                <a:latin typeface="Yu Gothic" pitchFamily="34" charset="0"/>
-                <a:ea typeface="Yu Gothic" pitchFamily="34" charset="-122"/>
-                <a:cs typeface="Yu Gothic" pitchFamily="34" charset="-120"/>
-              </a:rPr>
-              <a:t>ＸＸＸＸＸＸＸＸＸＸＸＸＸＸＸＸＸＸＸＸＸＸＸＸ</a:t>
-            </a:r>
-            <a:endParaRPr lang="en-US" sz="560" dirty="0"/>
-          </a:p>
-        </p:txBody>
-      </p:sp>
-      <p:pic>
-        <p:nvPicPr>
-          <p:cNvPr id="102" name="Image 3" descr="preencoded.png">    </p:cNvPr>
-          <p:cNvPicPr>
-            <a:picLocks noChangeAspect="1"/>
-          </p:cNvPicPr>
-          <p:nvPr/>
-        </p:nvPicPr>
-        <p:blipFill>
-          <a:blip r:embed="rId4"/>
-          <a:stretch>
-            <a:fillRect/>
-          </a:stretch>
-        </p:blipFill>
-        <p:spPr>
-          <a:xfrm>
-            <a:off x="9232900" y="4152900"/>
-            <a:ext cx="990600" cy="508000"/>
-          </a:xfrm>
-          <a:prstGeom prst="rect">
-            <a:avLst/>
-          </a:prstGeom>
-        </p:spPr>
-      </p:pic>
-      <p:sp>
-        <p:nvSpPr>
-          <p:cNvPr id="103" name="t3_99"/>
-          <p:cNvSpPr txBox="1"/>
-          <p:nvPr/>
-        </p:nvSpPr>
-        <p:spPr>
-          <a:xfrm>
-            <a:off x="9232900" y="4686300"/>
-            <a:ext cx="1095756" cy="127000"/>
-          </a:xfrm>
-          <a:prstGeom prst="rect">
-            <a:avLst/>
-          </a:prstGeom>
-          <a:noFill/>
-          <a:ln/>
-        </p:spPr>
-        <p:txBody>
-          <a:bodyPr wrap="none" lIns="0" tIns="0" rIns="0" bIns="0" rtlCol="0" anchor="t"/>
-          <a:lstStyle/>
-          <a:p>
-            <a:pPr algn="l" indent="0" marL="0">
-              <a:lnSpc>
-                <a:spcPts val="858"/>
-              </a:lnSpc>
-              <a:buNone/>
-            </a:pPr>
-            <a:r>
-              <a:rPr lang="en-US" sz="660" dirty="0">
-                <a:solidFill>
-                  <a:srgbClr val="222222"/>
-                </a:solidFill>
-                <a:latin typeface="Yu Gothic" pitchFamily="34" charset="0"/>
-                <a:ea typeface="Yu Gothic" pitchFamily="34" charset="-122"/>
-                <a:cs typeface="Yu Gothic" pitchFamily="34" charset="-120"/>
-              </a:rPr>
-              <a:t>電池資源（ニッケル）</a:t>
-            </a:r>
-            <a:endParaRPr lang="en-US" sz="660" dirty="0"/>
-          </a:p>
-        </p:txBody>
-      </p:sp>
-      <p:sp>
-        <p:nvSpPr>
-          <p:cNvPr id="104" name="t3_100"/>
-          <p:cNvSpPr txBox="1"/>
-          <p:nvPr/>
-        </p:nvSpPr>
-        <p:spPr>
-          <a:xfrm>
-            <a:off x="9232900" y="4813300"/>
-            <a:ext cx="1042924" cy="213122"/>
-          </a:xfrm>
-          <a:prstGeom prst="rect">
-            <a:avLst/>
-          </a:prstGeom>
-          <a:noFill/>
-          <a:ln/>
-        </p:spPr>
-        <p:txBody>
-          <a:bodyPr wrap="square" lIns="0" tIns="0" rIns="0" bIns="0" rtlCol="0" anchor="t"/>
-          <a:lstStyle/>
-          <a:p>
-            <a:pPr algn="l" indent="0" marL="0">
-              <a:lnSpc>
-                <a:spcPts val="840"/>
-              </a:lnSpc>
-              <a:buNone/>
-            </a:pPr>
-            <a:r>
-              <a:rPr lang="en-US" sz="560" dirty="0">
-                <a:solidFill>
-                  <a:srgbClr val="9AA0A6"/>
-                </a:solidFill>
-                <a:latin typeface="Yu Gothic" pitchFamily="34" charset="0"/>
-                <a:ea typeface="Yu Gothic" pitchFamily="34" charset="-122"/>
-                <a:cs typeface="Yu Gothic" pitchFamily="34" charset="-120"/>
-              </a:rPr>
-              <a:t>ＸＸＸＸＸＸＸＸＸＸＸＸＸＸＸＸＸＸＸＸＸＸＸＸ</a:t>
-            </a:r>
-            <a:endParaRPr lang="en-US" sz="560" dirty="0"/>
-          </a:p>
-        </p:txBody>
-      </p:sp>
-      <p:pic>
-        <p:nvPicPr>
-          <p:cNvPr id="105" name="Image 4" descr="preencoded.png">    </p:cNvPr>
+          <p:cNvPr id="135" name="Image 4" descr="preencoded.png">    </p:cNvPr>
           <p:cNvPicPr>
             <a:picLocks noChangeAspect="1"/>
           </p:cNvPicPr>
@@ -22124,6 +23316,222 @@
         </p:blipFill>
         <p:spPr>
           <a:xfrm>
+            <a:off x="8166100" y="4152900"/>
+            <a:ext cx="990600" cy="508000"/>
+          </a:xfrm>
+          <a:prstGeom prst="rect">
+            <a:avLst/>
+          </a:prstGeom>
+        </p:spPr>
+      </p:pic>
+      <p:sp>
+        <p:nvSpPr>
+          <p:cNvPr id="136" name="t3_133"/>
+          <p:cNvSpPr txBox="1"/>
+          <p:nvPr/>
+        </p:nvSpPr>
+        <p:spPr>
+          <a:xfrm>
+            <a:off x="8166100" y="4686300"/>
+            <a:ext cx="1095756" cy="127000"/>
+          </a:xfrm>
+          <a:prstGeom prst="rect">
+            <a:avLst/>
+          </a:prstGeom>
+          <a:noFill/>
+          <a:ln/>
+        </p:spPr>
+        <p:txBody>
+          <a:bodyPr wrap="none" lIns="0" tIns="0" rIns="0" bIns="0" rtlCol="0" anchor="t"/>
+          <a:lstStyle/>
+          <a:p>
+            <a:pPr algn="l" indent="0" marL="0">
+              <a:lnSpc>
+                <a:spcPts val="858"/>
+              </a:lnSpc>
+              <a:buNone/>
+            </a:pPr>
+            <a:r>
+              <a:rPr lang="en-US" sz="660" dirty="0">
+                <a:solidFill>
+                  <a:srgbClr val="222222"/>
+                </a:solidFill>
+                <a:latin typeface="Yu Gothic" pitchFamily="34" charset="0"/>
+                <a:ea typeface="Yu Gothic" pitchFamily="34" charset="-122"/>
+                <a:cs typeface="Yu Gothic" pitchFamily="34" charset="-120"/>
+              </a:rPr>
+              <a:t>鉄鉱石</a:t>
+            </a:r>
+            <a:endParaRPr lang="en-US" sz="660" dirty="0"/>
+          </a:p>
+        </p:txBody>
+      </p:sp>
+      <p:sp>
+        <p:nvSpPr>
+          <p:cNvPr id="137" name="t3_134"/>
+          <p:cNvSpPr txBox="1"/>
+          <p:nvPr/>
+        </p:nvSpPr>
+        <p:spPr>
+          <a:xfrm>
+            <a:off x="8166100" y="4813300"/>
+            <a:ext cx="1042924" cy="213122"/>
+          </a:xfrm>
+          <a:prstGeom prst="rect">
+            <a:avLst/>
+          </a:prstGeom>
+          <a:noFill/>
+          <a:ln/>
+        </p:spPr>
+        <p:txBody>
+          <a:bodyPr wrap="square" lIns="0" tIns="0" rIns="0" bIns="0" rtlCol="0" anchor="t"/>
+          <a:lstStyle/>
+          <a:p>
+            <a:pPr algn="l" indent="0" marL="0">
+              <a:lnSpc>
+                <a:spcPts val="840"/>
+              </a:lnSpc>
+              <a:buNone/>
+            </a:pPr>
+            <a:r>
+              <a:rPr lang="en-US" sz="560" dirty="0">
+                <a:solidFill>
+                  <a:srgbClr val="9AA0A6"/>
+                </a:solidFill>
+                <a:latin typeface="Yu Gothic" pitchFamily="34" charset="0"/>
+                <a:ea typeface="Yu Gothic" pitchFamily="34" charset="-122"/>
+                <a:cs typeface="Yu Gothic" pitchFamily="34" charset="-120"/>
+              </a:rPr>
+              <a:t>ＸＸＸＸＸＸＸＸＸＸＸＸＸＸＸＸＸＸＸＸＸＸＸＸ</a:t>
+            </a:r>
+            <a:endParaRPr lang="en-US" sz="560" dirty="0"/>
+          </a:p>
+        </p:txBody>
+      </p:sp>
+      <p:pic>
+        <p:nvPicPr>
+          <p:cNvPr id="138" name="Image 5" descr="preencoded.png">    </p:cNvPr>
+          <p:cNvPicPr>
+            <a:picLocks noChangeAspect="1"/>
+          </p:cNvPicPr>
+          <p:nvPr/>
+        </p:nvPicPr>
+        <p:blipFill>
+          <a:blip r:embed="rId6"/>
+          <a:stretch>
+            <a:fillRect/>
+          </a:stretch>
+        </p:blipFill>
+        <p:spPr>
+          <a:xfrm>
+            <a:off x="9232900" y="4152900"/>
+            <a:ext cx="990600" cy="508000"/>
+          </a:xfrm>
+          <a:prstGeom prst="rect">
+            <a:avLst/>
+          </a:prstGeom>
+        </p:spPr>
+      </p:pic>
+      <p:sp>
+        <p:nvSpPr>
+          <p:cNvPr id="139" name="t3_136"/>
+          <p:cNvSpPr txBox="1"/>
+          <p:nvPr/>
+        </p:nvSpPr>
+        <p:spPr>
+          <a:xfrm>
+            <a:off x="9232900" y="4686300"/>
+            <a:ext cx="1095756" cy="127000"/>
+          </a:xfrm>
+          <a:prstGeom prst="rect">
+            <a:avLst/>
+          </a:prstGeom>
+          <a:noFill/>
+          <a:ln/>
+        </p:spPr>
+        <p:txBody>
+          <a:bodyPr wrap="none" lIns="0" tIns="0" rIns="0" bIns="0" rtlCol="0" anchor="t"/>
+          <a:lstStyle/>
+          <a:p>
+            <a:pPr algn="l" indent="0" marL="0">
+              <a:lnSpc>
+                <a:spcPts val="858"/>
+              </a:lnSpc>
+              <a:buNone/>
+            </a:pPr>
+            <a:r>
+              <a:rPr lang="en-US" sz="660" dirty="0">
+                <a:solidFill>
+                  <a:srgbClr val="222222"/>
+                </a:solidFill>
+                <a:latin typeface="Yu Gothic" pitchFamily="34" charset="0"/>
+                <a:ea typeface="Yu Gothic" pitchFamily="34" charset="-122"/>
+                <a:cs typeface="Yu Gothic" pitchFamily="34" charset="-120"/>
+              </a:rPr>
+              <a:t>電池資源（ニッケル）</a:t>
+            </a:r>
+            <a:endParaRPr lang="en-US" sz="660" dirty="0"/>
+          </a:p>
+        </p:txBody>
+      </p:sp>
+      <p:sp>
+        <p:nvSpPr>
+          <p:cNvPr id="140" name="t3_137"/>
+          <p:cNvSpPr txBox="1"/>
+          <p:nvPr/>
+        </p:nvSpPr>
+        <p:spPr>
+          <a:xfrm>
+            <a:off x="9232900" y="4813300"/>
+            <a:ext cx="1042924" cy="213122"/>
+          </a:xfrm>
+          <a:prstGeom prst="rect">
+            <a:avLst/>
+          </a:prstGeom>
+          <a:noFill/>
+          <a:ln/>
+        </p:spPr>
+        <p:txBody>
+          <a:bodyPr wrap="square" lIns="0" tIns="0" rIns="0" bIns="0" rtlCol="0" anchor="t"/>
+          <a:lstStyle/>
+          <a:p>
+            <a:pPr algn="l" indent="0" marL="0">
+              <a:lnSpc>
+                <a:spcPts val="840"/>
+              </a:lnSpc>
+              <a:buNone/>
+            </a:pPr>
+            <a:r>
+              <a:rPr lang="en-US" sz="560" dirty="0">
+                <a:solidFill>
+                  <a:srgbClr val="9AA0A6"/>
+                </a:solidFill>
+                <a:latin typeface="Yu Gothic" pitchFamily="34" charset="0"/>
+                <a:ea typeface="Yu Gothic" pitchFamily="34" charset="-122"/>
+                <a:cs typeface="Yu Gothic" pitchFamily="34" charset="-120"/>
+              </a:rPr>
+              <a:t>ＸＸＸＸＸＸＸＸＸＸＸＸＸＸＸＸＸＸＸＸＸＸＸＸ</a:t>
+            </a:r>
+            <a:endParaRPr lang="en-US" sz="560" dirty="0"/>
+          </a:p>
+        </p:txBody>
+      </p:sp>
+      <p:pic>
+        <p:nvPicPr>
+          <p:cNvPr id="141" name="Image 6" descr="preencoded.png">    </p:cNvPr>
+          <p:cNvPicPr>
+            <a:picLocks noChangeAspect="1"/>
+          </p:cNvPicPr>
+          <p:nvPr/>
+        </p:nvPicPr>
+        <p:blipFill>
+          <a:blip r:embed="rId7"/>
+          <a:stretch>
+            <a:fillRect/>
+          </a:stretch>
+        </p:blipFill>
+        <p:spPr>
+          <a:xfrm>
             <a:off x="10299700" y="4152900"/>
             <a:ext cx="990600" cy="508000"/>
           </a:xfrm>
@@ -22134,7 +23542,7 @@
       </p:pic>
       <p:sp>
         <p:nvSpPr>
-          <p:cNvPr id="106" name="t3_102"/>
+          <p:cNvPr id="142" name="t3_139"/>
           <p:cNvSpPr txBox="1"/>
           <p:nvPr/>
         </p:nvSpPr>
@@ -22176,7 +23584,7 @@
       </p:sp>
       <p:sp>
         <p:nvSpPr>
-          <p:cNvPr id="107" name="t3_103"/>
+          <p:cNvPr id="143" name="t3_140"/>
           <p:cNvSpPr txBox="1"/>
           <p:nvPr/>
         </p:nvSpPr>
@@ -22218,7 +23626,7 @@
       </p:sp>
       <p:sp>
         <p:nvSpPr>
-          <p:cNvPr id="108" name="t3_104"/>
+          <p:cNvPr id="144" name="t3_141"/>
           <p:cNvSpPr txBox="1"/>
           <p:nvPr/>
         </p:nvSpPr>
@@ -22267,7 +23675,7 @@
       </p:sp>
       <p:sp>
         <p:nvSpPr>
-          <p:cNvPr id="109" name="t3_105"/>
+          <p:cNvPr id="145" name="t3_142"/>
           <p:cNvSpPr txBox="1"/>
           <p:nvPr/>
         </p:nvSpPr>
@@ -22309,7 +23717,7 @@
       </p:sp>
       <p:sp>
         <p:nvSpPr>
-          <p:cNvPr id="110" name="t3_106"/>
+          <p:cNvPr id="146" name="t3_143"/>
           <p:cNvSpPr txBox="1"/>
           <p:nvPr/>
         </p:nvSpPr>
@@ -22351,14 +23759,14 @@
       </p:sp>
       <p:pic>
         <p:nvPicPr>
-          <p:cNvPr id="111" name="Image 5" descr="preencoded.png">    </p:cNvPr>
+          <p:cNvPr id="147" name="Image 7" descr="preencoded.png">    </p:cNvPr>
           <p:cNvPicPr>
             <a:picLocks noChangeAspect="1"/>
           </p:cNvPicPr>
           <p:nvPr/>
         </p:nvPicPr>
         <p:blipFill>
-          <a:blip r:embed="rId6"/>
+          <a:blip r:embed="rId8"/>
           <a:stretch>
             <a:fillRect/>
           </a:stretch>
@@ -22375,7 +23783,7 @@
       </p:pic>
       <p:sp>
         <p:nvSpPr>
-          <p:cNvPr id="112" name="t3_108"/>
+          <p:cNvPr id="148" name="t3_145"/>
           <p:cNvSpPr txBox="1"/>
           <p:nvPr/>
         </p:nvSpPr>
@@ -22417,7 +23825,7 @@
       </p:sp>
       <p:sp>
         <p:nvSpPr>
-          <p:cNvPr id="113" name="t3_109"/>
+          <p:cNvPr id="149" name="t3_146"/>
           <p:cNvSpPr txBox="1"/>
           <p:nvPr/>
         </p:nvSpPr>
@@ -22459,14 +23867,14 @@
       </p:sp>
       <p:pic>
         <p:nvPicPr>
-          <p:cNvPr id="114" name="Image 6" descr="preencoded.png">    </p:cNvPr>
+          <p:cNvPr id="150" name="Image 8" descr="preencoded.png">    </p:cNvPr>
           <p:cNvPicPr>
             <a:picLocks noChangeAspect="1"/>
           </p:cNvPicPr>
           <p:nvPr/>
         </p:nvPicPr>
         <p:blipFill>
-          <a:blip r:embed="rId7"/>
+          <a:blip r:embed="rId9"/>
           <a:stretch>
             <a:fillRect/>
           </a:stretch>
@@ -22483,7 +23891,7 @@
       </p:pic>
       <p:sp>
         <p:nvSpPr>
-          <p:cNvPr id="115" name="t3_111"/>
+          <p:cNvPr id="151" name="t3_148"/>
           <p:cNvSpPr txBox="1"/>
           <p:nvPr/>
         </p:nvSpPr>
@@ -22525,7 +23933,7 @@
       </p:sp>
       <p:sp>
         <p:nvSpPr>
-          <p:cNvPr id="116" name="t3_112"/>
+          <p:cNvPr id="152" name="t3_149"/>
           <p:cNvSpPr txBox="1"/>
           <p:nvPr/>
         </p:nvSpPr>
@@ -22567,7 +23975,7 @@
       </p:sp>
       <p:sp>
         <p:nvSpPr>
-          <p:cNvPr id="117" name="t3_113"/>
+          <p:cNvPr id="153" name="t3_150"/>
           <p:cNvSpPr txBox="1"/>
           <p:nvPr/>
         </p:nvSpPr>
@@ -22609,7 +24017,7 @@
       </p:sp>
       <p:sp>
         <p:nvSpPr>
-          <p:cNvPr id="118" name="Shape 108"/>
+          <p:cNvPr id="154" name="Shape 142"/>
           <p:cNvSpPr/>
           <p:nvPr/>
         </p:nvSpPr>
@@ -22632,7 +24040,7 @@
       </p:sp>
       <p:sp>
         <p:nvSpPr>
-          <p:cNvPr id="119" name="t3_115"/>
+          <p:cNvPr id="155" name="t3_152"/>
           <p:cNvSpPr txBox="1"/>
           <p:nvPr/>
         </p:nvSpPr>
@@ -22674,7 +24082,7 @@
       </p:sp>
       <p:sp>
         <p:nvSpPr>
-          <p:cNvPr id="120" name="t3_116"/>
+          <p:cNvPr id="156" name="t3_153"/>
           <p:cNvSpPr txBox="1"/>
           <p:nvPr/>
         </p:nvSpPr>
@@ -22716,7 +24124,7 @@
       </p:sp>
       <p:sp>
         <p:nvSpPr>
-          <p:cNvPr id="121" name="t3_117"/>
+          <p:cNvPr id="157" name="t3_154"/>
           <p:cNvSpPr txBox="1"/>
           <p:nvPr/>
         </p:nvSpPr>
@@ -22757,7 +24165,7 @@
       </p:sp>
       <p:sp>
         <p:nvSpPr>
-          <p:cNvPr id="122" name="t3_118"/>
+          <p:cNvPr id="158" name="t3_155"/>
           <p:cNvSpPr txBox="1"/>
           <p:nvPr/>
         </p:nvSpPr>
@@ -22816,7 +24224,7 @@
       </p:sp>
       <p:sp>
         <p:nvSpPr>
-          <p:cNvPr id="123" name="t3_119"/>
+          <p:cNvPr id="159" name="t3_156"/>
           <p:cNvSpPr txBox="1"/>
           <p:nvPr/>
         </p:nvSpPr>
@@ -22858,7 +24266,7 @@
       </p:sp>
       <p:sp>
         <p:nvSpPr>
-          <p:cNvPr id="124" name="t3_120"/>
+          <p:cNvPr id="160" name="t3_157"/>
           <p:cNvSpPr txBox="1"/>
           <p:nvPr/>
         </p:nvSpPr>
@@ -22899,7 +24307,7 @@
       </p:sp>
       <p:sp>
         <p:nvSpPr>
-          <p:cNvPr id="125" name="t3_121"/>
+          <p:cNvPr id="161" name="t3_158"/>
           <p:cNvSpPr txBox="1"/>
           <p:nvPr/>
         </p:nvSpPr>
@@ -22958,7 +24366,7 @@
       </p:sp>
       <p:sp>
         <p:nvSpPr>
-          <p:cNvPr id="126" name="t3_122"/>
+          <p:cNvPr id="162" name="t3_159"/>
           <p:cNvSpPr txBox="1"/>
           <p:nvPr/>
         </p:nvSpPr>
@@ -23000,7 +24408,7 @@
       </p:sp>
       <p:sp>
         <p:nvSpPr>
-          <p:cNvPr id="127" name="t3_123"/>
+          <p:cNvPr id="163" name="t3_160"/>
           <p:cNvSpPr txBox="1"/>
           <p:nvPr/>
         </p:nvSpPr>
@@ -23041,7 +24449,7 @@
       </p:sp>
       <p:sp>
         <p:nvSpPr>
-          <p:cNvPr id="128" name="t3_124"/>
+          <p:cNvPr id="164" name="t3_161"/>
           <p:cNvSpPr txBox="1"/>
           <p:nvPr/>
         </p:nvSpPr>
@@ -23100,7 +24508,7 @@
       </p:sp>
       <p:sp>
         <p:nvSpPr>
-          <p:cNvPr id="129" name="t3_125"/>
+          <p:cNvPr id="165" name="t3_162"/>
           <p:cNvSpPr txBox="1"/>
           <p:nvPr/>
         </p:nvSpPr>
@@ -23142,7 +24550,7 @@
       </p:sp>
       <p:sp>
         <p:nvSpPr>
-          <p:cNvPr id="130" name="t3_126"/>
+          <p:cNvPr id="166" name="t3_163"/>
           <p:cNvSpPr txBox="1"/>
           <p:nvPr/>
         </p:nvSpPr>
@@ -23183,7 +24591,7 @@
       </p:sp>
       <p:sp>
         <p:nvSpPr>
-          <p:cNvPr id="131" name="t3_127"/>
+          <p:cNvPr id="167" name="t3_164"/>
           <p:cNvSpPr txBox="1"/>
           <p:nvPr/>
         </p:nvSpPr>
@@ -23225,7 +24633,7 @@
       </p:sp>
       <p:sp>
         <p:nvSpPr>
-          <p:cNvPr id="132" name="Shape 122"/>
+          <p:cNvPr id="168" name="Shape 156"/>
           <p:cNvSpPr/>
           <p:nvPr/>
         </p:nvSpPr>
@@ -23248,7 +24656,7 @@
       </p:sp>
       <p:sp>
         <p:nvSpPr>
-          <p:cNvPr id="133" name="t3_128"/>
+          <p:cNvPr id="169" name="t3_165"/>
           <p:cNvSpPr txBox="1"/>
           <p:nvPr/>
         </p:nvSpPr>
@@ -23290,7 +24698,7 @@
       </p:sp>
       <p:sp>
         <p:nvSpPr>
-          <p:cNvPr id="134" name="Shape 124"/>
+          <p:cNvPr id="170" name="Shape 158"/>
           <p:cNvSpPr/>
           <p:nvPr/>
         </p:nvSpPr>
@@ -23313,7 +24721,7 @@
       </p:sp>
       <p:sp>
         <p:nvSpPr>
-          <p:cNvPr id="135" name="Shape 125"/>
+          <p:cNvPr id="171" name="Shape 159"/>
           <p:cNvSpPr/>
           <p:nvPr/>
         </p:nvSpPr>
@@ -23336,7 +24744,7 @@
       </p:sp>
       <p:sp>
         <p:nvSpPr>
-          <p:cNvPr id="136" name="t3_130"/>
+          <p:cNvPr id="172" name="t3_167"/>
           <p:cNvSpPr txBox="1"/>
           <p:nvPr/>
         </p:nvSpPr>
@@ -23378,7 +24786,7 @@
       </p:sp>
       <p:sp>
         <p:nvSpPr>
-          <p:cNvPr id="137" name="Shape 127"/>
+          <p:cNvPr id="173" name="Shape 161"/>
           <p:cNvSpPr/>
           <p:nvPr/>
         </p:nvSpPr>
@@ -23401,7 +24809,7 @@
       </p:sp>
       <p:sp>
         <p:nvSpPr>
-          <p:cNvPr id="138" name="Shape 128"/>
+          <p:cNvPr id="174" name="Shape 162"/>
           <p:cNvSpPr/>
           <p:nvPr/>
         </p:nvSpPr>
@@ -23424,7 +24832,7 @@
       </p:sp>
       <p:sp>
         <p:nvSpPr>
-          <p:cNvPr id="139" name="t3_132"/>
+          <p:cNvPr id="175" name="t3_169"/>
           <p:cNvSpPr txBox="1"/>
           <p:nvPr/>
         </p:nvSpPr>
@@ -23486,7 +24894,7 @@
       </p:sp>
       <p:sp>
         <p:nvSpPr>
-          <p:cNvPr id="140" name="Shape 130"/>
+          <p:cNvPr id="176" name="Shape 164"/>
           <p:cNvSpPr/>
           <p:nvPr/>
         </p:nvSpPr>
@@ -23509,7 +24917,7 @@
       </p:sp>
       <p:sp>
         <p:nvSpPr>
-          <p:cNvPr id="141" name="t3_134"/>
+          <p:cNvPr id="177" name="t3_171"/>
           <p:cNvSpPr txBox="1"/>
           <p:nvPr/>
         </p:nvSpPr>
@@ -23573,7 +24981,7 @@
       </p:sp>
       <p:sp>
         <p:nvSpPr>
-          <p:cNvPr id="142" name="t3_135"/>
+          <p:cNvPr id="178" name="t3_172"/>
           <p:cNvSpPr txBox="1"/>
           <p:nvPr/>
         </p:nvSpPr>
@@ -23617,7 +25025,7 @@
       </p:sp>
       <p:sp>
         <p:nvSpPr>
-          <p:cNvPr id="143" name="t3_136"/>
+          <p:cNvPr id="179" name="t3_173"/>
           <p:cNvSpPr txBox="1"/>
           <p:nvPr/>
         </p:nvSpPr>
@@ -23661,7 +25069,7 @@
       </p:sp>
       <p:sp>
         <p:nvSpPr>
-          <p:cNvPr id="144" name="t3_137"/>
+          <p:cNvPr id="180" name="t3_174"/>
           <p:cNvSpPr txBox="1"/>
           <p:nvPr/>
         </p:nvSpPr>
@@ -23747,7 +25155,7 @@
       </p:sp>
       <p:sp>
         <p:nvSpPr>
-          <p:cNvPr id="145" name="t3_138"/>
+          <p:cNvPr id="181" name="t3_175"/>
           <p:cNvSpPr txBox="1"/>
           <p:nvPr/>
         </p:nvSpPr>
@@ -23833,7 +25241,7 @@
       </p:sp>
       <p:sp>
         <p:nvSpPr>
-          <p:cNvPr id="146" name="t3_139"/>
+          <p:cNvPr id="182" name="t3_176"/>
           <p:cNvSpPr txBox="1"/>
           <p:nvPr/>
         </p:nvSpPr>
@@ -23919,7 +25327,7 @@
       </p:sp>
       <p:sp>
         <p:nvSpPr>
-          <p:cNvPr id="147" name="t3_140"/>
+          <p:cNvPr id="183" name="t3_177"/>
           <p:cNvSpPr txBox="1"/>
           <p:nvPr/>
         </p:nvSpPr>
@@ -23961,7 +25369,7 @@
       </p:sp>
       <p:sp>
         <p:nvSpPr>
-          <p:cNvPr id="148" name="t3_141"/>
+          <p:cNvPr id="184" name="t3_178"/>
           <p:cNvSpPr txBox="1"/>
           <p:nvPr/>
         </p:nvSpPr>
@@ -24054,7 +25462,7 @@
       </p:sp>
       <p:sp>
         <p:nvSpPr>
-          <p:cNvPr id="149" name="t3_142"/>
+          <p:cNvPr id="185" name="t3_179"/>
           <p:cNvSpPr txBox="1"/>
           <p:nvPr/>
         </p:nvSpPr>
@@ -24096,7 +25504,7 @@
       </p:sp>
       <p:sp>
         <p:nvSpPr>
-          <p:cNvPr id="150" name="t3_143"/>
+          <p:cNvPr id="186" name="t3_180"/>
           <p:cNvSpPr txBox="1"/>
           <p:nvPr/>
         </p:nvSpPr>
@@ -24138,7 +25546,7 @@
       </p:sp>
       <p:sp>
         <p:nvSpPr>
-          <p:cNvPr id="151" name="t3_144"/>
+          <p:cNvPr id="187" name="t3_181"/>
           <p:cNvSpPr txBox="1"/>
           <p:nvPr/>
         </p:nvSpPr>
@@ -24180,7 +25588,7 @@
       </p:sp>
       <p:sp>
         <p:nvSpPr>
-          <p:cNvPr id="152" name="t3_145"/>
+          <p:cNvPr id="188" name="t3_182"/>
           <p:cNvSpPr txBox="1"/>
           <p:nvPr/>
         </p:nvSpPr>
@@ -24222,7 +25630,7 @@
       </p:sp>
       <p:sp>
         <p:nvSpPr>
-          <p:cNvPr id="153" name="t3_146"/>
+          <p:cNvPr id="189" name="t3_183"/>
           <p:cNvSpPr txBox="1"/>
           <p:nvPr/>
         </p:nvSpPr>
@@ -24263,7 +25671,7 @@
       </p:sp>
       <p:sp>
         <p:nvSpPr>
-          <p:cNvPr id="154" name="Shape 144"/>
+          <p:cNvPr id="190" name="Shape 178"/>
           <p:cNvSpPr/>
           <p:nvPr/>
         </p:nvSpPr>
@@ -24376,13 +25784,10 @@
           </a:ln>
         </p:spPr>
         <p:txBody>
-          <a:bodyPr wrap="square" lIns="25400" tIns="38100" rIns="38100" bIns="25400" rtlCol="0" anchor="t"/>
-          <a:lstStyle/>
-          <a:p>
-            <a:pPr algn="l" indent="0" marL="0">
-              <a:lnSpc>
-                <a:spcPts val="858"/>
-              </a:lnSpc>
+          <a:bodyPr wrap="square" lIns="25400" tIns="38100" rIns="38100" bIns="25400" rtlCol="0" anchor="ctr"/>
+          <a:lstStyle/>
+          <a:p>
+            <a:pPr algn="l" indent="0" marL="0">
               <a:buNone/>
             </a:pPr>
             <a:r>
@@ -25419,9 +26824,6 @@
           <a:lstStyle/>
           <a:p>
             <a:pPr algn="ctr" indent="0" marL="0">
-              <a:lnSpc>
-                <a:spcPts val="999"/>
-              </a:lnSpc>
               <a:buNone/>
             </a:pPr>
             <a:r>
@@ -25466,9 +26868,6 @@
           <a:lstStyle/>
           <a:p>
             <a:pPr algn="ctr" indent="0" marL="0">
-              <a:lnSpc>
-                <a:spcPts val="999"/>
-              </a:lnSpc>
               <a:buNone/>
             </a:pPr>
             <a:r>
@@ -25513,9 +26912,6 @@
           <a:lstStyle/>
           <a:p>
             <a:pPr algn="ctr" indent="0" marL="0">
-              <a:lnSpc>
-                <a:spcPts val="999"/>
-              </a:lnSpc>
               <a:buNone/>
             </a:pPr>
             <a:r>
@@ -26288,13 +27684,10 @@
           </a:ln>
         </p:spPr>
         <p:txBody>
-          <a:bodyPr wrap="square" lIns="25400" tIns="38100" rIns="38100" bIns="25400" rtlCol="0" anchor="t"/>
-          <a:lstStyle/>
-          <a:p>
-            <a:pPr algn="l" indent="0" marL="0">
-              <a:lnSpc>
-                <a:spcPts val="858"/>
-              </a:lnSpc>
+          <a:bodyPr wrap="square" lIns="25400" tIns="38100" rIns="38100" bIns="25400" rtlCol="0" anchor="ctr"/>
+          <a:lstStyle/>
+          <a:p>
+            <a:pPr algn="l" indent="0" marL="0">
               <a:buNone/>
             </a:pPr>
             <a:r>
@@ -26855,9 +28248,6 @@
           <a:lstStyle/>
           <a:p>
             <a:pPr algn="ctr" indent="0" marL="0">
-              <a:lnSpc>
-                <a:spcPts val="1026"/>
-              </a:lnSpc>
               <a:buNone/>
             </a:pPr>
             <a:r>
@@ -27827,13 +29217,10 @@
           </a:ln>
         </p:spPr>
         <p:txBody>
-          <a:bodyPr wrap="square" lIns="25400" tIns="38100" rIns="38100" bIns="25400" rtlCol="0" anchor="t"/>
+          <a:bodyPr wrap="square" lIns="25400" tIns="38100" rIns="38100" bIns="25400" rtlCol="0" anchor="ctr"/>
           <a:lstStyle/>
           <a:p>
             <a:pPr algn="ctr" indent="0" marL="0">
-              <a:lnSpc>
-                <a:spcPts val="1040"/>
-              </a:lnSpc>
               <a:buNone/>
             </a:pPr>
             <a:r>
